--- a/downloads/presentations/modules/lesson-40-ai-security-prompt-injection-and-data-leakage.pptx
+++ b/downloads/presentations/modules/lesson-40-ai-security-prompt-injection-and-data-leakage.pptx
@@ -3090,6 +3090,45 @@
           </a:p>
         </p:txBody>
       </p:sp>
+      <p:sp>
+        <p:nvSpPr>
+          <p:cNvPr id="8" name="Text 5"/>
+          <p:cNvSpPr/>
+          <p:nvPr/>
+        </p:nvSpPr>
+        <p:spPr>
+          <a:xfrm>
+            <a:off x="11137392" y="6510528"/>
+            <a:ext cx="411480" cy="201168"/>
+          </a:xfrm>
+          <a:prstGeom prst="rect">
+            <a:avLst/>
+          </a:prstGeom>
+          <a:noFill/>
+          <a:ln/>
+        </p:spPr>
+        <p:txBody>
+          <a:bodyPr wrap="square" lIns="0" tIns="0" rIns="0" bIns="0" rtlCol="0" anchor="ctr"/>
+          <a:lstStyle/>
+          <a:p>
+            <a:pPr algn="r" indent="0" marL="0">
+              <a:buNone/>
+            </a:pPr>
+            <a:r>
+              <a:rPr lang="en-US" sz="900" dirty="0">
+                <a:solidFill>
+                  <a:srgbClr val="5F7181"/>
+                </a:solidFill>
+                <a:latin typeface="Aptos" pitchFamily="34" charset="0"/>
+                <a:ea typeface="Aptos" pitchFamily="34" charset="-122"/>
+                <a:cs typeface="Aptos" pitchFamily="34" charset="-120"/>
+              </a:rPr>
+              <a:t>1</a:t>
+            </a:r>
+            <a:endParaRPr lang="en-US" sz="900" dirty="0"/>
+          </a:p>
+        </p:txBody>
+      </p:sp>
     </p:spTree>
   </p:cSld>
   <p:clrMapOvr>
@@ -3283,7 +3322,7 @@
                 <a:ea typeface="Aptos" pitchFamily="34" charset="-122"/>
                 <a:cs typeface="Aptos" pitchFamily="34" charset="-120"/>
               </a:rPr>
-              <a:t>© Paula Soper</a:t>
+              <a:t>Â© Paula Soper</a:t>
             </a:r>
             <a:endParaRPr lang="en-US" sz="800" dirty="0"/>
           </a:p>
@@ -3291,7 +3330,46 @@
       </p:sp>
       <p:sp>
         <p:nvSpPr>
-          <p:cNvPr id="7" name="Shape 5"/>
+          <p:cNvPr id="7" name="Text 5"/>
+          <p:cNvSpPr/>
+          <p:nvPr/>
+        </p:nvSpPr>
+        <p:spPr>
+          <a:xfrm>
+            <a:off x="11137392" y="6510528"/>
+            <a:ext cx="411480" cy="201168"/>
+          </a:xfrm>
+          <a:prstGeom prst="rect">
+            <a:avLst/>
+          </a:prstGeom>
+          <a:noFill/>
+          <a:ln/>
+        </p:spPr>
+        <p:txBody>
+          <a:bodyPr wrap="square" lIns="0" tIns="0" rIns="0" bIns="0" rtlCol="0" anchor="ctr"/>
+          <a:lstStyle/>
+          <a:p>
+            <a:pPr algn="r" indent="0" marL="0">
+              <a:buNone/>
+            </a:pPr>
+            <a:r>
+              <a:rPr lang="en-US" sz="900" dirty="0">
+                <a:solidFill>
+                  <a:srgbClr val="5F7181"/>
+                </a:solidFill>
+                <a:latin typeface="Aptos" pitchFamily="34" charset="0"/>
+                <a:ea typeface="Aptos" pitchFamily="34" charset="-122"/>
+                <a:cs typeface="Aptos" pitchFamily="34" charset="-120"/>
+              </a:rPr>
+              <a:t>10</a:t>
+            </a:r>
+            <a:endParaRPr lang="en-US" sz="900" dirty="0"/>
+          </a:p>
+        </p:txBody>
+      </p:sp>
+      <p:sp>
+        <p:nvSpPr>
+          <p:cNvPr id="8" name="Shape 6"/>
           <p:cNvSpPr/>
           <p:nvPr/>
         </p:nvSpPr>
@@ -3316,7 +3394,7 @@
       </p:sp>
       <p:sp>
         <p:nvSpPr>
-          <p:cNvPr id="8" name="Text 6"/>
+          <p:cNvPr id="9" name="Text 7"/>
           <p:cNvSpPr/>
           <p:nvPr/>
         </p:nvSpPr>
@@ -3355,14 +3433,14 @@
       </p:sp>
       <p:sp>
         <p:nvSpPr>
-          <p:cNvPr id="9" name="Text 7"/>
+          <p:cNvPr id="10" name="Text 8"/>
           <p:cNvSpPr/>
           <p:nvPr/>
         </p:nvSpPr>
         <p:spPr>
           <a:xfrm>
             <a:off x="640080" y="621792"/>
-            <a:ext cx="10881360" cy="566928"/>
+            <a:ext cx="10881360" cy="713232"/>
           </a:xfrm>
           <a:prstGeom prst="rect">
             <a:avLst/>
@@ -3380,7 +3458,7 @@
               <a:buNone/>
             </a:pPr>
             <a:r>
-              <a:rPr lang="en-US" sz="2700" b="1" dirty="0">
+              <a:rPr lang="en-US" sz="3400" b="1" dirty="0">
                 <a:solidFill>
                   <a:srgbClr val="003A63"/>
                 </a:solidFill>
@@ -3390,20 +3468,20 @@
               </a:rPr>
               <a:t>Public Health Example</a:t>
             </a:r>
-            <a:endParaRPr lang="en-US" sz="2700" dirty="0"/>
-          </a:p>
-        </p:txBody>
-      </p:sp>
-      <p:sp>
-        <p:nvSpPr>
-          <p:cNvPr id="10" name="Text 8"/>
-          <p:cNvSpPr/>
-          <p:nvPr/>
-        </p:nvSpPr>
-        <p:spPr>
-          <a:xfrm>
-            <a:off x="868680" y="1417320"/>
-            <a:ext cx="6675120" cy="4434840"/>
+            <a:endParaRPr lang="en-US" sz="3400" dirty="0"/>
+          </a:p>
+        </p:txBody>
+      </p:sp>
+      <p:sp>
+        <p:nvSpPr>
+          <p:cNvPr id="11" name="Text 9"/>
+          <p:cNvSpPr/>
+          <p:nvPr/>
+        </p:nvSpPr>
+        <p:spPr>
+          <a:xfrm>
+            <a:off x="868680" y="1508760"/>
+            <a:ext cx="6537960" cy="4160520"/>
           </a:xfrm>
           <a:prstGeom prst="rect">
             <a:avLst/>
@@ -3418,7 +3496,7 @@
           <a:lstStyle/>
           <a:p>
             <a:r>
-              <a:rPr lang="en-US" sz="1700" dirty="0">
+              <a:rPr lang="en-US" sz="2100" dirty="0">
                 <a:solidFill>
                   <a:srgbClr val="17364A"/>
                 </a:solidFill>
@@ -3428,11 +3506,11 @@
               </a:rPr>
               <a:t>A public health program may use an AI assistant to summarize uploaded partner reports.</a:t>
             </a:r>
-            <a:endParaRPr lang="en-US" sz="1700" dirty="0"/>
-          </a:p>
-          <a:p>
-            <a:r>
-              <a:rPr lang="en-US" sz="1700" dirty="0">
+            <a:endParaRPr lang="en-US" sz="2100" dirty="0"/>
+          </a:p>
+          <a:p>
+            <a:r>
+              <a:rPr lang="en-US" sz="2100" dirty="0">
                 <a:solidFill>
                   <a:srgbClr val="17364A"/>
                 </a:solidFill>
@@ -3440,13 +3518,13 @@
                 <a:ea typeface="Aptos" pitchFamily="34" charset="-122"/>
                 <a:cs typeface="Aptos" pitchFamily="34" charset="-120"/>
               </a:rPr>
-              <a:t>One report could contain hidden or visible instructions telling the AI to ignore prior rules and reveal confidential.</a:t>
-            </a:r>
-            <a:endParaRPr lang="en-US" sz="1700" dirty="0"/>
-          </a:p>
-          <a:p>
-            <a:r>
-              <a:rPr lang="en-US" sz="1700" dirty="0">
+              <a:t>One report could contain hidden or visible instructions telling the AI to ignore prior rules and reveal.</a:t>
+            </a:r>
+            <a:endParaRPr lang="en-US" sz="2100" dirty="0"/>
+          </a:p>
+          <a:p>
+            <a:r>
+              <a:rPr lang="en-US" sz="2100" dirty="0">
                 <a:solidFill>
                   <a:srgbClr val="17364A"/>
                 </a:solidFill>
@@ -3454,29 +3532,15 @@
                 <a:ea typeface="Aptos" pitchFamily="34" charset="-122"/>
                 <a:cs typeface="Aptos" pitchFamily="34" charset="-120"/>
               </a:rPr>
-              <a:t>If the assistant treats the report content as instructions rather than data, it may produce unsafe outputs or attempt.</a:t>
-            </a:r>
-            <a:endParaRPr lang="en-US" sz="1700" dirty="0"/>
-          </a:p>
-          <a:p>
-            <a:r>
-              <a:rPr lang="en-US" sz="1700" dirty="0">
-                <a:solidFill>
-                  <a:srgbClr val="17364A"/>
-                </a:solidFill>
-                <a:latin typeface="Aptos" pitchFamily="34" charset="0"/>
-                <a:ea typeface="Aptos" pitchFamily="34" charset="-122"/>
-                <a:cs typeface="Aptos" pitchFamily="34" charset="-120"/>
-              </a:rPr>
-              <a:t>A secure workflow would use an approved tool, restrict the assistant’s access, treat uploaded content as untrusted, disable.</a:t>
-            </a:r>
-            <a:endParaRPr lang="en-US" sz="1700" dirty="0"/>
-          </a:p>
-        </p:txBody>
-      </p:sp>
-      <p:sp>
-        <p:nvSpPr>
-          <p:cNvPr id="11" name="Shape 9"/>
+              <a:t>If the assistant treats the report content as instructions rather than data, it may produce unsafe.</a:t>
+            </a:r>
+            <a:endParaRPr lang="en-US" sz="2100" dirty="0"/>
+          </a:p>
+        </p:txBody>
+      </p:sp>
+      <p:sp>
+        <p:nvSpPr>
+          <p:cNvPr id="12" name="Shape 10"/>
           <p:cNvSpPr/>
           <p:nvPr/>
         </p:nvSpPr>
@@ -3503,14 +3567,14 @@
       </p:sp>
       <p:sp>
         <p:nvSpPr>
-          <p:cNvPr id="12" name="Text 10"/>
+          <p:cNvPr id="13" name="Text 11"/>
           <p:cNvSpPr/>
           <p:nvPr/>
         </p:nvSpPr>
         <p:spPr>
           <a:xfrm>
             <a:off x="8074152" y="1563624"/>
-            <a:ext cx="2825496" cy="201168"/>
+            <a:ext cx="2825496" cy="256032"/>
           </a:xfrm>
           <a:prstGeom prst="rect">
             <a:avLst/>
@@ -3526,7 +3590,7 @@
               <a:buNone/>
             </a:pPr>
             <a:r>
-              <a:rPr lang="en-US" sz="950" b="1" dirty="0">
+              <a:rPr lang="en-US" sz="1300" b="1" dirty="0">
                 <a:solidFill>
                   <a:srgbClr val="0068B7"/>
                 </a:solidFill>
@@ -3536,20 +3600,20 @@
               </a:rPr>
               <a:t>Key idea</a:t>
             </a:r>
-            <a:endParaRPr lang="en-US" sz="950" dirty="0"/>
-          </a:p>
-        </p:txBody>
-      </p:sp>
-      <p:sp>
-        <p:nvSpPr>
-          <p:cNvPr id="13" name="Text 11"/>
-          <p:cNvSpPr/>
-          <p:nvPr/>
-        </p:nvSpPr>
-        <p:spPr>
-          <a:xfrm>
-            <a:off x="8074152" y="1856232"/>
-            <a:ext cx="2825496" cy="1261872"/>
+            <a:endParaRPr lang="en-US" sz="1300" dirty="0"/>
+          </a:p>
+        </p:txBody>
+      </p:sp>
+      <p:sp>
+        <p:nvSpPr>
+          <p:cNvPr id="14" name="Text 12"/>
+          <p:cNvSpPr/>
+          <p:nvPr/>
+        </p:nvSpPr>
+        <p:spPr>
+          <a:xfrm>
+            <a:off x="8074152" y="1920240"/>
+            <a:ext cx="2825496" cy="1188720"/>
           </a:xfrm>
           <a:prstGeom prst="rect">
             <a:avLst/>
@@ -3567,7 +3631,7 @@
               <a:buNone/>
             </a:pPr>
             <a:r>
-              <a:rPr lang="en-US" sz="1250" dirty="0">
+              <a:rPr lang="en-US" sz="1550" dirty="0">
                 <a:solidFill>
                   <a:srgbClr val="17364A"/>
                 </a:solidFill>
@@ -3577,13 +3641,13 @@
               </a:rPr>
               <a:t>A public health program may use an AI assistant to summarize uploaded partner reports.</a:t>
             </a:r>
-            <a:endParaRPr lang="en-US" sz="1250" dirty="0"/>
-          </a:p>
-        </p:txBody>
-      </p:sp>
-      <p:sp>
-        <p:nvSpPr>
-          <p:cNvPr id="14" name="Shape 12"/>
+            <a:endParaRPr lang="en-US" sz="1550" dirty="0"/>
+          </a:p>
+        </p:txBody>
+      </p:sp>
+      <p:sp>
+        <p:nvSpPr>
+          <p:cNvPr id="15" name="Shape 13"/>
           <p:cNvSpPr/>
           <p:nvPr/>
         </p:nvSpPr>
@@ -3610,14 +3674,14 @@
       </p:sp>
       <p:sp>
         <p:nvSpPr>
-          <p:cNvPr id="15" name="Text 13"/>
+          <p:cNvPr id="16" name="Text 14"/>
           <p:cNvSpPr/>
           <p:nvPr/>
         </p:nvSpPr>
         <p:spPr>
           <a:xfrm>
             <a:off x="8074152" y="3666744"/>
-            <a:ext cx="2825496" cy="201168"/>
+            <a:ext cx="2825496" cy="256032"/>
           </a:xfrm>
           <a:prstGeom prst="rect">
             <a:avLst/>
@@ -3633,7 +3697,7 @@
               <a:buNone/>
             </a:pPr>
             <a:r>
-              <a:rPr lang="en-US" sz="950" b="1" dirty="0">
+              <a:rPr lang="en-US" sz="1300" b="1" dirty="0">
                 <a:solidFill>
                   <a:srgbClr val="0068B7"/>
                 </a:solidFill>
@@ -3643,20 +3707,20 @@
               </a:rPr>
               <a:t>Use this for</a:t>
             </a:r>
-            <a:endParaRPr lang="en-US" sz="950" dirty="0"/>
-          </a:p>
-        </p:txBody>
-      </p:sp>
-      <p:sp>
-        <p:nvSpPr>
-          <p:cNvPr id="16" name="Text 14"/>
-          <p:cNvSpPr/>
-          <p:nvPr/>
-        </p:nvSpPr>
-        <p:spPr>
-          <a:xfrm>
-            <a:off x="8074152" y="3959352"/>
-            <a:ext cx="2825496" cy="1170432"/>
+            <a:endParaRPr lang="en-US" sz="1300" dirty="0"/>
+          </a:p>
+        </p:txBody>
+      </p:sp>
+      <p:sp>
+        <p:nvSpPr>
+          <p:cNvPr id="17" name="Text 15"/>
+          <p:cNvSpPr/>
+          <p:nvPr/>
+        </p:nvSpPr>
+        <p:spPr>
+          <a:xfrm>
+            <a:off x="8074152" y="4023360"/>
+            <a:ext cx="2825496" cy="1097280"/>
           </a:xfrm>
           <a:prstGeom prst="rect">
             <a:avLst/>
@@ -3674,7 +3738,7 @@
               <a:buNone/>
             </a:pPr>
             <a:r>
-              <a:rPr lang="en-US" sz="1250" dirty="0">
+              <a:rPr lang="en-US" sz="1550" dirty="0">
                 <a:solidFill>
                   <a:srgbClr val="17364A"/>
                 </a:solidFill>
@@ -3684,7 +3748,7 @@
               </a:rPr>
               <a:t>Connect the concept to public health decisions, safeguards, documentation, or implementation work.</a:t>
             </a:r>
-            <a:endParaRPr lang="en-US" sz="1250" dirty="0"/>
+            <a:endParaRPr lang="en-US" sz="1550" dirty="0"/>
           </a:p>
         </p:txBody>
       </p:sp>
@@ -3881,7 +3945,7 @@
                 <a:ea typeface="Aptos" pitchFamily="34" charset="-122"/>
                 <a:cs typeface="Aptos" pitchFamily="34" charset="-120"/>
               </a:rPr>
-              <a:t>© Paula Soper</a:t>
+              <a:t>Â© Paula Soper</a:t>
             </a:r>
             <a:endParaRPr lang="en-US" sz="800" dirty="0"/>
           </a:p>
@@ -3889,7 +3953,46 @@
       </p:sp>
       <p:sp>
         <p:nvSpPr>
-          <p:cNvPr id="7" name="Shape 5"/>
+          <p:cNvPr id="7" name="Text 5"/>
+          <p:cNvSpPr/>
+          <p:nvPr/>
+        </p:nvSpPr>
+        <p:spPr>
+          <a:xfrm>
+            <a:off x="11137392" y="6510528"/>
+            <a:ext cx="411480" cy="201168"/>
+          </a:xfrm>
+          <a:prstGeom prst="rect">
+            <a:avLst/>
+          </a:prstGeom>
+          <a:noFill/>
+          <a:ln/>
+        </p:spPr>
+        <p:txBody>
+          <a:bodyPr wrap="square" lIns="0" tIns="0" rIns="0" bIns="0" rtlCol="0" anchor="ctr"/>
+          <a:lstStyle/>
+          <a:p>
+            <a:pPr algn="r" indent="0" marL="0">
+              <a:buNone/>
+            </a:pPr>
+            <a:r>
+              <a:rPr lang="en-US" sz="900" dirty="0">
+                <a:solidFill>
+                  <a:srgbClr val="5F7181"/>
+                </a:solidFill>
+                <a:latin typeface="Aptos" pitchFamily="34" charset="0"/>
+                <a:ea typeface="Aptos" pitchFamily="34" charset="-122"/>
+                <a:cs typeface="Aptos" pitchFamily="34" charset="-120"/>
+              </a:rPr>
+              <a:t>11</a:t>
+            </a:r>
+            <a:endParaRPr lang="en-US" sz="900" dirty="0"/>
+          </a:p>
+        </p:txBody>
+      </p:sp>
+      <p:sp>
+        <p:nvSpPr>
+          <p:cNvPr id="8" name="Shape 6"/>
           <p:cNvSpPr/>
           <p:nvPr/>
         </p:nvSpPr>
@@ -3914,7 +4017,7 @@
       </p:sp>
       <p:sp>
         <p:nvSpPr>
-          <p:cNvPr id="8" name="Text 6"/>
+          <p:cNvPr id="9" name="Text 7"/>
           <p:cNvSpPr/>
           <p:nvPr/>
         </p:nvSpPr>
@@ -3953,14 +4056,14 @@
       </p:sp>
       <p:sp>
         <p:nvSpPr>
-          <p:cNvPr id="9" name="Text 7"/>
+          <p:cNvPr id="10" name="Text 8"/>
           <p:cNvSpPr/>
           <p:nvPr/>
         </p:nvSpPr>
         <p:spPr>
           <a:xfrm>
             <a:off x="640080" y="621792"/>
-            <a:ext cx="10881360" cy="566928"/>
+            <a:ext cx="10881360" cy="713232"/>
           </a:xfrm>
           <a:prstGeom prst="rect">
             <a:avLst/>
@@ -3978,7 +4081,7 @@
               <a:buNone/>
             </a:pPr>
             <a:r>
-              <a:rPr lang="en-US" sz="2700" b="1" dirty="0">
+              <a:rPr lang="en-US" sz="3400" b="1" dirty="0">
                 <a:solidFill>
                   <a:srgbClr val="003A63"/>
                 </a:solidFill>
@@ -3988,20 +4091,20 @@
               </a:rPr>
               <a:t>Technical Deep Dive</a:t>
             </a:r>
-            <a:endParaRPr lang="en-US" sz="2700" dirty="0"/>
-          </a:p>
-        </p:txBody>
-      </p:sp>
-      <p:sp>
-        <p:nvSpPr>
-          <p:cNvPr id="10" name="Text 8"/>
-          <p:cNvSpPr/>
-          <p:nvPr/>
-        </p:nvSpPr>
-        <p:spPr>
-          <a:xfrm>
-            <a:off x="868680" y="1417320"/>
-            <a:ext cx="6675120" cy="4434840"/>
+            <a:endParaRPr lang="en-US" sz="3400" dirty="0"/>
+          </a:p>
+        </p:txBody>
+      </p:sp>
+      <p:sp>
+        <p:nvSpPr>
+          <p:cNvPr id="11" name="Text 9"/>
+          <p:cNvSpPr/>
+          <p:nvPr/>
+        </p:nvSpPr>
+        <p:spPr>
+          <a:xfrm>
+            <a:off x="868680" y="1508760"/>
+            <a:ext cx="6537960" cy="4160520"/>
           </a:xfrm>
           <a:prstGeom prst="rect">
             <a:avLst/>
@@ -4016,7 +4119,7 @@
           <a:lstStyle/>
           <a:p>
             <a:r>
-              <a:rPr lang="en-US" sz="1700" dirty="0">
+              <a:rPr lang="en-US" sz="2100" dirty="0">
                 <a:solidFill>
                   <a:srgbClr val="17364A"/>
                 </a:solidFill>
@@ -4026,11 +4129,11 @@
               </a:rPr>
               <a:t>AI security begins with use-case classification.</a:t>
             </a:r>
-            <a:endParaRPr lang="en-US" sz="1700" dirty="0"/>
-          </a:p>
-          <a:p>
-            <a:r>
-              <a:rPr lang="en-US" sz="1700" dirty="0">
+            <a:endParaRPr lang="en-US" sz="2100" dirty="0"/>
+          </a:p>
+          <a:p>
+            <a:r>
+              <a:rPr lang="en-US" sz="2100" dirty="0">
                 <a:solidFill>
                   <a:srgbClr val="17364A"/>
                 </a:solidFill>
@@ -4038,13 +4141,13 @@
                 <a:ea typeface="Aptos" pitchFamily="34" charset="-122"/>
                 <a:cs typeface="Aptos" pitchFamily="34" charset="-120"/>
               </a:rPr>
-              <a:t>A low-risk training exercise using public documents requires different controls than a tool connected to case records or.</a:t>
-            </a:r>
-            <a:endParaRPr lang="en-US" sz="1700" dirty="0"/>
-          </a:p>
-          <a:p>
-            <a:r>
-              <a:rPr lang="en-US" sz="1700" dirty="0">
+              <a:t>A low-risk training exercise using public documents requires different controls than a tool connected.</a:t>
+            </a:r>
+            <a:endParaRPr lang="en-US" sz="2100" dirty="0"/>
+          </a:p>
+          <a:p>
+            <a:r>
+              <a:rPr lang="en-US" sz="2100" dirty="0">
                 <a:solidFill>
                   <a:srgbClr val="17364A"/>
                 </a:solidFill>
@@ -4052,29 +4155,15 @@
                 <a:ea typeface="Aptos" pitchFamily="34" charset="-122"/>
                 <a:cs typeface="Aptos" pitchFamily="34" charset="-120"/>
               </a:rPr>
-              <a:t>Agencies should classify AI uses by data sensitivity, system access, autonomy, public-facing impact, and consequence of.</a:t>
-            </a:r>
-            <a:endParaRPr lang="en-US" sz="1700" dirty="0"/>
-          </a:p>
-          <a:p>
-            <a:r>
-              <a:rPr lang="en-US" sz="1700" dirty="0">
-                <a:solidFill>
-                  <a:srgbClr val="17364A"/>
-                </a:solidFill>
-                <a:latin typeface="Aptos" pitchFamily="34" charset="0"/>
-                <a:ea typeface="Aptos" pitchFamily="34" charset="-122"/>
-                <a:cs typeface="Aptos" pitchFamily="34" charset="-120"/>
-              </a:rPr>
-              <a:t>Access control is central.</a:t>
-            </a:r>
-            <a:endParaRPr lang="en-US" sz="1700" dirty="0"/>
-          </a:p>
-        </p:txBody>
-      </p:sp>
-      <p:sp>
-        <p:nvSpPr>
-          <p:cNvPr id="11" name="Shape 9"/>
+              <a:t>Agencies should classify AI uses by data sensitivity, system access, autonomy, public-facing impact,.</a:t>
+            </a:r>
+            <a:endParaRPr lang="en-US" sz="2100" dirty="0"/>
+          </a:p>
+        </p:txBody>
+      </p:sp>
+      <p:sp>
+        <p:nvSpPr>
+          <p:cNvPr id="12" name="Shape 10"/>
           <p:cNvSpPr/>
           <p:nvPr/>
         </p:nvSpPr>
@@ -4101,14 +4190,14 @@
       </p:sp>
       <p:sp>
         <p:nvSpPr>
-          <p:cNvPr id="12" name="Text 10"/>
+          <p:cNvPr id="13" name="Text 11"/>
           <p:cNvSpPr/>
           <p:nvPr/>
         </p:nvSpPr>
         <p:spPr>
           <a:xfrm>
             <a:off x="8074152" y="1563624"/>
-            <a:ext cx="2825496" cy="201168"/>
+            <a:ext cx="2825496" cy="256032"/>
           </a:xfrm>
           <a:prstGeom prst="rect">
             <a:avLst/>
@@ -4124,7 +4213,7 @@
               <a:buNone/>
             </a:pPr>
             <a:r>
-              <a:rPr lang="en-US" sz="950" b="1" dirty="0">
+              <a:rPr lang="en-US" sz="1300" b="1" dirty="0">
                 <a:solidFill>
                   <a:srgbClr val="0068B7"/>
                 </a:solidFill>
@@ -4134,20 +4223,20 @@
               </a:rPr>
               <a:t>Key idea</a:t>
             </a:r>
-            <a:endParaRPr lang="en-US" sz="950" dirty="0"/>
-          </a:p>
-        </p:txBody>
-      </p:sp>
-      <p:sp>
-        <p:nvSpPr>
-          <p:cNvPr id="13" name="Text 11"/>
-          <p:cNvSpPr/>
-          <p:nvPr/>
-        </p:nvSpPr>
-        <p:spPr>
-          <a:xfrm>
-            <a:off x="8074152" y="1856232"/>
-            <a:ext cx="2825496" cy="1261872"/>
+            <a:endParaRPr lang="en-US" sz="1300" dirty="0"/>
+          </a:p>
+        </p:txBody>
+      </p:sp>
+      <p:sp>
+        <p:nvSpPr>
+          <p:cNvPr id="14" name="Text 12"/>
+          <p:cNvSpPr/>
+          <p:nvPr/>
+        </p:nvSpPr>
+        <p:spPr>
+          <a:xfrm>
+            <a:off x="8074152" y="1920240"/>
+            <a:ext cx="2825496" cy="1188720"/>
           </a:xfrm>
           <a:prstGeom prst="rect">
             <a:avLst/>
@@ -4165,7 +4254,7 @@
               <a:buNone/>
             </a:pPr>
             <a:r>
-              <a:rPr lang="en-US" sz="1250" dirty="0">
+              <a:rPr lang="en-US" sz="1550" dirty="0">
                 <a:solidFill>
                   <a:srgbClr val="17364A"/>
                 </a:solidFill>
@@ -4175,13 +4264,13 @@
               </a:rPr>
               <a:t>AI security begins with use-case classification.</a:t>
             </a:r>
-            <a:endParaRPr lang="en-US" sz="1250" dirty="0"/>
-          </a:p>
-        </p:txBody>
-      </p:sp>
-      <p:sp>
-        <p:nvSpPr>
-          <p:cNvPr id="14" name="Shape 12"/>
+            <a:endParaRPr lang="en-US" sz="1550" dirty="0"/>
+          </a:p>
+        </p:txBody>
+      </p:sp>
+      <p:sp>
+        <p:nvSpPr>
+          <p:cNvPr id="15" name="Shape 13"/>
           <p:cNvSpPr/>
           <p:nvPr/>
         </p:nvSpPr>
@@ -4208,14 +4297,14 @@
       </p:sp>
       <p:sp>
         <p:nvSpPr>
-          <p:cNvPr id="15" name="Text 13"/>
+          <p:cNvPr id="16" name="Text 14"/>
           <p:cNvSpPr/>
           <p:nvPr/>
         </p:nvSpPr>
         <p:spPr>
           <a:xfrm>
             <a:off x="8074152" y="3666744"/>
-            <a:ext cx="2825496" cy="201168"/>
+            <a:ext cx="2825496" cy="256032"/>
           </a:xfrm>
           <a:prstGeom prst="rect">
             <a:avLst/>
@@ -4231,7 +4320,7 @@
               <a:buNone/>
             </a:pPr>
             <a:r>
-              <a:rPr lang="en-US" sz="950" b="1" dirty="0">
+              <a:rPr lang="en-US" sz="1300" b="1" dirty="0">
                 <a:solidFill>
                   <a:srgbClr val="0068B7"/>
                 </a:solidFill>
@@ -4241,20 +4330,20 @@
               </a:rPr>
               <a:t>Use this for</a:t>
             </a:r>
-            <a:endParaRPr lang="en-US" sz="950" dirty="0"/>
-          </a:p>
-        </p:txBody>
-      </p:sp>
-      <p:sp>
-        <p:nvSpPr>
-          <p:cNvPr id="16" name="Text 14"/>
-          <p:cNvSpPr/>
-          <p:nvPr/>
-        </p:nvSpPr>
-        <p:spPr>
-          <a:xfrm>
-            <a:off x="8074152" y="3959352"/>
-            <a:ext cx="2825496" cy="1170432"/>
+            <a:endParaRPr lang="en-US" sz="1300" dirty="0"/>
+          </a:p>
+        </p:txBody>
+      </p:sp>
+      <p:sp>
+        <p:nvSpPr>
+          <p:cNvPr id="17" name="Text 15"/>
+          <p:cNvSpPr/>
+          <p:nvPr/>
+        </p:nvSpPr>
+        <p:spPr>
+          <a:xfrm>
+            <a:off x="8074152" y="4023360"/>
+            <a:ext cx="2825496" cy="1097280"/>
           </a:xfrm>
           <a:prstGeom prst="rect">
             <a:avLst/>
@@ -4272,7 +4361,7 @@
               <a:buNone/>
             </a:pPr>
             <a:r>
-              <a:rPr lang="en-US" sz="1250" dirty="0">
+              <a:rPr lang="en-US" sz="1550" dirty="0">
                 <a:solidFill>
                   <a:srgbClr val="17364A"/>
                 </a:solidFill>
@@ -4282,7 +4371,7 @@
               </a:rPr>
               <a:t>Connect the concept to public health decisions, safeguards, documentation, or implementation work.</a:t>
             </a:r>
-            <a:endParaRPr lang="en-US" sz="1250" dirty="0"/>
+            <a:endParaRPr lang="en-US" sz="1550" dirty="0"/>
           </a:p>
         </p:txBody>
       </p:sp>
@@ -4479,7 +4568,7 @@
                 <a:ea typeface="Aptos" pitchFamily="34" charset="-122"/>
                 <a:cs typeface="Aptos" pitchFamily="34" charset="-120"/>
               </a:rPr>
-              <a:t>© Paula Soper</a:t>
+              <a:t>Â© Paula Soper</a:t>
             </a:r>
             <a:endParaRPr lang="en-US" sz="800" dirty="0"/>
           </a:p>
@@ -4493,8 +4582,47 @@
         </p:nvSpPr>
         <p:spPr>
           <a:xfrm>
+            <a:off x="11137392" y="6510528"/>
+            <a:ext cx="411480" cy="201168"/>
+          </a:xfrm>
+          <a:prstGeom prst="rect">
+            <a:avLst/>
+          </a:prstGeom>
+          <a:noFill/>
+          <a:ln/>
+        </p:spPr>
+        <p:txBody>
+          <a:bodyPr wrap="square" lIns="0" tIns="0" rIns="0" bIns="0" rtlCol="0" anchor="ctr"/>
+          <a:lstStyle/>
+          <a:p>
+            <a:pPr algn="r" indent="0" marL="0">
+              <a:buNone/>
+            </a:pPr>
+            <a:r>
+              <a:rPr lang="en-US" sz="900" dirty="0">
+                <a:solidFill>
+                  <a:srgbClr val="5F7181"/>
+                </a:solidFill>
+                <a:latin typeface="Aptos" pitchFamily="34" charset="0"/>
+                <a:ea typeface="Aptos" pitchFamily="34" charset="-122"/>
+                <a:cs typeface="Aptos" pitchFamily="34" charset="-120"/>
+              </a:rPr>
+              <a:t>12</a:t>
+            </a:r>
+            <a:endParaRPr lang="en-US" sz="900" dirty="0"/>
+          </a:p>
+        </p:txBody>
+      </p:sp>
+      <p:sp>
+        <p:nvSpPr>
+          <p:cNvPr id="8" name="Text 6"/>
+          <p:cNvSpPr/>
+          <p:nvPr/>
+        </p:nvSpPr>
+        <p:spPr>
+          <a:xfrm>
             <a:off x="640080" y="658368"/>
-            <a:ext cx="10881360" cy="566928"/>
+            <a:ext cx="10881360" cy="713232"/>
           </a:xfrm>
           <a:prstGeom prst="rect">
             <a:avLst/>
@@ -4512,7 +4640,7 @@
               <a:buNone/>
             </a:pPr>
             <a:r>
-              <a:rPr lang="en-US" sz="2700" b="1" dirty="0">
+              <a:rPr lang="en-US" sz="3400" b="1" dirty="0">
                 <a:solidFill>
                   <a:srgbClr val="003A63"/>
                 </a:solidFill>
@@ -4522,20 +4650,20 @@
               </a:rPr>
               <a:t>Technical Deep Dive Continued</a:t>
             </a:r>
-            <a:endParaRPr lang="en-US" sz="2700" dirty="0"/>
-          </a:p>
-        </p:txBody>
-      </p:sp>
-      <p:sp>
-        <p:nvSpPr>
-          <p:cNvPr id="8" name="Text 6"/>
-          <p:cNvSpPr/>
-          <p:nvPr/>
-        </p:nvSpPr>
-        <p:spPr>
-          <a:xfrm>
-            <a:off x="868680" y="1417320"/>
-            <a:ext cx="6675120" cy="4434840"/>
+            <a:endParaRPr lang="en-US" sz="3400" dirty="0"/>
+          </a:p>
+        </p:txBody>
+      </p:sp>
+      <p:sp>
+        <p:nvSpPr>
+          <p:cNvPr id="9" name="Text 7"/>
+          <p:cNvSpPr/>
+          <p:nvPr/>
+        </p:nvSpPr>
+        <p:spPr>
+          <a:xfrm>
+            <a:off x="868680" y="1508760"/>
+            <a:ext cx="6537960" cy="4160520"/>
           </a:xfrm>
           <a:prstGeom prst="rect">
             <a:avLst/>
@@ -4550,7 +4678,7 @@
           <a:lstStyle/>
           <a:p>
             <a:r>
-              <a:rPr lang="en-US" sz="1700" dirty="0">
+              <a:rPr lang="en-US" sz="2100" dirty="0">
                 <a:solidFill>
                   <a:srgbClr val="17364A"/>
                 </a:solidFill>
@@ -4558,13 +4686,13 @@
                 <a:ea typeface="Aptos" pitchFamily="34" charset="-122"/>
                 <a:cs typeface="Aptos" pitchFamily="34" charset="-120"/>
               </a:rPr>
-              <a:t>Output handling matters because AI outputs may be copied into reports, emails, code, dashboards, or scripts.</a:t>
-            </a:r>
-            <a:endParaRPr lang="en-US" sz="1700" dirty="0"/>
-          </a:p>
-          <a:p>
-            <a:r>
-              <a:rPr lang="en-US" sz="1700" dirty="0">
+              <a:t>Output handling matters because AI outputs may be copied into reports, emails, code, dashboards, or.</a:t>
+            </a:r>
+            <a:endParaRPr lang="en-US" sz="2100" dirty="0"/>
+          </a:p>
+          <a:p>
+            <a:r>
+              <a:rPr lang="en-US" sz="2100" dirty="0">
                 <a:solidFill>
                   <a:srgbClr val="17364A"/>
                 </a:solidFill>
@@ -4572,13 +4700,13 @@
                 <a:ea typeface="Aptos" pitchFamily="34" charset="-122"/>
                 <a:cs typeface="Aptos" pitchFamily="34" charset="-120"/>
               </a:rPr>
-              <a:t>Insecure output handling can lead to misinformation, broken code, malicious links, or inappropriate disclosure.</a:t>
-            </a:r>
-            <a:endParaRPr lang="en-US" sz="1700" dirty="0"/>
-          </a:p>
-          <a:p>
-            <a:r>
-              <a:rPr lang="en-US" sz="1700" dirty="0">
+              <a:t>Insecure output handling can lead to misinformation, broken code, malicious links, or inappropriate.</a:t>
+            </a:r>
+            <a:endParaRPr lang="en-US" sz="2100" dirty="0"/>
+          </a:p>
+          <a:p>
+            <a:r>
+              <a:rPr lang="en-US" sz="2100" dirty="0">
                 <a:solidFill>
                   <a:srgbClr val="17364A"/>
                 </a:solidFill>
@@ -4586,29 +4714,15 @@
                 <a:ea typeface="Aptos" pitchFamily="34" charset="-122"/>
                 <a:cs typeface="Aptos" pitchFamily="34" charset="-120"/>
               </a:rPr>
-              <a:t>Outputs should be validated before downstream use, especially when they affect systems, public communications, or records.</a:t>
-            </a:r>
-            <a:endParaRPr lang="en-US" sz="1700" dirty="0"/>
-          </a:p>
-          <a:p>
-            <a:r>
-              <a:rPr lang="en-US" sz="1700" dirty="0">
-                <a:solidFill>
-                  <a:srgbClr val="17364A"/>
-                </a:solidFill>
-                <a:latin typeface="Aptos" pitchFamily="34" charset="0"/>
-                <a:ea typeface="Aptos" pitchFamily="34" charset="-122"/>
-                <a:cs typeface="Aptos" pitchFamily="34" charset="-120"/>
-              </a:rPr>
-              <a:t>Incident response should include AI-specific triggers.</a:t>
-            </a:r>
-            <a:endParaRPr lang="en-US" sz="1700" dirty="0"/>
-          </a:p>
-        </p:txBody>
-      </p:sp>
-      <p:sp>
-        <p:nvSpPr>
-          <p:cNvPr id="9" name="Shape 7"/>
+              <a:t>Outputs should be validated before downstream use, especially when they affect systems, public.</a:t>
+            </a:r>
+            <a:endParaRPr lang="en-US" sz="2100" dirty="0"/>
+          </a:p>
+        </p:txBody>
+      </p:sp>
+      <p:sp>
+        <p:nvSpPr>
+          <p:cNvPr id="10" name="Shape 8"/>
           <p:cNvSpPr/>
           <p:nvPr/>
         </p:nvSpPr>
@@ -4635,14 +4749,14 @@
       </p:sp>
       <p:sp>
         <p:nvSpPr>
-          <p:cNvPr id="10" name="Text 8"/>
+          <p:cNvPr id="11" name="Text 9"/>
           <p:cNvSpPr/>
           <p:nvPr/>
         </p:nvSpPr>
         <p:spPr>
           <a:xfrm>
             <a:off x="8074152" y="1563624"/>
-            <a:ext cx="2825496" cy="201168"/>
+            <a:ext cx="2825496" cy="256032"/>
           </a:xfrm>
           <a:prstGeom prst="rect">
             <a:avLst/>
@@ -4658,7 +4772,7 @@
               <a:buNone/>
             </a:pPr>
             <a:r>
-              <a:rPr lang="en-US" sz="950" b="1" dirty="0">
+              <a:rPr lang="en-US" sz="1300" b="1" dirty="0">
                 <a:solidFill>
                   <a:srgbClr val="0068B7"/>
                 </a:solidFill>
@@ -4668,20 +4782,20 @@
               </a:rPr>
               <a:t>Key idea</a:t>
             </a:r>
-            <a:endParaRPr lang="en-US" sz="950" dirty="0"/>
-          </a:p>
-        </p:txBody>
-      </p:sp>
-      <p:sp>
-        <p:nvSpPr>
-          <p:cNvPr id="11" name="Text 9"/>
-          <p:cNvSpPr/>
-          <p:nvPr/>
-        </p:nvSpPr>
-        <p:spPr>
-          <a:xfrm>
-            <a:off x="8074152" y="1856232"/>
-            <a:ext cx="2825496" cy="1261872"/>
+            <a:endParaRPr lang="en-US" sz="1300" dirty="0"/>
+          </a:p>
+        </p:txBody>
+      </p:sp>
+      <p:sp>
+        <p:nvSpPr>
+          <p:cNvPr id="12" name="Text 10"/>
+          <p:cNvSpPr/>
+          <p:nvPr/>
+        </p:nvSpPr>
+        <p:spPr>
+          <a:xfrm>
+            <a:off x="8074152" y="1920240"/>
+            <a:ext cx="2825496" cy="1188720"/>
           </a:xfrm>
           <a:prstGeom prst="rect">
             <a:avLst/>
@@ -4699,7 +4813,7 @@
               <a:buNone/>
             </a:pPr>
             <a:r>
-              <a:rPr lang="en-US" sz="1250" dirty="0">
+              <a:rPr lang="en-US" sz="1550" dirty="0">
                 <a:solidFill>
                   <a:srgbClr val="17364A"/>
                 </a:solidFill>
@@ -4707,15 +4821,15 @@
                 <a:ea typeface="Aptos" pitchFamily="34" charset="-122"/>
                 <a:cs typeface="Aptos" pitchFamily="34" charset="-120"/>
               </a:rPr>
-              <a:t>Output handling matters because AI outputs may be copied into reports, emails, code, dashboards, or scripts.</a:t>
-            </a:r>
-            <a:endParaRPr lang="en-US" sz="1250" dirty="0"/>
-          </a:p>
-        </p:txBody>
-      </p:sp>
-      <p:sp>
-        <p:nvSpPr>
-          <p:cNvPr id="12" name="Shape 10"/>
+              <a:t>Output handling matters because AI outputs may be copied into reports, emails, code, dashboards, or.</a:t>
+            </a:r>
+            <a:endParaRPr lang="en-US" sz="1550" dirty="0"/>
+          </a:p>
+        </p:txBody>
+      </p:sp>
+      <p:sp>
+        <p:nvSpPr>
+          <p:cNvPr id="13" name="Shape 11"/>
           <p:cNvSpPr/>
           <p:nvPr/>
         </p:nvSpPr>
@@ -4742,14 +4856,14 @@
       </p:sp>
       <p:sp>
         <p:nvSpPr>
-          <p:cNvPr id="13" name="Text 11"/>
+          <p:cNvPr id="14" name="Text 12"/>
           <p:cNvSpPr/>
           <p:nvPr/>
         </p:nvSpPr>
         <p:spPr>
           <a:xfrm>
             <a:off x="8074152" y="3666744"/>
-            <a:ext cx="2825496" cy="201168"/>
+            <a:ext cx="2825496" cy="256032"/>
           </a:xfrm>
           <a:prstGeom prst="rect">
             <a:avLst/>
@@ -4765,7 +4879,7 @@
               <a:buNone/>
             </a:pPr>
             <a:r>
-              <a:rPr lang="en-US" sz="950" b="1" dirty="0">
+              <a:rPr lang="en-US" sz="1300" b="1" dirty="0">
                 <a:solidFill>
                   <a:srgbClr val="0068B7"/>
                 </a:solidFill>
@@ -4775,20 +4889,20 @@
               </a:rPr>
               <a:t>Use this for</a:t>
             </a:r>
-            <a:endParaRPr lang="en-US" sz="950" dirty="0"/>
-          </a:p>
-        </p:txBody>
-      </p:sp>
-      <p:sp>
-        <p:nvSpPr>
-          <p:cNvPr id="14" name="Text 12"/>
-          <p:cNvSpPr/>
-          <p:nvPr/>
-        </p:nvSpPr>
-        <p:spPr>
-          <a:xfrm>
-            <a:off x="8074152" y="3959352"/>
-            <a:ext cx="2825496" cy="1170432"/>
+            <a:endParaRPr lang="en-US" sz="1300" dirty="0"/>
+          </a:p>
+        </p:txBody>
+      </p:sp>
+      <p:sp>
+        <p:nvSpPr>
+          <p:cNvPr id="15" name="Text 13"/>
+          <p:cNvSpPr/>
+          <p:nvPr/>
+        </p:nvSpPr>
+        <p:spPr>
+          <a:xfrm>
+            <a:off x="8074152" y="4023360"/>
+            <a:ext cx="2825496" cy="1097280"/>
           </a:xfrm>
           <a:prstGeom prst="rect">
             <a:avLst/>
@@ -4806,7 +4920,7 @@
               <a:buNone/>
             </a:pPr>
             <a:r>
-              <a:rPr lang="en-US" sz="1250" dirty="0">
+              <a:rPr lang="en-US" sz="1550" dirty="0">
                 <a:solidFill>
                   <a:srgbClr val="17364A"/>
                 </a:solidFill>
@@ -4816,7 +4930,7 @@
               </a:rPr>
               <a:t>Connect the concept to public health decisions, safeguards, documentation, or implementation work.</a:t>
             </a:r>
-            <a:endParaRPr lang="en-US" sz="1250" dirty="0"/>
+            <a:endParaRPr lang="en-US" sz="1550" dirty="0"/>
           </a:p>
         </p:txBody>
       </p:sp>
@@ -5013,7 +5127,7 @@
                 <a:ea typeface="Aptos" pitchFamily="34" charset="-122"/>
                 <a:cs typeface="Aptos" pitchFamily="34" charset="-120"/>
               </a:rPr>
-              <a:t>© Paula Soper</a:t>
+              <a:t>Â© Paula Soper</a:t>
             </a:r>
             <a:endParaRPr lang="en-US" sz="800" dirty="0"/>
           </a:p>
@@ -5021,7 +5135,46 @@
       </p:sp>
       <p:sp>
         <p:nvSpPr>
-          <p:cNvPr id="7" name="Shape 5"/>
+          <p:cNvPr id="7" name="Text 5"/>
+          <p:cNvSpPr/>
+          <p:nvPr/>
+        </p:nvSpPr>
+        <p:spPr>
+          <a:xfrm>
+            <a:off x="11137392" y="6510528"/>
+            <a:ext cx="411480" cy="201168"/>
+          </a:xfrm>
+          <a:prstGeom prst="rect">
+            <a:avLst/>
+          </a:prstGeom>
+          <a:noFill/>
+          <a:ln/>
+        </p:spPr>
+        <p:txBody>
+          <a:bodyPr wrap="square" lIns="0" tIns="0" rIns="0" bIns="0" rtlCol="0" anchor="ctr"/>
+          <a:lstStyle/>
+          <a:p>
+            <a:pPr algn="r" indent="0" marL="0">
+              <a:buNone/>
+            </a:pPr>
+            <a:r>
+              <a:rPr lang="en-US" sz="900" dirty="0">
+                <a:solidFill>
+                  <a:srgbClr val="5F7181"/>
+                </a:solidFill>
+                <a:latin typeface="Aptos" pitchFamily="34" charset="0"/>
+                <a:ea typeface="Aptos" pitchFamily="34" charset="-122"/>
+                <a:cs typeface="Aptos" pitchFamily="34" charset="-120"/>
+              </a:rPr>
+              <a:t>13</a:t>
+            </a:r>
+            <a:endParaRPr lang="en-US" sz="900" dirty="0"/>
+          </a:p>
+        </p:txBody>
+      </p:sp>
+      <p:sp>
+        <p:nvSpPr>
+          <p:cNvPr id="8" name="Shape 6"/>
           <p:cNvSpPr/>
           <p:nvPr/>
         </p:nvSpPr>
@@ -5046,7 +5199,7 @@
       </p:sp>
       <p:sp>
         <p:nvSpPr>
-          <p:cNvPr id="8" name="Text 6"/>
+          <p:cNvPr id="9" name="Text 7"/>
           <p:cNvSpPr/>
           <p:nvPr/>
         </p:nvSpPr>
@@ -5085,14 +5238,14 @@
       </p:sp>
       <p:sp>
         <p:nvSpPr>
-          <p:cNvPr id="9" name="Text 7"/>
+          <p:cNvPr id="10" name="Text 8"/>
           <p:cNvSpPr/>
           <p:nvPr/>
         </p:nvSpPr>
         <p:spPr>
           <a:xfrm>
             <a:off x="640080" y="621792"/>
-            <a:ext cx="10881360" cy="566928"/>
+            <a:ext cx="10881360" cy="713232"/>
           </a:xfrm>
           <a:prstGeom prst="rect">
             <a:avLst/>
@@ -5110,7 +5263,7 @@
               <a:buNone/>
             </a:pPr>
             <a:r>
-              <a:rPr lang="en-US" sz="2700" b="1" dirty="0">
+              <a:rPr lang="en-US" sz="3400" b="1" dirty="0">
                 <a:solidFill>
                   <a:srgbClr val="003A63"/>
                 </a:solidFill>
@@ -5120,20 +5273,20 @@
               </a:rPr>
               <a:t>Risks, Failure Modes, and Guardrails</a:t>
             </a:r>
-            <a:endParaRPr lang="en-US" sz="2700" dirty="0"/>
-          </a:p>
-        </p:txBody>
-      </p:sp>
-      <p:sp>
-        <p:nvSpPr>
-          <p:cNvPr id="10" name="Text 8"/>
-          <p:cNvSpPr/>
-          <p:nvPr/>
-        </p:nvSpPr>
-        <p:spPr>
-          <a:xfrm>
-            <a:off x="868680" y="1417320"/>
-            <a:ext cx="6675120" cy="4434840"/>
+            <a:endParaRPr lang="en-US" sz="3400" dirty="0"/>
+          </a:p>
+        </p:txBody>
+      </p:sp>
+      <p:sp>
+        <p:nvSpPr>
+          <p:cNvPr id="11" name="Text 9"/>
+          <p:cNvSpPr/>
+          <p:nvPr/>
+        </p:nvSpPr>
+        <p:spPr>
+          <a:xfrm>
+            <a:off x="868680" y="1508760"/>
+            <a:ext cx="6537960" cy="4160520"/>
           </a:xfrm>
           <a:prstGeom prst="rect">
             <a:avLst/>
@@ -5148,7 +5301,7 @@
           <a:lstStyle/>
           <a:p>
             <a:r>
-              <a:rPr lang="en-US" sz="1700" dirty="0">
+              <a:rPr lang="en-US" sz="2100" dirty="0">
                 <a:solidFill>
                   <a:srgbClr val="17364A"/>
                 </a:solidFill>
@@ -5158,11 +5311,11 @@
               </a:rPr>
               <a:t>Prompt injection.</a:t>
             </a:r>
-            <a:endParaRPr lang="en-US" sz="1700" dirty="0"/>
-          </a:p>
-          <a:p>
-            <a:r>
-              <a:rPr lang="en-US" sz="1700" dirty="0">
+            <a:endParaRPr lang="en-US" sz="2100" dirty="0"/>
+          </a:p>
+          <a:p>
+            <a:r>
+              <a:rPr lang="en-US" sz="2100" dirty="0">
                 <a:solidFill>
                   <a:srgbClr val="17364A"/>
                 </a:solidFill>
@@ -5172,11 +5325,11 @@
               </a:rPr>
               <a:t>Untrusted content may override instructions.</a:t>
             </a:r>
-            <a:endParaRPr lang="en-US" sz="1700" dirty="0"/>
-          </a:p>
-          <a:p>
-            <a:r>
-              <a:rPr lang="en-US" sz="1700" dirty="0">
+            <a:endParaRPr lang="en-US" sz="2100" dirty="0"/>
+          </a:p>
+          <a:p>
+            <a:r>
+              <a:rPr lang="en-US" sz="2100" dirty="0">
                 <a:solidFill>
                   <a:srgbClr val="17364A"/>
                 </a:solidFill>
@@ -5184,29 +5337,15 @@
                 <a:ea typeface="Aptos" pitchFamily="34" charset="-122"/>
                 <a:cs typeface="Aptos" pitchFamily="34" charset="-120"/>
               </a:rPr>
-              <a:t>Guardrails include treating external content as data, restricting tools, and testing with adversarial examples.</a:t>
-            </a:r>
-            <a:endParaRPr lang="en-US" sz="1700" dirty="0"/>
-          </a:p>
-          <a:p>
-            <a:r>
-              <a:rPr lang="en-US" sz="1700" dirty="0">
-                <a:solidFill>
-                  <a:srgbClr val="17364A"/>
-                </a:solidFill>
-                <a:latin typeface="Aptos" pitchFamily="34" charset="0"/>
-                <a:ea typeface="Aptos" pitchFamily="34" charset="-122"/>
-                <a:cs typeface="Aptos" pitchFamily="34" charset="-120"/>
-              </a:rPr>
-              <a:t>Sensitive information disclosure.</a:t>
-            </a:r>
-            <a:endParaRPr lang="en-US" sz="1700" dirty="0"/>
-          </a:p>
-        </p:txBody>
-      </p:sp>
-      <p:sp>
-        <p:nvSpPr>
-          <p:cNvPr id="11" name="Shape 9"/>
+              <a:t>Guardrails include treating external content as data, restricting tools, and testing with adversarial.</a:t>
+            </a:r>
+            <a:endParaRPr lang="en-US" sz="2100" dirty="0"/>
+          </a:p>
+        </p:txBody>
+      </p:sp>
+      <p:sp>
+        <p:nvSpPr>
+          <p:cNvPr id="12" name="Shape 10"/>
           <p:cNvSpPr/>
           <p:nvPr/>
         </p:nvSpPr>
@@ -5233,14 +5372,14 @@
       </p:sp>
       <p:sp>
         <p:nvSpPr>
-          <p:cNvPr id="12" name="Text 10"/>
+          <p:cNvPr id="13" name="Text 11"/>
           <p:cNvSpPr/>
           <p:nvPr/>
         </p:nvSpPr>
         <p:spPr>
           <a:xfrm>
             <a:off x="8074152" y="1563624"/>
-            <a:ext cx="2825496" cy="201168"/>
+            <a:ext cx="2825496" cy="256032"/>
           </a:xfrm>
           <a:prstGeom prst="rect">
             <a:avLst/>
@@ -5256,7 +5395,7 @@
               <a:buNone/>
             </a:pPr>
             <a:r>
-              <a:rPr lang="en-US" sz="950" b="1" dirty="0">
+              <a:rPr lang="en-US" sz="1300" b="1" dirty="0">
                 <a:solidFill>
                   <a:srgbClr val="0068B7"/>
                 </a:solidFill>
@@ -5266,20 +5405,20 @@
               </a:rPr>
               <a:t>Key idea</a:t>
             </a:r>
-            <a:endParaRPr lang="en-US" sz="950" dirty="0"/>
-          </a:p>
-        </p:txBody>
-      </p:sp>
-      <p:sp>
-        <p:nvSpPr>
-          <p:cNvPr id="13" name="Text 11"/>
-          <p:cNvSpPr/>
-          <p:nvPr/>
-        </p:nvSpPr>
-        <p:spPr>
-          <a:xfrm>
-            <a:off x="8074152" y="1856232"/>
-            <a:ext cx="2825496" cy="1261872"/>
+            <a:endParaRPr lang="en-US" sz="1300" dirty="0"/>
+          </a:p>
+        </p:txBody>
+      </p:sp>
+      <p:sp>
+        <p:nvSpPr>
+          <p:cNvPr id="14" name="Text 12"/>
+          <p:cNvSpPr/>
+          <p:nvPr/>
+        </p:nvSpPr>
+        <p:spPr>
+          <a:xfrm>
+            <a:off x="8074152" y="1920240"/>
+            <a:ext cx="2825496" cy="1188720"/>
           </a:xfrm>
           <a:prstGeom prst="rect">
             <a:avLst/>
@@ -5297,7 +5436,7 @@
               <a:buNone/>
             </a:pPr>
             <a:r>
-              <a:rPr lang="en-US" sz="1250" dirty="0">
+              <a:rPr lang="en-US" sz="1550" dirty="0">
                 <a:solidFill>
                   <a:srgbClr val="17364A"/>
                 </a:solidFill>
@@ -5307,13 +5446,13 @@
               </a:rPr>
               <a:t>Prompt injection.</a:t>
             </a:r>
-            <a:endParaRPr lang="en-US" sz="1250" dirty="0"/>
-          </a:p>
-        </p:txBody>
-      </p:sp>
-      <p:sp>
-        <p:nvSpPr>
-          <p:cNvPr id="14" name="Shape 12"/>
+            <a:endParaRPr lang="en-US" sz="1550" dirty="0"/>
+          </a:p>
+        </p:txBody>
+      </p:sp>
+      <p:sp>
+        <p:nvSpPr>
+          <p:cNvPr id="15" name="Shape 13"/>
           <p:cNvSpPr/>
           <p:nvPr/>
         </p:nvSpPr>
@@ -5340,14 +5479,14 @@
       </p:sp>
       <p:sp>
         <p:nvSpPr>
-          <p:cNvPr id="15" name="Text 13"/>
+          <p:cNvPr id="16" name="Text 14"/>
           <p:cNvSpPr/>
           <p:nvPr/>
         </p:nvSpPr>
         <p:spPr>
           <a:xfrm>
             <a:off x="8074152" y="3666744"/>
-            <a:ext cx="2825496" cy="201168"/>
+            <a:ext cx="2825496" cy="256032"/>
           </a:xfrm>
           <a:prstGeom prst="rect">
             <a:avLst/>
@@ -5363,7 +5502,7 @@
               <a:buNone/>
             </a:pPr>
             <a:r>
-              <a:rPr lang="en-US" sz="950" b="1" dirty="0">
+              <a:rPr lang="en-US" sz="1300" b="1" dirty="0">
                 <a:solidFill>
                   <a:srgbClr val="0068B7"/>
                 </a:solidFill>
@@ -5373,20 +5512,20 @@
               </a:rPr>
               <a:t>Use this for</a:t>
             </a:r>
-            <a:endParaRPr lang="en-US" sz="950" dirty="0"/>
-          </a:p>
-        </p:txBody>
-      </p:sp>
-      <p:sp>
-        <p:nvSpPr>
-          <p:cNvPr id="16" name="Text 14"/>
-          <p:cNvSpPr/>
-          <p:nvPr/>
-        </p:nvSpPr>
-        <p:spPr>
-          <a:xfrm>
-            <a:off x="8074152" y="3959352"/>
-            <a:ext cx="2825496" cy="1170432"/>
+            <a:endParaRPr lang="en-US" sz="1300" dirty="0"/>
+          </a:p>
+        </p:txBody>
+      </p:sp>
+      <p:sp>
+        <p:nvSpPr>
+          <p:cNvPr id="17" name="Text 15"/>
+          <p:cNvSpPr/>
+          <p:nvPr/>
+        </p:nvSpPr>
+        <p:spPr>
+          <a:xfrm>
+            <a:off x="8074152" y="4023360"/>
+            <a:ext cx="2825496" cy="1097280"/>
           </a:xfrm>
           <a:prstGeom prst="rect">
             <a:avLst/>
@@ -5404,7 +5543,7 @@
               <a:buNone/>
             </a:pPr>
             <a:r>
-              <a:rPr lang="en-US" sz="1250" dirty="0">
+              <a:rPr lang="en-US" sz="1550" dirty="0">
                 <a:solidFill>
                   <a:srgbClr val="17364A"/>
                 </a:solidFill>
@@ -5414,7 +5553,7 @@
               </a:rPr>
               <a:t>Connect the concept to public health decisions, safeguards, documentation, or implementation work.</a:t>
             </a:r>
-            <a:endParaRPr lang="en-US" sz="1250" dirty="0"/>
+            <a:endParaRPr lang="en-US" sz="1550" dirty="0"/>
           </a:p>
         </p:txBody>
       </p:sp>
@@ -5611,7 +5750,7 @@
                 <a:ea typeface="Aptos" pitchFamily="34" charset="-122"/>
                 <a:cs typeface="Aptos" pitchFamily="34" charset="-120"/>
               </a:rPr>
-              <a:t>© Paula Soper</a:t>
+              <a:t>Â© Paula Soper</a:t>
             </a:r>
             <a:endParaRPr lang="en-US" sz="800" dirty="0"/>
           </a:p>
@@ -5625,8 +5764,47 @@
         </p:nvSpPr>
         <p:spPr>
           <a:xfrm>
+            <a:off x="11137392" y="6510528"/>
+            <a:ext cx="411480" cy="201168"/>
+          </a:xfrm>
+          <a:prstGeom prst="rect">
+            <a:avLst/>
+          </a:prstGeom>
+          <a:noFill/>
+          <a:ln/>
+        </p:spPr>
+        <p:txBody>
+          <a:bodyPr wrap="square" lIns="0" tIns="0" rIns="0" bIns="0" rtlCol="0" anchor="ctr"/>
+          <a:lstStyle/>
+          <a:p>
+            <a:pPr algn="r" indent="0" marL="0">
+              <a:buNone/>
+            </a:pPr>
+            <a:r>
+              <a:rPr lang="en-US" sz="900" dirty="0">
+                <a:solidFill>
+                  <a:srgbClr val="5F7181"/>
+                </a:solidFill>
+                <a:latin typeface="Aptos" pitchFamily="34" charset="0"/>
+                <a:ea typeface="Aptos" pitchFamily="34" charset="-122"/>
+                <a:cs typeface="Aptos" pitchFamily="34" charset="-120"/>
+              </a:rPr>
+              <a:t>14</a:t>
+            </a:r>
+            <a:endParaRPr lang="en-US" sz="900" dirty="0"/>
+          </a:p>
+        </p:txBody>
+      </p:sp>
+      <p:sp>
+        <p:nvSpPr>
+          <p:cNvPr id="8" name="Text 6"/>
+          <p:cNvSpPr/>
+          <p:nvPr/>
+        </p:nvSpPr>
+        <p:spPr>
+          <a:xfrm>
             <a:off x="640080" y="658368"/>
-            <a:ext cx="10881360" cy="566928"/>
+            <a:ext cx="10881360" cy="713232"/>
           </a:xfrm>
           <a:prstGeom prst="rect">
             <a:avLst/>
@@ -5644,7 +5822,7 @@
               <a:buNone/>
             </a:pPr>
             <a:r>
-              <a:rPr lang="en-US" sz="2700" b="1" dirty="0">
+              <a:rPr lang="en-US" sz="3400" b="1" dirty="0">
                 <a:solidFill>
                   <a:srgbClr val="003A63"/>
                 </a:solidFill>
@@ -5654,20 +5832,20 @@
               </a:rPr>
               <a:t>Risks, Failure Modes, and Guardrails Continued</a:t>
             </a:r>
-            <a:endParaRPr lang="en-US" sz="2700" dirty="0"/>
-          </a:p>
-        </p:txBody>
-      </p:sp>
-      <p:sp>
-        <p:nvSpPr>
-          <p:cNvPr id="8" name="Text 6"/>
-          <p:cNvSpPr/>
-          <p:nvPr/>
-        </p:nvSpPr>
-        <p:spPr>
-          <a:xfrm>
-            <a:off x="868680" y="1417320"/>
-            <a:ext cx="6675120" cy="4434840"/>
+            <a:endParaRPr lang="en-US" sz="3400" dirty="0"/>
+          </a:p>
+        </p:txBody>
+      </p:sp>
+      <p:sp>
+        <p:nvSpPr>
+          <p:cNvPr id="9" name="Text 7"/>
+          <p:cNvSpPr/>
+          <p:nvPr/>
+        </p:nvSpPr>
+        <p:spPr>
+          <a:xfrm>
+            <a:off x="868680" y="1508760"/>
+            <a:ext cx="6537960" cy="4160520"/>
           </a:xfrm>
           <a:prstGeom prst="rect">
             <a:avLst/>
@@ -5682,7 +5860,7 @@
           <a:lstStyle/>
           <a:p>
             <a:r>
-              <a:rPr lang="en-US" sz="1700" dirty="0">
+              <a:rPr lang="en-US" sz="2100" dirty="0">
                 <a:solidFill>
                   <a:srgbClr val="17364A"/>
                 </a:solidFill>
@@ -5692,11 +5870,11 @@
               </a:rPr>
               <a:t>Supply chain risk.</a:t>
             </a:r>
-            <a:endParaRPr lang="en-US" sz="1700" dirty="0"/>
-          </a:p>
-          <a:p>
-            <a:r>
-              <a:rPr lang="en-US" sz="1700" dirty="0">
+            <a:endParaRPr lang="en-US" sz="2100" dirty="0"/>
+          </a:p>
+          <a:p>
+            <a:r>
+              <a:rPr lang="en-US" sz="2100" dirty="0">
                 <a:solidFill>
                   <a:srgbClr val="17364A"/>
                 </a:solidFill>
@@ -5706,11 +5884,11 @@
               </a:rPr>
               <a:t>AI tools may depend on vendors, plugins, models, or libraries with vulnerabilities.</a:t>
             </a:r>
-            <a:endParaRPr lang="en-US" sz="1700" dirty="0"/>
-          </a:p>
-          <a:p>
-            <a:r>
-              <a:rPr lang="en-US" sz="1700" dirty="0">
+            <a:endParaRPr lang="en-US" sz="2100" dirty="0"/>
+          </a:p>
+          <a:p>
+            <a:r>
+              <a:rPr lang="en-US" sz="2100" dirty="0">
                 <a:solidFill>
                   <a:srgbClr val="17364A"/>
                 </a:solidFill>
@@ -5720,13 +5898,13 @@
               </a:rPr>
               <a:t>Guardrails include vendor review, security documentation, patching, and contract requirements.</a:t>
             </a:r>
-            <a:endParaRPr lang="en-US" sz="1700" dirty="0"/>
-          </a:p>
-        </p:txBody>
-      </p:sp>
-      <p:sp>
-        <p:nvSpPr>
-          <p:cNvPr id="9" name="Shape 7"/>
+            <a:endParaRPr lang="en-US" sz="2100" dirty="0"/>
+          </a:p>
+        </p:txBody>
+      </p:sp>
+      <p:sp>
+        <p:nvSpPr>
+          <p:cNvPr id="10" name="Shape 8"/>
           <p:cNvSpPr/>
           <p:nvPr/>
         </p:nvSpPr>
@@ -5753,14 +5931,14 @@
       </p:sp>
       <p:sp>
         <p:nvSpPr>
-          <p:cNvPr id="10" name="Text 8"/>
+          <p:cNvPr id="11" name="Text 9"/>
           <p:cNvSpPr/>
           <p:nvPr/>
         </p:nvSpPr>
         <p:spPr>
           <a:xfrm>
             <a:off x="8074152" y="1563624"/>
-            <a:ext cx="2825496" cy="201168"/>
+            <a:ext cx="2825496" cy="256032"/>
           </a:xfrm>
           <a:prstGeom prst="rect">
             <a:avLst/>
@@ -5776,7 +5954,7 @@
               <a:buNone/>
             </a:pPr>
             <a:r>
-              <a:rPr lang="en-US" sz="950" b="1" dirty="0">
+              <a:rPr lang="en-US" sz="1300" b="1" dirty="0">
                 <a:solidFill>
                   <a:srgbClr val="0068B7"/>
                 </a:solidFill>
@@ -5786,20 +5964,20 @@
               </a:rPr>
               <a:t>Key idea</a:t>
             </a:r>
-            <a:endParaRPr lang="en-US" sz="950" dirty="0"/>
-          </a:p>
-        </p:txBody>
-      </p:sp>
-      <p:sp>
-        <p:nvSpPr>
-          <p:cNvPr id="11" name="Text 9"/>
-          <p:cNvSpPr/>
-          <p:nvPr/>
-        </p:nvSpPr>
-        <p:spPr>
-          <a:xfrm>
-            <a:off x="8074152" y="1856232"/>
-            <a:ext cx="2825496" cy="1261872"/>
+            <a:endParaRPr lang="en-US" sz="1300" dirty="0"/>
+          </a:p>
+        </p:txBody>
+      </p:sp>
+      <p:sp>
+        <p:nvSpPr>
+          <p:cNvPr id="12" name="Text 10"/>
+          <p:cNvSpPr/>
+          <p:nvPr/>
+        </p:nvSpPr>
+        <p:spPr>
+          <a:xfrm>
+            <a:off x="8074152" y="1920240"/>
+            <a:ext cx="2825496" cy="1188720"/>
           </a:xfrm>
           <a:prstGeom prst="rect">
             <a:avLst/>
@@ -5817,7 +5995,7 @@
               <a:buNone/>
             </a:pPr>
             <a:r>
-              <a:rPr lang="en-US" sz="1250" dirty="0">
+              <a:rPr lang="en-US" sz="1550" dirty="0">
                 <a:solidFill>
                   <a:srgbClr val="17364A"/>
                 </a:solidFill>
@@ -5827,13 +6005,13 @@
               </a:rPr>
               <a:t>Supply chain risk.</a:t>
             </a:r>
-            <a:endParaRPr lang="en-US" sz="1250" dirty="0"/>
-          </a:p>
-        </p:txBody>
-      </p:sp>
-      <p:sp>
-        <p:nvSpPr>
-          <p:cNvPr id="12" name="Shape 10"/>
+            <a:endParaRPr lang="en-US" sz="1550" dirty="0"/>
+          </a:p>
+        </p:txBody>
+      </p:sp>
+      <p:sp>
+        <p:nvSpPr>
+          <p:cNvPr id="13" name="Shape 11"/>
           <p:cNvSpPr/>
           <p:nvPr/>
         </p:nvSpPr>
@@ -5860,14 +6038,14 @@
       </p:sp>
       <p:sp>
         <p:nvSpPr>
-          <p:cNvPr id="13" name="Text 11"/>
+          <p:cNvPr id="14" name="Text 12"/>
           <p:cNvSpPr/>
           <p:nvPr/>
         </p:nvSpPr>
         <p:spPr>
           <a:xfrm>
             <a:off x="8074152" y="3666744"/>
-            <a:ext cx="2825496" cy="201168"/>
+            <a:ext cx="2825496" cy="256032"/>
           </a:xfrm>
           <a:prstGeom prst="rect">
             <a:avLst/>
@@ -5883,7 +6061,7 @@
               <a:buNone/>
             </a:pPr>
             <a:r>
-              <a:rPr lang="en-US" sz="950" b="1" dirty="0">
+              <a:rPr lang="en-US" sz="1300" b="1" dirty="0">
                 <a:solidFill>
                   <a:srgbClr val="0068B7"/>
                 </a:solidFill>
@@ -5893,20 +6071,20 @@
               </a:rPr>
               <a:t>Use this for</a:t>
             </a:r>
-            <a:endParaRPr lang="en-US" sz="950" dirty="0"/>
-          </a:p>
-        </p:txBody>
-      </p:sp>
-      <p:sp>
-        <p:nvSpPr>
-          <p:cNvPr id="14" name="Text 12"/>
-          <p:cNvSpPr/>
-          <p:nvPr/>
-        </p:nvSpPr>
-        <p:spPr>
-          <a:xfrm>
-            <a:off x="8074152" y="3959352"/>
-            <a:ext cx="2825496" cy="1170432"/>
+            <a:endParaRPr lang="en-US" sz="1300" dirty="0"/>
+          </a:p>
+        </p:txBody>
+      </p:sp>
+      <p:sp>
+        <p:nvSpPr>
+          <p:cNvPr id="15" name="Text 13"/>
+          <p:cNvSpPr/>
+          <p:nvPr/>
+        </p:nvSpPr>
+        <p:spPr>
+          <a:xfrm>
+            <a:off x="8074152" y="4023360"/>
+            <a:ext cx="2825496" cy="1097280"/>
           </a:xfrm>
           <a:prstGeom prst="rect">
             <a:avLst/>
@@ -5924,7 +6102,7 @@
               <a:buNone/>
             </a:pPr>
             <a:r>
-              <a:rPr lang="en-US" sz="1250" dirty="0">
+              <a:rPr lang="en-US" sz="1550" dirty="0">
                 <a:solidFill>
                   <a:srgbClr val="17364A"/>
                 </a:solidFill>
@@ -5934,7 +6112,7 @@
               </a:rPr>
               <a:t>Connect the concept to public health decisions, safeguards, documentation, or implementation work.</a:t>
             </a:r>
-            <a:endParaRPr lang="en-US" sz="1250" dirty="0"/>
+            <a:endParaRPr lang="en-US" sz="1550" dirty="0"/>
           </a:p>
         </p:txBody>
       </p:sp>
@@ -6131,7 +6309,7 @@
                 <a:ea typeface="Aptos" pitchFamily="34" charset="-122"/>
                 <a:cs typeface="Aptos" pitchFamily="34" charset="-120"/>
               </a:rPr>
-              <a:t>© Paula Soper</a:t>
+              <a:t>Â© Paula Soper</a:t>
             </a:r>
             <a:endParaRPr lang="en-US" sz="800" dirty="0"/>
           </a:p>
@@ -6139,7 +6317,46 @@
       </p:sp>
       <p:sp>
         <p:nvSpPr>
-          <p:cNvPr id="7" name="Shape 5"/>
+          <p:cNvPr id="7" name="Text 5"/>
+          <p:cNvSpPr/>
+          <p:nvPr/>
+        </p:nvSpPr>
+        <p:spPr>
+          <a:xfrm>
+            <a:off x="11137392" y="6510528"/>
+            <a:ext cx="411480" cy="201168"/>
+          </a:xfrm>
+          <a:prstGeom prst="rect">
+            <a:avLst/>
+          </a:prstGeom>
+          <a:noFill/>
+          <a:ln/>
+        </p:spPr>
+        <p:txBody>
+          <a:bodyPr wrap="square" lIns="0" tIns="0" rIns="0" bIns="0" rtlCol="0" anchor="ctr"/>
+          <a:lstStyle/>
+          <a:p>
+            <a:pPr algn="r" indent="0" marL="0">
+              <a:buNone/>
+            </a:pPr>
+            <a:r>
+              <a:rPr lang="en-US" sz="900" dirty="0">
+                <a:solidFill>
+                  <a:srgbClr val="5F7181"/>
+                </a:solidFill>
+                <a:latin typeface="Aptos" pitchFamily="34" charset="0"/>
+                <a:ea typeface="Aptos" pitchFamily="34" charset="-122"/>
+                <a:cs typeface="Aptos" pitchFamily="34" charset="-120"/>
+              </a:rPr>
+              <a:t>15</a:t>
+            </a:r>
+            <a:endParaRPr lang="en-US" sz="900" dirty="0"/>
+          </a:p>
+        </p:txBody>
+      </p:sp>
+      <p:sp>
+        <p:nvSpPr>
+          <p:cNvPr id="8" name="Shape 6"/>
           <p:cNvSpPr/>
           <p:nvPr/>
         </p:nvSpPr>
@@ -6164,7 +6381,7 @@
       </p:sp>
       <p:sp>
         <p:nvSpPr>
-          <p:cNvPr id="8" name="Text 6"/>
+          <p:cNvPr id="9" name="Text 7"/>
           <p:cNvSpPr/>
           <p:nvPr/>
         </p:nvSpPr>
@@ -6203,14 +6420,14 @@
       </p:sp>
       <p:sp>
         <p:nvSpPr>
-          <p:cNvPr id="9" name="Text 7"/>
+          <p:cNvPr id="10" name="Text 8"/>
           <p:cNvSpPr/>
           <p:nvPr/>
         </p:nvSpPr>
         <p:spPr>
           <a:xfrm>
             <a:off x="640080" y="621792"/>
-            <a:ext cx="10881360" cy="566928"/>
+            <a:ext cx="10881360" cy="713232"/>
           </a:xfrm>
           <a:prstGeom prst="rect">
             <a:avLst/>
@@ -6228,7 +6445,7 @@
               <a:buNone/>
             </a:pPr>
             <a:r>
-              <a:rPr lang="en-US" sz="2700" b="1" dirty="0">
+              <a:rPr lang="en-US" sz="3400" b="1" dirty="0">
                 <a:solidFill>
                   <a:srgbClr val="003A63"/>
                 </a:solidFill>
@@ -6238,20 +6455,20 @@
               </a:rPr>
               <a:t>Application to AI-Supported Workflows</a:t>
             </a:r>
-            <a:endParaRPr lang="en-US" sz="2700" dirty="0"/>
-          </a:p>
-        </p:txBody>
-      </p:sp>
-      <p:sp>
-        <p:nvSpPr>
-          <p:cNvPr id="10" name="Text 8"/>
-          <p:cNvSpPr/>
-          <p:nvPr/>
-        </p:nvSpPr>
-        <p:spPr>
-          <a:xfrm>
-            <a:off x="868680" y="1417320"/>
-            <a:ext cx="6675120" cy="4434840"/>
+            <a:endParaRPr lang="en-US" sz="3400" dirty="0"/>
+          </a:p>
+        </p:txBody>
+      </p:sp>
+      <p:sp>
+        <p:nvSpPr>
+          <p:cNvPr id="11" name="Text 9"/>
+          <p:cNvSpPr/>
+          <p:nvPr/>
+        </p:nvSpPr>
+        <p:spPr>
+          <a:xfrm>
+            <a:off x="868680" y="1508760"/>
+            <a:ext cx="6537960" cy="4160520"/>
           </a:xfrm>
           <a:prstGeom prst="rect">
             <a:avLst/>
@@ -6266,7 +6483,7 @@
           <a:lstStyle/>
           <a:p>
             <a:r>
-              <a:rPr lang="en-US" sz="1700" dirty="0">
+              <a:rPr lang="en-US" sz="2100" dirty="0">
                 <a:solidFill>
                   <a:srgbClr val="17364A"/>
                 </a:solidFill>
@@ -6276,11 +6493,11 @@
               </a:rPr>
               <a:t>AI security applies to generative AI, RAG, NLP, APIs, and agentic workflows.</a:t>
             </a:r>
-            <a:endParaRPr lang="en-US" sz="1700" dirty="0"/>
-          </a:p>
-          <a:p>
-            <a:r>
-              <a:rPr lang="en-US" sz="1700" dirty="0">
+            <a:endParaRPr lang="en-US" sz="2100" dirty="0"/>
+          </a:p>
+          <a:p>
+            <a:r>
+              <a:rPr lang="en-US" sz="2100" dirty="0">
                 <a:solidFill>
                   <a:srgbClr val="17364A"/>
                 </a:solidFill>
@@ -6290,11 +6507,11 @@
               </a:rPr>
               <a:t>RAG systems need document-level permissions and protections against unauthorized retrieval.</a:t>
             </a:r>
-            <a:endParaRPr lang="en-US" sz="1700" dirty="0"/>
-          </a:p>
-          <a:p>
-            <a:r>
-              <a:rPr lang="en-US" sz="1700" dirty="0">
+            <a:endParaRPr lang="en-US" sz="2100" dirty="0"/>
+          </a:p>
+          <a:p>
+            <a:r>
+              <a:rPr lang="en-US" sz="2100" dirty="0">
                 <a:solidFill>
                   <a:srgbClr val="17364A"/>
                 </a:solidFill>
@@ -6304,27 +6521,13 @@
               </a:rPr>
               <a:t>Agentic systems need tool restrictions and action approval.</a:t>
             </a:r>
-            <a:endParaRPr lang="en-US" sz="1700" dirty="0"/>
-          </a:p>
-          <a:p>
-            <a:r>
-              <a:rPr lang="en-US" sz="1700" dirty="0">
-                <a:solidFill>
-                  <a:srgbClr val="17364A"/>
-                </a:solidFill>
-                <a:latin typeface="Aptos" pitchFamily="34" charset="0"/>
-                <a:ea typeface="Aptos" pitchFamily="34" charset="-122"/>
-                <a:cs typeface="Aptos" pitchFamily="34" charset="-120"/>
-              </a:rPr>
-              <a:t>Prompt templates should include data boundaries, and technical implementations should enforce those boundaries rather than.</a:t>
-            </a:r>
-            <a:endParaRPr lang="en-US" sz="1700" dirty="0"/>
-          </a:p>
-        </p:txBody>
-      </p:sp>
-      <p:sp>
-        <p:nvSpPr>
-          <p:cNvPr id="11" name="Shape 9"/>
+            <a:endParaRPr lang="en-US" sz="2100" dirty="0"/>
+          </a:p>
+        </p:txBody>
+      </p:sp>
+      <p:sp>
+        <p:nvSpPr>
+          <p:cNvPr id="12" name="Shape 10"/>
           <p:cNvSpPr/>
           <p:nvPr/>
         </p:nvSpPr>
@@ -6351,14 +6554,14 @@
       </p:sp>
       <p:sp>
         <p:nvSpPr>
-          <p:cNvPr id="12" name="Text 10"/>
+          <p:cNvPr id="13" name="Text 11"/>
           <p:cNvSpPr/>
           <p:nvPr/>
         </p:nvSpPr>
         <p:spPr>
           <a:xfrm>
             <a:off x="8074152" y="1563624"/>
-            <a:ext cx="2825496" cy="201168"/>
+            <a:ext cx="2825496" cy="256032"/>
           </a:xfrm>
           <a:prstGeom prst="rect">
             <a:avLst/>
@@ -6374,7 +6577,7 @@
               <a:buNone/>
             </a:pPr>
             <a:r>
-              <a:rPr lang="en-US" sz="950" b="1" dirty="0">
+              <a:rPr lang="en-US" sz="1300" b="1" dirty="0">
                 <a:solidFill>
                   <a:srgbClr val="0068B7"/>
                 </a:solidFill>
@@ -6384,20 +6587,20 @@
               </a:rPr>
               <a:t>Key idea</a:t>
             </a:r>
-            <a:endParaRPr lang="en-US" sz="950" dirty="0"/>
-          </a:p>
-        </p:txBody>
-      </p:sp>
-      <p:sp>
-        <p:nvSpPr>
-          <p:cNvPr id="13" name="Text 11"/>
-          <p:cNvSpPr/>
-          <p:nvPr/>
-        </p:nvSpPr>
-        <p:spPr>
-          <a:xfrm>
-            <a:off x="8074152" y="1856232"/>
-            <a:ext cx="2825496" cy="1261872"/>
+            <a:endParaRPr lang="en-US" sz="1300" dirty="0"/>
+          </a:p>
+        </p:txBody>
+      </p:sp>
+      <p:sp>
+        <p:nvSpPr>
+          <p:cNvPr id="14" name="Text 12"/>
+          <p:cNvSpPr/>
+          <p:nvPr/>
+        </p:nvSpPr>
+        <p:spPr>
+          <a:xfrm>
+            <a:off x="8074152" y="1920240"/>
+            <a:ext cx="2825496" cy="1188720"/>
           </a:xfrm>
           <a:prstGeom prst="rect">
             <a:avLst/>
@@ -6415,7 +6618,7 @@
               <a:buNone/>
             </a:pPr>
             <a:r>
-              <a:rPr lang="en-US" sz="1250" dirty="0">
+              <a:rPr lang="en-US" sz="1550" dirty="0">
                 <a:solidFill>
                   <a:srgbClr val="17364A"/>
                 </a:solidFill>
@@ -6425,13 +6628,13 @@
               </a:rPr>
               <a:t>AI security applies to generative AI, RAG, NLP, APIs, and agentic workflows.</a:t>
             </a:r>
-            <a:endParaRPr lang="en-US" sz="1250" dirty="0"/>
-          </a:p>
-        </p:txBody>
-      </p:sp>
-      <p:sp>
-        <p:nvSpPr>
-          <p:cNvPr id="14" name="Shape 12"/>
+            <a:endParaRPr lang="en-US" sz="1550" dirty="0"/>
+          </a:p>
+        </p:txBody>
+      </p:sp>
+      <p:sp>
+        <p:nvSpPr>
+          <p:cNvPr id="15" name="Shape 13"/>
           <p:cNvSpPr/>
           <p:nvPr/>
         </p:nvSpPr>
@@ -6458,14 +6661,14 @@
       </p:sp>
       <p:sp>
         <p:nvSpPr>
-          <p:cNvPr id="15" name="Text 13"/>
+          <p:cNvPr id="16" name="Text 14"/>
           <p:cNvSpPr/>
           <p:nvPr/>
         </p:nvSpPr>
         <p:spPr>
           <a:xfrm>
             <a:off x="8074152" y="3666744"/>
-            <a:ext cx="2825496" cy="201168"/>
+            <a:ext cx="2825496" cy="256032"/>
           </a:xfrm>
           <a:prstGeom prst="rect">
             <a:avLst/>
@@ -6481,7 +6684,7 @@
               <a:buNone/>
             </a:pPr>
             <a:r>
-              <a:rPr lang="en-US" sz="950" b="1" dirty="0">
+              <a:rPr lang="en-US" sz="1300" b="1" dirty="0">
                 <a:solidFill>
                   <a:srgbClr val="0068B7"/>
                 </a:solidFill>
@@ -6491,20 +6694,20 @@
               </a:rPr>
               <a:t>Use this for</a:t>
             </a:r>
-            <a:endParaRPr lang="en-US" sz="950" dirty="0"/>
-          </a:p>
-        </p:txBody>
-      </p:sp>
-      <p:sp>
-        <p:nvSpPr>
-          <p:cNvPr id="16" name="Text 14"/>
-          <p:cNvSpPr/>
-          <p:nvPr/>
-        </p:nvSpPr>
-        <p:spPr>
-          <a:xfrm>
-            <a:off x="8074152" y="3959352"/>
-            <a:ext cx="2825496" cy="1170432"/>
+            <a:endParaRPr lang="en-US" sz="1300" dirty="0"/>
+          </a:p>
+        </p:txBody>
+      </p:sp>
+      <p:sp>
+        <p:nvSpPr>
+          <p:cNvPr id="17" name="Text 15"/>
+          <p:cNvSpPr/>
+          <p:nvPr/>
+        </p:nvSpPr>
+        <p:spPr>
+          <a:xfrm>
+            <a:off x="8074152" y="4023360"/>
+            <a:ext cx="2825496" cy="1097280"/>
           </a:xfrm>
           <a:prstGeom prst="rect">
             <a:avLst/>
@@ -6522,7 +6725,7 @@
               <a:buNone/>
             </a:pPr>
             <a:r>
-              <a:rPr lang="en-US" sz="1250" dirty="0">
+              <a:rPr lang="en-US" sz="1550" dirty="0">
                 <a:solidFill>
                   <a:srgbClr val="17364A"/>
                 </a:solidFill>
@@ -6532,7 +6735,7 @@
               </a:rPr>
               <a:t>Connect the concept to public health decisions, safeguards, documentation, or implementation work.</a:t>
             </a:r>
-            <a:endParaRPr lang="en-US" sz="1250" dirty="0"/>
+            <a:endParaRPr lang="en-US" sz="1550" dirty="0"/>
           </a:p>
         </p:txBody>
       </p:sp>
@@ -6729,7 +6932,7 @@
                 <a:ea typeface="Aptos" pitchFamily="34" charset="-122"/>
                 <a:cs typeface="Aptos" pitchFamily="34" charset="-120"/>
               </a:rPr>
-              <a:t>© Paula Soper</a:t>
+              <a:t>Â© Paula Soper</a:t>
             </a:r>
             <a:endParaRPr lang="en-US" sz="800" dirty="0"/>
           </a:p>
@@ -6737,7 +6940,46 @@
       </p:sp>
       <p:sp>
         <p:nvSpPr>
-          <p:cNvPr id="7" name="Shape 5"/>
+          <p:cNvPr id="7" name="Text 5"/>
+          <p:cNvSpPr/>
+          <p:nvPr/>
+        </p:nvSpPr>
+        <p:spPr>
+          <a:xfrm>
+            <a:off x="11137392" y="6510528"/>
+            <a:ext cx="411480" cy="201168"/>
+          </a:xfrm>
+          <a:prstGeom prst="rect">
+            <a:avLst/>
+          </a:prstGeom>
+          <a:noFill/>
+          <a:ln/>
+        </p:spPr>
+        <p:txBody>
+          <a:bodyPr wrap="square" lIns="0" tIns="0" rIns="0" bIns="0" rtlCol="0" anchor="ctr"/>
+          <a:lstStyle/>
+          <a:p>
+            <a:pPr algn="r" indent="0" marL="0">
+              <a:buNone/>
+            </a:pPr>
+            <a:r>
+              <a:rPr lang="en-US" sz="900" dirty="0">
+                <a:solidFill>
+                  <a:srgbClr val="5F7181"/>
+                </a:solidFill>
+                <a:latin typeface="Aptos" pitchFamily="34" charset="0"/>
+                <a:ea typeface="Aptos" pitchFamily="34" charset="-122"/>
+                <a:cs typeface="Aptos" pitchFamily="34" charset="-120"/>
+              </a:rPr>
+              <a:t>16</a:t>
+            </a:r>
+            <a:endParaRPr lang="en-US" sz="900" dirty="0"/>
+          </a:p>
+        </p:txBody>
+      </p:sp>
+      <p:sp>
+        <p:nvSpPr>
+          <p:cNvPr id="8" name="Shape 6"/>
           <p:cNvSpPr/>
           <p:nvPr/>
         </p:nvSpPr>
@@ -6762,7 +7004,7 @@
       </p:sp>
       <p:sp>
         <p:nvSpPr>
-          <p:cNvPr id="8" name="Text 6"/>
+          <p:cNvPr id="9" name="Text 7"/>
           <p:cNvSpPr/>
           <p:nvPr/>
         </p:nvSpPr>
@@ -6801,14 +7043,14 @@
       </p:sp>
       <p:sp>
         <p:nvSpPr>
-          <p:cNvPr id="9" name="Text 7"/>
+          <p:cNvPr id="10" name="Text 8"/>
           <p:cNvSpPr/>
           <p:nvPr/>
         </p:nvSpPr>
         <p:spPr>
           <a:xfrm>
             <a:off x="640080" y="621792"/>
-            <a:ext cx="10881360" cy="566928"/>
+            <a:ext cx="10881360" cy="713232"/>
           </a:xfrm>
           <a:prstGeom prst="rect">
             <a:avLst/>
@@ -6826,7 +7068,7 @@
               <a:buNone/>
             </a:pPr>
             <a:r>
-              <a:rPr lang="en-US" sz="2700" b="1" dirty="0">
+              <a:rPr lang="en-US" sz="3400" b="1" dirty="0">
                 <a:solidFill>
                   <a:srgbClr val="003A63"/>
                 </a:solidFill>
@@ -6836,20 +7078,20 @@
               </a:rPr>
               <a:t>Reflection Questions</a:t>
             </a:r>
-            <a:endParaRPr lang="en-US" sz="2700" dirty="0"/>
-          </a:p>
-        </p:txBody>
-      </p:sp>
-      <p:sp>
-        <p:nvSpPr>
-          <p:cNvPr id="10" name="Text 8"/>
-          <p:cNvSpPr/>
-          <p:nvPr/>
-        </p:nvSpPr>
-        <p:spPr>
-          <a:xfrm>
-            <a:off x="868680" y="1417320"/>
-            <a:ext cx="6675120" cy="4434840"/>
+            <a:endParaRPr lang="en-US" sz="3400" dirty="0"/>
+          </a:p>
+        </p:txBody>
+      </p:sp>
+      <p:sp>
+        <p:nvSpPr>
+          <p:cNvPr id="11" name="Text 9"/>
+          <p:cNvSpPr/>
+          <p:nvPr/>
+        </p:nvSpPr>
+        <p:spPr>
+          <a:xfrm>
+            <a:off x="868680" y="1508760"/>
+            <a:ext cx="6537960" cy="4160520"/>
           </a:xfrm>
           <a:prstGeom prst="rect">
             <a:avLst/>
@@ -6864,7 +7106,7 @@
           <a:lstStyle/>
           <a:p>
             <a:r>
-              <a:rPr lang="en-US" sz="1700" dirty="0">
+              <a:rPr lang="en-US" sz="2100" dirty="0">
                 <a:solidFill>
                   <a:srgbClr val="17364A"/>
                 </a:solidFill>
@@ -6874,11 +7116,11 @@
               </a:rPr>
               <a:t>What sensitive data or systems would the AI workflow touch?</a:t>
             </a:r>
-            <a:endParaRPr lang="en-US" sz="1700" dirty="0"/>
-          </a:p>
-          <a:p>
-            <a:r>
-              <a:rPr lang="en-US" sz="1700" dirty="0">
+            <a:endParaRPr lang="en-US" sz="2100" dirty="0"/>
+          </a:p>
+          <a:p>
+            <a:r>
+              <a:rPr lang="en-US" sz="2100" dirty="0">
                 <a:solidFill>
                   <a:srgbClr val="17364A"/>
                 </a:solidFill>
@@ -6888,11 +7130,11 @@
               </a:rPr>
               <a:t>Could the AI tool access more information or actions than necessary?</a:t>
             </a:r>
-            <a:endParaRPr lang="en-US" sz="1700" dirty="0"/>
-          </a:p>
-          <a:p>
-            <a:r>
-              <a:rPr lang="en-US" sz="1700" dirty="0">
+            <a:endParaRPr lang="en-US" sz="2100" dirty="0"/>
+          </a:p>
+          <a:p>
+            <a:r>
+              <a:rPr lang="en-US" sz="2100" dirty="0">
                 <a:solidFill>
                   <a:srgbClr val="17364A"/>
                 </a:solidFill>
@@ -6902,13 +7144,13 @@
               </a:rPr>
               <a:t>What untrusted content might the tool process?</a:t>
             </a:r>
-            <a:endParaRPr lang="en-US" sz="1700" dirty="0"/>
-          </a:p>
-        </p:txBody>
-      </p:sp>
-      <p:sp>
-        <p:nvSpPr>
-          <p:cNvPr id="11" name="Shape 9"/>
+            <a:endParaRPr lang="en-US" sz="2100" dirty="0"/>
+          </a:p>
+        </p:txBody>
+      </p:sp>
+      <p:sp>
+        <p:nvSpPr>
+          <p:cNvPr id="12" name="Shape 10"/>
           <p:cNvSpPr/>
           <p:nvPr/>
         </p:nvSpPr>
@@ -6935,14 +7177,14 @@
       </p:sp>
       <p:sp>
         <p:nvSpPr>
-          <p:cNvPr id="12" name="Text 10"/>
+          <p:cNvPr id="13" name="Text 11"/>
           <p:cNvSpPr/>
           <p:nvPr/>
         </p:nvSpPr>
         <p:spPr>
           <a:xfrm>
             <a:off x="8074152" y="1563624"/>
-            <a:ext cx="2825496" cy="201168"/>
+            <a:ext cx="2825496" cy="256032"/>
           </a:xfrm>
           <a:prstGeom prst="rect">
             <a:avLst/>
@@ -6958,7 +7200,7 @@
               <a:buNone/>
             </a:pPr>
             <a:r>
-              <a:rPr lang="en-US" sz="950" b="1" dirty="0">
+              <a:rPr lang="en-US" sz="1300" b="1" dirty="0">
                 <a:solidFill>
                   <a:srgbClr val="0068B7"/>
                 </a:solidFill>
@@ -6968,20 +7210,20 @@
               </a:rPr>
               <a:t>Key idea</a:t>
             </a:r>
-            <a:endParaRPr lang="en-US" sz="950" dirty="0"/>
-          </a:p>
-        </p:txBody>
-      </p:sp>
-      <p:sp>
-        <p:nvSpPr>
-          <p:cNvPr id="13" name="Text 11"/>
-          <p:cNvSpPr/>
-          <p:nvPr/>
-        </p:nvSpPr>
-        <p:spPr>
-          <a:xfrm>
-            <a:off x="8074152" y="1856232"/>
-            <a:ext cx="2825496" cy="1261872"/>
+            <a:endParaRPr lang="en-US" sz="1300" dirty="0"/>
+          </a:p>
+        </p:txBody>
+      </p:sp>
+      <p:sp>
+        <p:nvSpPr>
+          <p:cNvPr id="14" name="Text 12"/>
+          <p:cNvSpPr/>
+          <p:nvPr/>
+        </p:nvSpPr>
+        <p:spPr>
+          <a:xfrm>
+            <a:off x="8074152" y="1920240"/>
+            <a:ext cx="2825496" cy="1188720"/>
           </a:xfrm>
           <a:prstGeom prst="rect">
             <a:avLst/>
@@ -6999,7 +7241,7 @@
               <a:buNone/>
             </a:pPr>
             <a:r>
-              <a:rPr lang="en-US" sz="1250" dirty="0">
+              <a:rPr lang="en-US" sz="1550" dirty="0">
                 <a:solidFill>
                   <a:srgbClr val="17364A"/>
                 </a:solidFill>
@@ -7009,13 +7251,13 @@
               </a:rPr>
               <a:t>What sensitive data or systems would the AI workflow touch?</a:t>
             </a:r>
-            <a:endParaRPr lang="en-US" sz="1250" dirty="0"/>
-          </a:p>
-        </p:txBody>
-      </p:sp>
-      <p:sp>
-        <p:nvSpPr>
-          <p:cNvPr id="14" name="Shape 12"/>
+            <a:endParaRPr lang="en-US" sz="1550" dirty="0"/>
+          </a:p>
+        </p:txBody>
+      </p:sp>
+      <p:sp>
+        <p:nvSpPr>
+          <p:cNvPr id="15" name="Shape 13"/>
           <p:cNvSpPr/>
           <p:nvPr/>
         </p:nvSpPr>
@@ -7042,14 +7284,14 @@
       </p:sp>
       <p:sp>
         <p:nvSpPr>
-          <p:cNvPr id="15" name="Text 13"/>
+          <p:cNvPr id="16" name="Text 14"/>
           <p:cNvSpPr/>
           <p:nvPr/>
         </p:nvSpPr>
         <p:spPr>
           <a:xfrm>
             <a:off x="8074152" y="3666744"/>
-            <a:ext cx="2825496" cy="201168"/>
+            <a:ext cx="2825496" cy="256032"/>
           </a:xfrm>
           <a:prstGeom prst="rect">
             <a:avLst/>
@@ -7065,7 +7307,7 @@
               <a:buNone/>
             </a:pPr>
             <a:r>
-              <a:rPr lang="en-US" sz="950" b="1" dirty="0">
+              <a:rPr lang="en-US" sz="1300" b="1" dirty="0">
                 <a:solidFill>
                   <a:srgbClr val="0068B7"/>
                 </a:solidFill>
@@ -7075,20 +7317,20 @@
               </a:rPr>
               <a:t>Use this for</a:t>
             </a:r>
-            <a:endParaRPr lang="en-US" sz="950" dirty="0"/>
-          </a:p>
-        </p:txBody>
-      </p:sp>
-      <p:sp>
-        <p:nvSpPr>
-          <p:cNvPr id="16" name="Text 14"/>
-          <p:cNvSpPr/>
-          <p:nvPr/>
-        </p:nvSpPr>
-        <p:spPr>
-          <a:xfrm>
-            <a:off x="8074152" y="3959352"/>
-            <a:ext cx="2825496" cy="1170432"/>
+            <a:endParaRPr lang="en-US" sz="1300" dirty="0"/>
+          </a:p>
+        </p:txBody>
+      </p:sp>
+      <p:sp>
+        <p:nvSpPr>
+          <p:cNvPr id="17" name="Text 15"/>
+          <p:cNvSpPr/>
+          <p:nvPr/>
+        </p:nvSpPr>
+        <p:spPr>
+          <a:xfrm>
+            <a:off x="8074152" y="4023360"/>
+            <a:ext cx="2825496" cy="1097280"/>
           </a:xfrm>
           <a:prstGeom prst="rect">
             <a:avLst/>
@@ -7106,7 +7348,7 @@
               <a:buNone/>
             </a:pPr>
             <a:r>
-              <a:rPr lang="en-US" sz="1250" dirty="0">
+              <a:rPr lang="en-US" sz="1550" dirty="0">
                 <a:solidFill>
                   <a:srgbClr val="17364A"/>
                 </a:solidFill>
@@ -7116,7 +7358,7 @@
               </a:rPr>
               <a:t>Connect the concept to public health decisions, safeguards, documentation, or implementation work.</a:t>
             </a:r>
-            <a:endParaRPr lang="en-US" sz="1250" dirty="0"/>
+            <a:endParaRPr lang="en-US" sz="1550" dirty="0"/>
           </a:p>
         </p:txBody>
       </p:sp>
@@ -7313,7 +7555,7 @@
                 <a:ea typeface="Aptos" pitchFamily="34" charset="-122"/>
                 <a:cs typeface="Aptos" pitchFamily="34" charset="-120"/>
               </a:rPr>
-              <a:t>© Paula Soper</a:t>
+              <a:t>Â© Paula Soper</a:t>
             </a:r>
             <a:endParaRPr lang="en-US" sz="800" dirty="0"/>
           </a:p>
@@ -7327,8 +7569,47 @@
         </p:nvSpPr>
         <p:spPr>
           <a:xfrm>
+            <a:off x="11137392" y="6510528"/>
+            <a:ext cx="411480" cy="201168"/>
+          </a:xfrm>
+          <a:prstGeom prst="rect">
+            <a:avLst/>
+          </a:prstGeom>
+          <a:noFill/>
+          <a:ln/>
+        </p:spPr>
+        <p:txBody>
+          <a:bodyPr wrap="square" lIns="0" tIns="0" rIns="0" bIns="0" rtlCol="0" anchor="ctr"/>
+          <a:lstStyle/>
+          <a:p>
+            <a:pPr algn="r" indent="0" marL="0">
+              <a:buNone/>
+            </a:pPr>
+            <a:r>
+              <a:rPr lang="en-US" sz="900" dirty="0">
+                <a:solidFill>
+                  <a:srgbClr val="5F7181"/>
+                </a:solidFill>
+                <a:latin typeface="Aptos" pitchFamily="34" charset="0"/>
+                <a:ea typeface="Aptos" pitchFamily="34" charset="-122"/>
+                <a:cs typeface="Aptos" pitchFamily="34" charset="-120"/>
+              </a:rPr>
+              <a:t>17</a:t>
+            </a:r>
+            <a:endParaRPr lang="en-US" sz="900" dirty="0"/>
+          </a:p>
+        </p:txBody>
+      </p:sp>
+      <p:sp>
+        <p:nvSpPr>
+          <p:cNvPr id="8" name="Text 6"/>
+          <p:cNvSpPr/>
+          <p:nvPr/>
+        </p:nvSpPr>
+        <p:spPr>
+          <a:xfrm>
             <a:off x="640080" y="658368"/>
-            <a:ext cx="10881360" cy="566928"/>
+            <a:ext cx="10881360" cy="713232"/>
           </a:xfrm>
           <a:prstGeom prst="rect">
             <a:avLst/>
@@ -7346,7 +7627,7 @@
               <a:buNone/>
             </a:pPr>
             <a:r>
-              <a:rPr lang="en-US" sz="2700" b="1" dirty="0">
+              <a:rPr lang="en-US" sz="3400" b="1" dirty="0">
                 <a:solidFill>
                   <a:srgbClr val="003A63"/>
                 </a:solidFill>
@@ -7356,20 +7637,20 @@
               </a:rPr>
               <a:t>Reflection Questions Continued</a:t>
             </a:r>
-            <a:endParaRPr lang="en-US" sz="2700" dirty="0"/>
-          </a:p>
-        </p:txBody>
-      </p:sp>
-      <p:sp>
-        <p:nvSpPr>
-          <p:cNvPr id="8" name="Text 6"/>
-          <p:cNvSpPr/>
-          <p:nvPr/>
-        </p:nvSpPr>
-        <p:spPr>
-          <a:xfrm>
-            <a:off x="868680" y="1417320"/>
-            <a:ext cx="6675120" cy="4434840"/>
+            <a:endParaRPr lang="en-US" sz="3400" dirty="0"/>
+          </a:p>
+        </p:txBody>
+      </p:sp>
+      <p:sp>
+        <p:nvSpPr>
+          <p:cNvPr id="9" name="Text 7"/>
+          <p:cNvSpPr/>
+          <p:nvPr/>
+        </p:nvSpPr>
+        <p:spPr>
+          <a:xfrm>
+            <a:off x="868680" y="1508760"/>
+            <a:ext cx="6537960" cy="4160520"/>
           </a:xfrm>
           <a:prstGeom prst="rect">
             <a:avLst/>
@@ -7384,7 +7665,7 @@
           <a:lstStyle/>
           <a:p>
             <a:r>
-              <a:rPr lang="en-US" sz="1700" dirty="0">
+              <a:rPr lang="en-US" sz="2100" dirty="0">
                 <a:solidFill>
                   <a:srgbClr val="17364A"/>
                 </a:solidFill>
@@ -7394,11 +7675,11 @@
               </a:rPr>
               <a:t>How will prompt injection attempts or unsafe outputs be detected?</a:t>
             </a:r>
-            <a:endParaRPr lang="en-US" sz="1700" dirty="0"/>
-          </a:p>
-          <a:p>
-            <a:r>
-              <a:rPr lang="en-US" sz="1700" dirty="0">
+            <a:endParaRPr lang="en-US" sz="2100" dirty="0"/>
+          </a:p>
+          <a:p>
+            <a:r>
+              <a:rPr lang="en-US" sz="2100" dirty="0">
                 <a:solidFill>
                   <a:srgbClr val="17364A"/>
                 </a:solidFill>
@@ -7408,13 +7689,13 @@
               </a:rPr>
               <a:t>What logs and incident response steps are required?</a:t>
             </a:r>
-            <a:endParaRPr lang="en-US" sz="1700" dirty="0"/>
-          </a:p>
-        </p:txBody>
-      </p:sp>
-      <p:sp>
-        <p:nvSpPr>
-          <p:cNvPr id="9" name="Shape 7"/>
+            <a:endParaRPr lang="en-US" sz="2100" dirty="0"/>
+          </a:p>
+        </p:txBody>
+      </p:sp>
+      <p:sp>
+        <p:nvSpPr>
+          <p:cNvPr id="10" name="Shape 8"/>
           <p:cNvSpPr/>
           <p:nvPr/>
         </p:nvSpPr>
@@ -7441,14 +7722,14 @@
       </p:sp>
       <p:sp>
         <p:nvSpPr>
-          <p:cNvPr id="10" name="Text 8"/>
+          <p:cNvPr id="11" name="Text 9"/>
           <p:cNvSpPr/>
           <p:nvPr/>
         </p:nvSpPr>
         <p:spPr>
           <a:xfrm>
             <a:off x="8074152" y="1563624"/>
-            <a:ext cx="2825496" cy="201168"/>
+            <a:ext cx="2825496" cy="256032"/>
           </a:xfrm>
           <a:prstGeom prst="rect">
             <a:avLst/>
@@ -7464,7 +7745,7 @@
               <a:buNone/>
             </a:pPr>
             <a:r>
-              <a:rPr lang="en-US" sz="950" b="1" dirty="0">
+              <a:rPr lang="en-US" sz="1300" b="1" dirty="0">
                 <a:solidFill>
                   <a:srgbClr val="0068B7"/>
                 </a:solidFill>
@@ -7474,20 +7755,20 @@
               </a:rPr>
               <a:t>Key idea</a:t>
             </a:r>
-            <a:endParaRPr lang="en-US" sz="950" dirty="0"/>
-          </a:p>
-        </p:txBody>
-      </p:sp>
-      <p:sp>
-        <p:nvSpPr>
-          <p:cNvPr id="11" name="Text 9"/>
-          <p:cNvSpPr/>
-          <p:nvPr/>
-        </p:nvSpPr>
-        <p:spPr>
-          <a:xfrm>
-            <a:off x="8074152" y="1856232"/>
-            <a:ext cx="2825496" cy="1261872"/>
+            <a:endParaRPr lang="en-US" sz="1300" dirty="0"/>
+          </a:p>
+        </p:txBody>
+      </p:sp>
+      <p:sp>
+        <p:nvSpPr>
+          <p:cNvPr id="12" name="Text 10"/>
+          <p:cNvSpPr/>
+          <p:nvPr/>
+        </p:nvSpPr>
+        <p:spPr>
+          <a:xfrm>
+            <a:off x="8074152" y="1920240"/>
+            <a:ext cx="2825496" cy="1188720"/>
           </a:xfrm>
           <a:prstGeom prst="rect">
             <a:avLst/>
@@ -7505,7 +7786,7 @@
               <a:buNone/>
             </a:pPr>
             <a:r>
-              <a:rPr lang="en-US" sz="1250" dirty="0">
+              <a:rPr lang="en-US" sz="1550" dirty="0">
                 <a:solidFill>
                   <a:srgbClr val="17364A"/>
                 </a:solidFill>
@@ -7515,13 +7796,13 @@
               </a:rPr>
               <a:t>How will prompt injection attempts or unsafe outputs be detected?</a:t>
             </a:r>
-            <a:endParaRPr lang="en-US" sz="1250" dirty="0"/>
-          </a:p>
-        </p:txBody>
-      </p:sp>
-      <p:sp>
-        <p:nvSpPr>
-          <p:cNvPr id="12" name="Shape 10"/>
+            <a:endParaRPr lang="en-US" sz="1550" dirty="0"/>
+          </a:p>
+        </p:txBody>
+      </p:sp>
+      <p:sp>
+        <p:nvSpPr>
+          <p:cNvPr id="13" name="Shape 11"/>
           <p:cNvSpPr/>
           <p:nvPr/>
         </p:nvSpPr>
@@ -7548,14 +7829,14 @@
       </p:sp>
       <p:sp>
         <p:nvSpPr>
-          <p:cNvPr id="13" name="Text 11"/>
+          <p:cNvPr id="14" name="Text 12"/>
           <p:cNvSpPr/>
           <p:nvPr/>
         </p:nvSpPr>
         <p:spPr>
           <a:xfrm>
             <a:off x="8074152" y="3666744"/>
-            <a:ext cx="2825496" cy="201168"/>
+            <a:ext cx="2825496" cy="256032"/>
           </a:xfrm>
           <a:prstGeom prst="rect">
             <a:avLst/>
@@ -7571,7 +7852,7 @@
               <a:buNone/>
             </a:pPr>
             <a:r>
-              <a:rPr lang="en-US" sz="950" b="1" dirty="0">
+              <a:rPr lang="en-US" sz="1300" b="1" dirty="0">
                 <a:solidFill>
                   <a:srgbClr val="0068B7"/>
                 </a:solidFill>
@@ -7581,20 +7862,20 @@
               </a:rPr>
               <a:t>Use this for</a:t>
             </a:r>
-            <a:endParaRPr lang="en-US" sz="950" dirty="0"/>
-          </a:p>
-        </p:txBody>
-      </p:sp>
-      <p:sp>
-        <p:nvSpPr>
-          <p:cNvPr id="14" name="Text 12"/>
-          <p:cNvSpPr/>
-          <p:nvPr/>
-        </p:nvSpPr>
-        <p:spPr>
-          <a:xfrm>
-            <a:off x="8074152" y="3959352"/>
-            <a:ext cx="2825496" cy="1170432"/>
+            <a:endParaRPr lang="en-US" sz="1300" dirty="0"/>
+          </a:p>
+        </p:txBody>
+      </p:sp>
+      <p:sp>
+        <p:nvSpPr>
+          <p:cNvPr id="15" name="Text 13"/>
+          <p:cNvSpPr/>
+          <p:nvPr/>
+        </p:nvSpPr>
+        <p:spPr>
+          <a:xfrm>
+            <a:off x="8074152" y="4023360"/>
+            <a:ext cx="2825496" cy="1097280"/>
           </a:xfrm>
           <a:prstGeom prst="rect">
             <a:avLst/>
@@ -7612,7 +7893,7 @@
               <a:buNone/>
             </a:pPr>
             <a:r>
-              <a:rPr lang="en-US" sz="1250" dirty="0">
+              <a:rPr lang="en-US" sz="1550" dirty="0">
                 <a:solidFill>
                   <a:srgbClr val="17364A"/>
                 </a:solidFill>
@@ -7622,7 +7903,7 @@
               </a:rPr>
               <a:t>Connect the concept to public health decisions, safeguards, documentation, or implementation work.</a:t>
             </a:r>
-            <a:endParaRPr lang="en-US" sz="1250" dirty="0"/>
+            <a:endParaRPr lang="en-US" sz="1550" dirty="0"/>
           </a:p>
         </p:txBody>
       </p:sp>
@@ -7819,7 +8100,7 @@
                 <a:ea typeface="Aptos" pitchFamily="34" charset="-122"/>
                 <a:cs typeface="Aptos" pitchFamily="34" charset="-120"/>
               </a:rPr>
-              <a:t>© Paula Soper</a:t>
+              <a:t>Â© Paula Soper</a:t>
             </a:r>
             <a:endParaRPr lang="en-US" sz="800" dirty="0"/>
           </a:p>
@@ -7827,7 +8108,46 @@
       </p:sp>
       <p:sp>
         <p:nvSpPr>
-          <p:cNvPr id="7" name="Shape 5"/>
+          <p:cNvPr id="7" name="Text 5"/>
+          <p:cNvSpPr/>
+          <p:nvPr/>
+        </p:nvSpPr>
+        <p:spPr>
+          <a:xfrm>
+            <a:off x="11137392" y="6510528"/>
+            <a:ext cx="411480" cy="201168"/>
+          </a:xfrm>
+          <a:prstGeom prst="rect">
+            <a:avLst/>
+          </a:prstGeom>
+          <a:noFill/>
+          <a:ln/>
+        </p:spPr>
+        <p:txBody>
+          <a:bodyPr wrap="square" lIns="0" tIns="0" rIns="0" bIns="0" rtlCol="0" anchor="ctr"/>
+          <a:lstStyle/>
+          <a:p>
+            <a:pPr algn="r" indent="0" marL="0">
+              <a:buNone/>
+            </a:pPr>
+            <a:r>
+              <a:rPr lang="en-US" sz="900" dirty="0">
+                <a:solidFill>
+                  <a:srgbClr val="5F7181"/>
+                </a:solidFill>
+                <a:latin typeface="Aptos" pitchFamily="34" charset="0"/>
+                <a:ea typeface="Aptos" pitchFamily="34" charset="-122"/>
+                <a:cs typeface="Aptos" pitchFamily="34" charset="-120"/>
+              </a:rPr>
+              <a:t>18</a:t>
+            </a:r>
+            <a:endParaRPr lang="en-US" sz="900" dirty="0"/>
+          </a:p>
+        </p:txBody>
+      </p:sp>
+      <p:sp>
+        <p:nvSpPr>
+          <p:cNvPr id="8" name="Shape 6"/>
           <p:cNvSpPr/>
           <p:nvPr/>
         </p:nvSpPr>
@@ -7852,7 +8172,7 @@
       </p:sp>
       <p:sp>
         <p:nvSpPr>
-          <p:cNvPr id="8" name="Text 6"/>
+          <p:cNvPr id="9" name="Text 7"/>
           <p:cNvSpPr/>
           <p:nvPr/>
         </p:nvSpPr>
@@ -7891,14 +8211,14 @@
       </p:sp>
       <p:sp>
         <p:nvSpPr>
-          <p:cNvPr id="9" name="Text 7"/>
+          <p:cNvPr id="10" name="Text 8"/>
           <p:cNvSpPr/>
           <p:nvPr/>
         </p:nvSpPr>
         <p:spPr>
           <a:xfrm>
             <a:off x="640080" y="621792"/>
-            <a:ext cx="10881360" cy="566928"/>
+            <a:ext cx="10881360" cy="713232"/>
           </a:xfrm>
           <a:prstGeom prst="rect">
             <a:avLst/>
@@ -7916,7 +8236,7 @@
               <a:buNone/>
             </a:pPr>
             <a:r>
-              <a:rPr lang="en-US" sz="2700" b="1" dirty="0">
+              <a:rPr lang="en-US" sz="3400" b="1" dirty="0">
                 <a:solidFill>
                   <a:srgbClr val="003A63"/>
                 </a:solidFill>
@@ -7926,20 +8246,20 @@
               </a:rPr>
               <a:t>Practical Exercise</a:t>
             </a:r>
-            <a:endParaRPr lang="en-US" sz="2700" dirty="0"/>
-          </a:p>
-        </p:txBody>
-      </p:sp>
-      <p:sp>
-        <p:nvSpPr>
-          <p:cNvPr id="10" name="Text 8"/>
-          <p:cNvSpPr/>
-          <p:nvPr/>
-        </p:nvSpPr>
-        <p:spPr>
-          <a:xfrm>
-            <a:off x="868680" y="1417320"/>
-            <a:ext cx="6675120" cy="4434840"/>
+            <a:endParaRPr lang="en-US" sz="3400" dirty="0"/>
+          </a:p>
+        </p:txBody>
+      </p:sp>
+      <p:sp>
+        <p:nvSpPr>
+          <p:cNvPr id="11" name="Text 9"/>
+          <p:cNvSpPr/>
+          <p:nvPr/>
+        </p:nvSpPr>
+        <p:spPr>
+          <a:xfrm>
+            <a:off x="868680" y="1508760"/>
+            <a:ext cx="6537960" cy="4160520"/>
           </a:xfrm>
           <a:prstGeom prst="rect">
             <a:avLst/>
@@ -7954,7 +8274,7 @@
           <a:lstStyle/>
           <a:p>
             <a:r>
-              <a:rPr lang="en-US" sz="1700" dirty="0">
+              <a:rPr lang="en-US" sz="2100" dirty="0">
                 <a:solidFill>
                   <a:srgbClr val="17364A"/>
                 </a:solidFill>
@@ -7964,11 +8284,11 @@
               </a:rPr>
               <a:t>Create a secure AI workflow checklist for one public health use case.</a:t>
             </a:r>
-            <a:endParaRPr lang="en-US" sz="1700" dirty="0"/>
-          </a:p>
-          <a:p>
-            <a:r>
-              <a:rPr lang="en-US" sz="1700" dirty="0">
+            <a:endParaRPr lang="en-US" sz="2100" dirty="0"/>
+          </a:p>
+          <a:p>
+            <a:r>
+              <a:rPr lang="en-US" sz="2100" dirty="0">
                 <a:solidFill>
                   <a:srgbClr val="17364A"/>
                 </a:solidFill>
@@ -7976,13 +8296,13 @@
                 <a:ea typeface="Aptos" pitchFamily="34" charset="-122"/>
                 <a:cs typeface="Aptos" pitchFamily="34" charset="-120"/>
               </a:rPr>
-              <a:t>Include data sensitivity, approved tools, access controls, least-privilege review, prompt injection risk, output handling,.</a:t>
-            </a:r>
-            <a:endParaRPr lang="en-US" sz="1700" dirty="0"/>
-          </a:p>
-          <a:p>
-            <a:r>
-              <a:rPr lang="en-US" sz="1700" dirty="0">
+              <a:t>Include data sensitivity, approved tools, access controls, least-privilege review, prompt injection.</a:t>
+            </a:r>
+            <a:endParaRPr lang="en-US" sz="2100" dirty="0"/>
+          </a:p>
+          <a:p>
+            <a:r>
+              <a:rPr lang="en-US" sz="2100" dirty="0">
                 <a:solidFill>
                   <a:srgbClr val="17364A"/>
                 </a:solidFill>
@@ -7990,15 +8310,15 @@
                 <a:ea typeface="Aptos" pitchFamily="34" charset="-122"/>
                 <a:cs typeface="Aptos" pitchFamily="34" charset="-120"/>
               </a:rPr>
-              <a:t>The checklist should identify which controls must be in place before pilot testing and which controls must be monitored.</a:t>
-            </a:r>
-            <a:endParaRPr lang="en-US" sz="1700" dirty="0"/>
-          </a:p>
-        </p:txBody>
-      </p:sp>
-      <p:sp>
-        <p:nvSpPr>
-          <p:cNvPr id="11" name="Shape 9"/>
+              <a:t>The checklist should identify which controls must be in place before pilot testing and which controls.</a:t>
+            </a:r>
+            <a:endParaRPr lang="en-US" sz="2100" dirty="0"/>
+          </a:p>
+        </p:txBody>
+      </p:sp>
+      <p:sp>
+        <p:nvSpPr>
+          <p:cNvPr id="12" name="Shape 10"/>
           <p:cNvSpPr/>
           <p:nvPr/>
         </p:nvSpPr>
@@ -8025,14 +8345,14 @@
       </p:sp>
       <p:sp>
         <p:nvSpPr>
-          <p:cNvPr id="12" name="Text 10"/>
+          <p:cNvPr id="13" name="Text 11"/>
           <p:cNvSpPr/>
           <p:nvPr/>
         </p:nvSpPr>
         <p:spPr>
           <a:xfrm>
             <a:off x="8074152" y="1563624"/>
-            <a:ext cx="2825496" cy="201168"/>
+            <a:ext cx="2825496" cy="256032"/>
           </a:xfrm>
           <a:prstGeom prst="rect">
             <a:avLst/>
@@ -8048,7 +8368,7 @@
               <a:buNone/>
             </a:pPr>
             <a:r>
-              <a:rPr lang="en-US" sz="950" b="1" dirty="0">
+              <a:rPr lang="en-US" sz="1300" b="1" dirty="0">
                 <a:solidFill>
                   <a:srgbClr val="0068B7"/>
                 </a:solidFill>
@@ -8058,20 +8378,20 @@
               </a:rPr>
               <a:t>Key idea</a:t>
             </a:r>
-            <a:endParaRPr lang="en-US" sz="950" dirty="0"/>
-          </a:p>
-        </p:txBody>
-      </p:sp>
-      <p:sp>
-        <p:nvSpPr>
-          <p:cNvPr id="13" name="Text 11"/>
-          <p:cNvSpPr/>
-          <p:nvPr/>
-        </p:nvSpPr>
-        <p:spPr>
-          <a:xfrm>
-            <a:off x="8074152" y="1856232"/>
-            <a:ext cx="2825496" cy="1261872"/>
+            <a:endParaRPr lang="en-US" sz="1300" dirty="0"/>
+          </a:p>
+        </p:txBody>
+      </p:sp>
+      <p:sp>
+        <p:nvSpPr>
+          <p:cNvPr id="14" name="Text 12"/>
+          <p:cNvSpPr/>
+          <p:nvPr/>
+        </p:nvSpPr>
+        <p:spPr>
+          <a:xfrm>
+            <a:off x="8074152" y="1920240"/>
+            <a:ext cx="2825496" cy="1188720"/>
           </a:xfrm>
           <a:prstGeom prst="rect">
             <a:avLst/>
@@ -8089,7 +8409,7 @@
               <a:buNone/>
             </a:pPr>
             <a:r>
-              <a:rPr lang="en-US" sz="1250" dirty="0">
+              <a:rPr lang="en-US" sz="1550" dirty="0">
                 <a:solidFill>
                   <a:srgbClr val="17364A"/>
                 </a:solidFill>
@@ -8099,13 +8419,13 @@
               </a:rPr>
               <a:t>Create a secure AI workflow checklist for one public health use case.</a:t>
             </a:r>
-            <a:endParaRPr lang="en-US" sz="1250" dirty="0"/>
-          </a:p>
-        </p:txBody>
-      </p:sp>
-      <p:sp>
-        <p:nvSpPr>
-          <p:cNvPr id="14" name="Shape 12"/>
+            <a:endParaRPr lang="en-US" sz="1550" dirty="0"/>
+          </a:p>
+        </p:txBody>
+      </p:sp>
+      <p:sp>
+        <p:nvSpPr>
+          <p:cNvPr id="15" name="Shape 13"/>
           <p:cNvSpPr/>
           <p:nvPr/>
         </p:nvSpPr>
@@ -8132,14 +8452,14 @@
       </p:sp>
       <p:sp>
         <p:nvSpPr>
-          <p:cNvPr id="15" name="Text 13"/>
+          <p:cNvPr id="16" name="Text 14"/>
           <p:cNvSpPr/>
           <p:nvPr/>
         </p:nvSpPr>
         <p:spPr>
           <a:xfrm>
             <a:off x="8074152" y="3666744"/>
-            <a:ext cx="2825496" cy="201168"/>
+            <a:ext cx="2825496" cy="256032"/>
           </a:xfrm>
           <a:prstGeom prst="rect">
             <a:avLst/>
@@ -8155,7 +8475,7 @@
               <a:buNone/>
             </a:pPr>
             <a:r>
-              <a:rPr lang="en-US" sz="950" b="1" dirty="0">
+              <a:rPr lang="en-US" sz="1300" b="1" dirty="0">
                 <a:solidFill>
                   <a:srgbClr val="0068B7"/>
                 </a:solidFill>
@@ -8165,20 +8485,20 @@
               </a:rPr>
               <a:t>Use this for</a:t>
             </a:r>
-            <a:endParaRPr lang="en-US" sz="950" dirty="0"/>
-          </a:p>
-        </p:txBody>
-      </p:sp>
-      <p:sp>
-        <p:nvSpPr>
-          <p:cNvPr id="16" name="Text 14"/>
-          <p:cNvSpPr/>
-          <p:nvPr/>
-        </p:nvSpPr>
-        <p:spPr>
-          <a:xfrm>
-            <a:off x="8074152" y="3959352"/>
-            <a:ext cx="2825496" cy="1170432"/>
+            <a:endParaRPr lang="en-US" sz="1300" dirty="0"/>
+          </a:p>
+        </p:txBody>
+      </p:sp>
+      <p:sp>
+        <p:nvSpPr>
+          <p:cNvPr id="17" name="Text 15"/>
+          <p:cNvSpPr/>
+          <p:nvPr/>
+        </p:nvSpPr>
+        <p:spPr>
+          <a:xfrm>
+            <a:off x="8074152" y="4023360"/>
+            <a:ext cx="2825496" cy="1097280"/>
           </a:xfrm>
           <a:prstGeom prst="rect">
             <a:avLst/>
@@ -8196,7 +8516,7 @@
               <a:buNone/>
             </a:pPr>
             <a:r>
-              <a:rPr lang="en-US" sz="1250" dirty="0">
+              <a:rPr lang="en-US" sz="1550" dirty="0">
                 <a:solidFill>
                   <a:srgbClr val="17364A"/>
                 </a:solidFill>
@@ -8206,7 +8526,7 @@
               </a:rPr>
               <a:t>Connect the concept to public health decisions, safeguards, documentation, or implementation work.</a:t>
             </a:r>
-            <a:endParaRPr lang="en-US" sz="1250" dirty="0"/>
+            <a:endParaRPr lang="en-US" sz="1550" dirty="0"/>
           </a:p>
         </p:txBody>
       </p:sp>
@@ -8403,7 +8723,7 @@
                 <a:ea typeface="Aptos" pitchFamily="34" charset="-122"/>
                 <a:cs typeface="Aptos" pitchFamily="34" charset="-120"/>
               </a:rPr>
-              <a:t>© Paula Soper</a:t>
+              <a:t>Â© Paula Soper</a:t>
             </a:r>
             <a:endParaRPr lang="en-US" sz="800" dirty="0"/>
           </a:p>
@@ -8411,7 +8731,46 @@
       </p:sp>
       <p:sp>
         <p:nvSpPr>
-          <p:cNvPr id="7" name="Shape 5"/>
+          <p:cNvPr id="7" name="Text 5"/>
+          <p:cNvSpPr/>
+          <p:nvPr/>
+        </p:nvSpPr>
+        <p:spPr>
+          <a:xfrm>
+            <a:off x="11137392" y="6510528"/>
+            <a:ext cx="411480" cy="201168"/>
+          </a:xfrm>
+          <a:prstGeom prst="rect">
+            <a:avLst/>
+          </a:prstGeom>
+          <a:noFill/>
+          <a:ln/>
+        </p:spPr>
+        <p:txBody>
+          <a:bodyPr wrap="square" lIns="0" tIns="0" rIns="0" bIns="0" rtlCol="0" anchor="ctr"/>
+          <a:lstStyle/>
+          <a:p>
+            <a:pPr algn="r" indent="0" marL="0">
+              <a:buNone/>
+            </a:pPr>
+            <a:r>
+              <a:rPr lang="en-US" sz="900" dirty="0">
+                <a:solidFill>
+                  <a:srgbClr val="5F7181"/>
+                </a:solidFill>
+                <a:latin typeface="Aptos" pitchFamily="34" charset="0"/>
+                <a:ea typeface="Aptos" pitchFamily="34" charset="-122"/>
+                <a:cs typeface="Aptos" pitchFamily="34" charset="-120"/>
+              </a:rPr>
+              <a:t>19</a:t>
+            </a:r>
+            <a:endParaRPr lang="en-US" sz="900" dirty="0"/>
+          </a:p>
+        </p:txBody>
+      </p:sp>
+      <p:sp>
+        <p:nvSpPr>
+          <p:cNvPr id="8" name="Shape 6"/>
           <p:cNvSpPr/>
           <p:nvPr/>
         </p:nvSpPr>
@@ -8436,7 +8795,7 @@
       </p:sp>
       <p:sp>
         <p:nvSpPr>
-          <p:cNvPr id="8" name="Text 6"/>
+          <p:cNvPr id="9" name="Text 7"/>
           <p:cNvSpPr/>
           <p:nvPr/>
         </p:nvSpPr>
@@ -8475,14 +8834,14 @@
       </p:sp>
       <p:sp>
         <p:nvSpPr>
-          <p:cNvPr id="9" name="Text 7"/>
+          <p:cNvPr id="10" name="Text 8"/>
           <p:cNvSpPr/>
           <p:nvPr/>
         </p:nvSpPr>
         <p:spPr>
           <a:xfrm>
             <a:off x="640080" y="621792"/>
-            <a:ext cx="10881360" cy="566928"/>
+            <a:ext cx="10881360" cy="713232"/>
           </a:xfrm>
           <a:prstGeom prst="rect">
             <a:avLst/>
@@ -8500,7 +8859,7 @@
               <a:buNone/>
             </a:pPr>
             <a:r>
-              <a:rPr lang="en-US" sz="2700" b="1" dirty="0">
+              <a:rPr lang="en-US" sz="3400" b="1" dirty="0">
                 <a:solidFill>
                   <a:srgbClr val="003A63"/>
                 </a:solidFill>
@@ -8510,20 +8869,20 @@
               </a:rPr>
               <a:t>Expected Artifact or Evidence</a:t>
             </a:r>
-            <a:endParaRPr lang="en-US" sz="2700" dirty="0"/>
-          </a:p>
-        </p:txBody>
-      </p:sp>
-      <p:sp>
-        <p:nvSpPr>
-          <p:cNvPr id="10" name="Text 8"/>
-          <p:cNvSpPr/>
-          <p:nvPr/>
-        </p:nvSpPr>
-        <p:spPr>
-          <a:xfrm>
-            <a:off x="868680" y="1417320"/>
-            <a:ext cx="6675120" cy="4434840"/>
+            <a:endParaRPr lang="en-US" sz="3400" dirty="0"/>
+          </a:p>
+        </p:txBody>
+      </p:sp>
+      <p:sp>
+        <p:nvSpPr>
+          <p:cNvPr id="11" name="Text 9"/>
+          <p:cNvSpPr/>
+          <p:nvPr/>
+        </p:nvSpPr>
+        <p:spPr>
+          <a:xfrm>
+            <a:off x="868680" y="1508760"/>
+            <a:ext cx="6537960" cy="4160520"/>
           </a:xfrm>
           <a:prstGeom prst="rect">
             <a:avLst/>
@@ -8538,7 +8897,7 @@
           <a:lstStyle/>
           <a:p>
             <a:r>
-              <a:rPr lang="en-US" sz="1700" dirty="0">
+              <a:rPr lang="en-US" sz="2100" dirty="0">
                 <a:solidFill>
                   <a:srgbClr val="17364A"/>
                 </a:solidFill>
@@ -8548,11 +8907,11 @@
               </a:rPr>
               <a:t>Secure AI workflow checklist</a:t>
             </a:r>
-            <a:endParaRPr lang="en-US" sz="1700" dirty="0"/>
-          </a:p>
-          <a:p>
-            <a:r>
-              <a:rPr lang="en-US" sz="1700" dirty="0">
+            <a:endParaRPr lang="en-US" sz="2100" dirty="0"/>
+          </a:p>
+          <a:p>
+            <a:r>
+              <a:rPr lang="en-US" sz="2100" dirty="0">
                 <a:solidFill>
                   <a:srgbClr val="17364A"/>
                 </a:solidFill>
@@ -8562,11 +8921,11 @@
               </a:rPr>
               <a:t>Vendor and implementation security questions</a:t>
             </a:r>
-            <a:endParaRPr lang="en-US" sz="1700" dirty="0"/>
-          </a:p>
-          <a:p>
-            <a:r>
-              <a:rPr lang="en-US" sz="1700" dirty="0">
+            <a:endParaRPr lang="en-US" sz="2100" dirty="0"/>
+          </a:p>
+          <a:p>
+            <a:r>
+              <a:rPr lang="en-US" sz="2100" dirty="0">
                 <a:solidFill>
                   <a:srgbClr val="17364A"/>
                 </a:solidFill>
@@ -8576,13 +8935,13 @@
               </a:rPr>
               <a:t>Prompt injection risk notes</a:t>
             </a:r>
-            <a:endParaRPr lang="en-US" sz="1700" dirty="0"/>
-          </a:p>
-        </p:txBody>
-      </p:sp>
-      <p:sp>
-        <p:nvSpPr>
-          <p:cNvPr id="11" name="Shape 9"/>
+            <a:endParaRPr lang="en-US" sz="2100" dirty="0"/>
+          </a:p>
+        </p:txBody>
+      </p:sp>
+      <p:sp>
+        <p:nvSpPr>
+          <p:cNvPr id="12" name="Shape 10"/>
           <p:cNvSpPr/>
           <p:nvPr/>
         </p:nvSpPr>
@@ -8609,14 +8968,14 @@
       </p:sp>
       <p:sp>
         <p:nvSpPr>
-          <p:cNvPr id="12" name="Text 10"/>
+          <p:cNvPr id="13" name="Text 11"/>
           <p:cNvSpPr/>
           <p:nvPr/>
         </p:nvSpPr>
         <p:spPr>
           <a:xfrm>
             <a:off x="8074152" y="1563624"/>
-            <a:ext cx="2825496" cy="201168"/>
+            <a:ext cx="2825496" cy="256032"/>
           </a:xfrm>
           <a:prstGeom prst="rect">
             <a:avLst/>
@@ -8632,7 +8991,7 @@
               <a:buNone/>
             </a:pPr>
             <a:r>
-              <a:rPr lang="en-US" sz="950" b="1" dirty="0">
+              <a:rPr lang="en-US" sz="1300" b="1" dirty="0">
                 <a:solidFill>
                   <a:srgbClr val="0068B7"/>
                 </a:solidFill>
@@ -8642,20 +9001,20 @@
               </a:rPr>
               <a:t>Key idea</a:t>
             </a:r>
-            <a:endParaRPr lang="en-US" sz="950" dirty="0"/>
-          </a:p>
-        </p:txBody>
-      </p:sp>
-      <p:sp>
-        <p:nvSpPr>
-          <p:cNvPr id="13" name="Text 11"/>
-          <p:cNvSpPr/>
-          <p:nvPr/>
-        </p:nvSpPr>
-        <p:spPr>
-          <a:xfrm>
-            <a:off x="8074152" y="1856232"/>
-            <a:ext cx="2825496" cy="1261872"/>
+            <a:endParaRPr lang="en-US" sz="1300" dirty="0"/>
+          </a:p>
+        </p:txBody>
+      </p:sp>
+      <p:sp>
+        <p:nvSpPr>
+          <p:cNvPr id="14" name="Text 12"/>
+          <p:cNvSpPr/>
+          <p:nvPr/>
+        </p:nvSpPr>
+        <p:spPr>
+          <a:xfrm>
+            <a:off x="8074152" y="1920240"/>
+            <a:ext cx="2825496" cy="1188720"/>
           </a:xfrm>
           <a:prstGeom prst="rect">
             <a:avLst/>
@@ -8673,7 +9032,7 @@
               <a:buNone/>
             </a:pPr>
             <a:r>
-              <a:rPr lang="en-US" sz="1250" dirty="0">
+              <a:rPr lang="en-US" sz="1550" dirty="0">
                 <a:solidFill>
                   <a:srgbClr val="17364A"/>
                 </a:solidFill>
@@ -8683,13 +9042,13 @@
               </a:rPr>
               <a:t>Secure AI workflow checklist</a:t>
             </a:r>
-            <a:endParaRPr lang="en-US" sz="1250" dirty="0"/>
-          </a:p>
-        </p:txBody>
-      </p:sp>
-      <p:sp>
-        <p:nvSpPr>
-          <p:cNvPr id="14" name="Shape 12"/>
+            <a:endParaRPr lang="en-US" sz="1550" dirty="0"/>
+          </a:p>
+        </p:txBody>
+      </p:sp>
+      <p:sp>
+        <p:nvSpPr>
+          <p:cNvPr id="15" name="Shape 13"/>
           <p:cNvSpPr/>
           <p:nvPr/>
         </p:nvSpPr>
@@ -8716,14 +9075,14 @@
       </p:sp>
       <p:sp>
         <p:nvSpPr>
-          <p:cNvPr id="15" name="Text 13"/>
+          <p:cNvPr id="16" name="Text 14"/>
           <p:cNvSpPr/>
           <p:nvPr/>
         </p:nvSpPr>
         <p:spPr>
           <a:xfrm>
             <a:off x="8074152" y="3666744"/>
-            <a:ext cx="2825496" cy="201168"/>
+            <a:ext cx="2825496" cy="256032"/>
           </a:xfrm>
           <a:prstGeom prst="rect">
             <a:avLst/>
@@ -8739,7 +9098,7 @@
               <a:buNone/>
             </a:pPr>
             <a:r>
-              <a:rPr lang="en-US" sz="950" b="1" dirty="0">
+              <a:rPr lang="en-US" sz="1300" b="1" dirty="0">
                 <a:solidFill>
                   <a:srgbClr val="0068B7"/>
                 </a:solidFill>
@@ -8749,20 +9108,20 @@
               </a:rPr>
               <a:t>Use this for</a:t>
             </a:r>
-            <a:endParaRPr lang="en-US" sz="950" dirty="0"/>
-          </a:p>
-        </p:txBody>
-      </p:sp>
-      <p:sp>
-        <p:nvSpPr>
-          <p:cNvPr id="16" name="Text 14"/>
-          <p:cNvSpPr/>
-          <p:nvPr/>
-        </p:nvSpPr>
-        <p:spPr>
-          <a:xfrm>
-            <a:off x="8074152" y="3959352"/>
-            <a:ext cx="2825496" cy="1170432"/>
+            <a:endParaRPr lang="en-US" sz="1300" dirty="0"/>
+          </a:p>
+        </p:txBody>
+      </p:sp>
+      <p:sp>
+        <p:nvSpPr>
+          <p:cNvPr id="17" name="Text 15"/>
+          <p:cNvSpPr/>
+          <p:nvPr/>
+        </p:nvSpPr>
+        <p:spPr>
+          <a:xfrm>
+            <a:off x="8074152" y="4023360"/>
+            <a:ext cx="2825496" cy="1097280"/>
           </a:xfrm>
           <a:prstGeom prst="rect">
             <a:avLst/>
@@ -8780,7 +9139,7 @@
               <a:buNone/>
             </a:pPr>
             <a:r>
-              <a:rPr lang="en-US" sz="1250" dirty="0">
+              <a:rPr lang="en-US" sz="1550" dirty="0">
                 <a:solidFill>
                   <a:srgbClr val="17364A"/>
                 </a:solidFill>
@@ -8790,7 +9149,7 @@
               </a:rPr>
               <a:t>Connect the concept to public health decisions, safeguards, documentation, or implementation work.</a:t>
             </a:r>
-            <a:endParaRPr lang="en-US" sz="1250" dirty="0"/>
+            <a:endParaRPr lang="en-US" sz="1550" dirty="0"/>
           </a:p>
         </p:txBody>
       </p:sp>
@@ -8987,7 +9346,7 @@
                 <a:ea typeface="Aptos" pitchFamily="34" charset="-122"/>
                 <a:cs typeface="Aptos" pitchFamily="34" charset="-120"/>
               </a:rPr>
-              <a:t>© Paula Soper</a:t>
+              <a:t>Â© Paula Soper</a:t>
             </a:r>
             <a:endParaRPr lang="en-US" sz="800" dirty="0"/>
           </a:p>
@@ -9001,8 +9360,47 @@
         </p:nvSpPr>
         <p:spPr>
           <a:xfrm>
+            <a:off x="11137392" y="6510528"/>
+            <a:ext cx="411480" cy="201168"/>
+          </a:xfrm>
+          <a:prstGeom prst="rect">
+            <a:avLst/>
+          </a:prstGeom>
+          <a:noFill/>
+          <a:ln/>
+        </p:spPr>
+        <p:txBody>
+          <a:bodyPr wrap="square" lIns="0" tIns="0" rIns="0" bIns="0" rtlCol="0" anchor="ctr"/>
+          <a:lstStyle/>
+          <a:p>
+            <a:pPr algn="r" indent="0" marL="0">
+              <a:buNone/>
+            </a:pPr>
+            <a:r>
+              <a:rPr lang="en-US" sz="900" dirty="0">
+                <a:solidFill>
+                  <a:srgbClr val="5F7181"/>
+                </a:solidFill>
+                <a:latin typeface="Aptos" pitchFamily="34" charset="0"/>
+                <a:ea typeface="Aptos" pitchFamily="34" charset="-122"/>
+                <a:cs typeface="Aptos" pitchFamily="34" charset="-120"/>
+              </a:rPr>
+              <a:t>2</a:t>
+            </a:r>
+            <a:endParaRPr lang="en-US" sz="900" dirty="0"/>
+          </a:p>
+        </p:txBody>
+      </p:sp>
+      <p:sp>
+        <p:nvSpPr>
+          <p:cNvPr id="8" name="Text 6"/>
+          <p:cNvSpPr/>
+          <p:nvPr/>
+        </p:nvSpPr>
+        <p:spPr>
+          <a:xfrm>
             <a:off x="640080" y="658368"/>
-            <a:ext cx="10881360" cy="566928"/>
+            <a:ext cx="10881360" cy="713232"/>
           </a:xfrm>
           <a:prstGeom prst="rect">
             <a:avLst/>
@@ -9020,7 +9418,7 @@
               <a:buNone/>
             </a:pPr>
             <a:r>
-              <a:rPr lang="en-US" sz="2700" b="1" dirty="0">
+              <a:rPr lang="en-US" sz="3400" b="1" dirty="0">
                 <a:solidFill>
                   <a:srgbClr val="003A63"/>
                 </a:solidFill>
@@ -9030,20 +9428,20 @@
               </a:rPr>
               <a:t>What this module helps you do</a:t>
             </a:r>
-            <a:endParaRPr lang="en-US" sz="2700" dirty="0"/>
-          </a:p>
-        </p:txBody>
-      </p:sp>
-      <p:sp>
-        <p:nvSpPr>
-          <p:cNvPr id="8" name="Text 6"/>
-          <p:cNvSpPr/>
-          <p:nvPr/>
-        </p:nvSpPr>
-        <p:spPr>
-          <a:xfrm>
-            <a:off x="868680" y="1417320"/>
-            <a:ext cx="6675120" cy="3291840"/>
+            <a:endParaRPr lang="en-US" sz="3400" dirty="0"/>
+          </a:p>
+        </p:txBody>
+      </p:sp>
+      <p:sp>
+        <p:nvSpPr>
+          <p:cNvPr id="9" name="Text 7"/>
+          <p:cNvSpPr/>
+          <p:nvPr/>
+        </p:nvSpPr>
+        <p:spPr>
+          <a:xfrm>
+            <a:off x="868680" y="1508760"/>
+            <a:ext cx="6446520" cy="2926080"/>
           </a:xfrm>
           <a:prstGeom prst="rect">
             <a:avLst/>
@@ -9058,7 +9456,7 @@
           <a:lstStyle/>
           <a:p>
             <a:r>
-              <a:rPr lang="en-US" sz="1700" dirty="0">
+              <a:rPr lang="en-US" sz="2100" dirty="0">
                 <a:solidFill>
                   <a:srgbClr val="17364A"/>
                 </a:solidFill>
@@ -9066,13 +9464,13 @@
                 <a:ea typeface="Aptos" pitchFamily="34" charset="-122"/>
                 <a:cs typeface="Aptos" pitchFamily="34" charset="-120"/>
               </a:rPr>
-              <a:t>AI security focuses on protecting AI systems, integrations, prompts, outputs, data, users, and connected tools from misuse, unauthorized access,.</a:t>
-            </a:r>
-            <a:endParaRPr lang="en-US" sz="1700" dirty="0"/>
-          </a:p>
-          <a:p>
-            <a:r>
-              <a:rPr lang="en-US" sz="1700" dirty="0">
+              <a:t>AI security focuses on protecting AI systems, integrations, prompts, outputs, data, users, and connected tools.</a:t>
+            </a:r>
+            <a:endParaRPr lang="en-US" sz="2100" dirty="0"/>
+          </a:p>
+          <a:p>
+            <a:r>
+              <a:rPr lang="en-US" sz="2100" dirty="0">
                 <a:solidFill>
                   <a:srgbClr val="17364A"/>
                 </a:solidFill>
@@ -9082,11 +9480,11 @@
               </a:rPr>
               <a:t>Public health agencies handle sensitive health, demographic, legal, operational, and community information.</a:t>
             </a:r>
-            <a:endParaRPr lang="en-US" sz="1700" dirty="0"/>
-          </a:p>
-          <a:p>
-            <a:r>
-              <a:rPr lang="en-US" sz="1700" dirty="0">
+            <a:endParaRPr lang="en-US" sz="2100" dirty="0"/>
+          </a:p>
+          <a:p>
+            <a:r>
+              <a:rPr lang="en-US" sz="2100" dirty="0">
                 <a:solidFill>
                   <a:srgbClr val="17364A"/>
                 </a:solidFill>
@@ -9096,27 +9494,13 @@
               </a:rPr>
               <a:t>AI security is therefore a core public health safeguard, not only an IT responsibility.</a:t>
             </a:r>
-            <a:endParaRPr lang="en-US" sz="1700" dirty="0"/>
-          </a:p>
-          <a:p>
-            <a:r>
-              <a:rPr lang="en-US" sz="1700" dirty="0">
-                <a:solidFill>
-                  <a:srgbClr val="17364A"/>
-                </a:solidFill>
-                <a:latin typeface="Aptos" pitchFamily="34" charset="0"/>
-                <a:ea typeface="Aptos" pitchFamily="34" charset="-122"/>
-                <a:cs typeface="Aptos" pitchFamily="34" charset="-120"/>
-              </a:rPr>
-              <a:t>This module introduces security risks that are especially relevant to generative AI, RAG systems, and agentic workflows.</a:t>
-            </a:r>
-            <a:endParaRPr lang="en-US" sz="1700" dirty="0"/>
-          </a:p>
-        </p:txBody>
-      </p:sp>
-      <p:sp>
-        <p:nvSpPr>
-          <p:cNvPr id="9" name="Shape 7"/>
+            <a:endParaRPr lang="en-US" sz="2100" dirty="0"/>
+          </a:p>
+        </p:txBody>
+      </p:sp>
+      <p:sp>
+        <p:nvSpPr>
+          <p:cNvPr id="10" name="Shape 8"/>
           <p:cNvSpPr/>
           <p:nvPr/>
         </p:nvSpPr>
@@ -9143,14 +9527,14 @@
       </p:sp>
       <p:sp>
         <p:nvSpPr>
-          <p:cNvPr id="10" name="Text 8"/>
+          <p:cNvPr id="11" name="Text 9"/>
           <p:cNvSpPr/>
           <p:nvPr/>
         </p:nvSpPr>
         <p:spPr>
           <a:xfrm>
             <a:off x="8074152" y="1563624"/>
-            <a:ext cx="2825496" cy="201168"/>
+            <a:ext cx="2825496" cy="256032"/>
           </a:xfrm>
           <a:prstGeom prst="rect">
             <a:avLst/>
@@ -9166,7 +9550,7 @@
               <a:buNone/>
             </a:pPr>
             <a:r>
-              <a:rPr lang="en-US" sz="950" b="1" dirty="0">
+              <a:rPr lang="en-US" sz="1300" b="1" dirty="0">
                 <a:solidFill>
                   <a:srgbClr val="0068B7"/>
                 </a:solidFill>
@@ -9176,20 +9560,20 @@
               </a:rPr>
               <a:t>Module details</a:t>
             </a:r>
-            <a:endParaRPr lang="en-US" sz="950" dirty="0"/>
-          </a:p>
-        </p:txBody>
-      </p:sp>
-      <p:sp>
-        <p:nvSpPr>
-          <p:cNvPr id="11" name="Text 9"/>
-          <p:cNvSpPr/>
-          <p:nvPr/>
-        </p:nvSpPr>
-        <p:spPr>
-          <a:xfrm>
-            <a:off x="8074152" y="1856232"/>
-            <a:ext cx="2825496" cy="1353312"/>
+            <a:endParaRPr lang="en-US" sz="1300" dirty="0"/>
+          </a:p>
+        </p:txBody>
+      </p:sp>
+      <p:sp>
+        <p:nvSpPr>
+          <p:cNvPr id="12" name="Text 10"/>
+          <p:cNvSpPr/>
+          <p:nvPr/>
+        </p:nvSpPr>
+        <p:spPr>
+          <a:xfrm>
+            <a:off x="8074152" y="1920240"/>
+            <a:ext cx="2825496" cy="1280160"/>
           </a:xfrm>
           <a:prstGeom prst="rect">
             <a:avLst/>
@@ -9207,7 +9591,7 @@
               <a:buNone/>
             </a:pPr>
             <a:r>
-              <a:rPr lang="en-US" sz="1250" dirty="0">
+              <a:rPr lang="en-US" sz="1550" dirty="0">
                 <a:solidFill>
                   <a:srgbClr val="17364A"/>
                 </a:solidFill>
@@ -9217,14 +9601,14 @@
               </a:rPr>
               <a:t>Level: intermediate/practitioner</a:t>
             </a:r>
-            <a:endParaRPr lang="en-US" sz="1250" dirty="0"/>
+            <a:endParaRPr lang="en-US" sz="1550" dirty="0"/>
           </a:p>
           <a:p>
             <a:pPr indent="0" marL="0">
               <a:buNone/>
             </a:pPr>
             <a:r>
-              <a:rPr lang="en-US" sz="1250" dirty="0">
+              <a:rPr lang="en-US" sz="1550" dirty="0">
                 <a:solidFill>
                   <a:srgbClr val="17364A"/>
                 </a:solidFill>
@@ -9234,14 +9618,14 @@
               </a:rPr>
               <a:t>Primary track: Governance and Security Track</a:t>
             </a:r>
-            <a:endParaRPr lang="en-US" sz="1250" dirty="0"/>
+            <a:endParaRPr lang="en-US" sz="1550" dirty="0"/>
           </a:p>
           <a:p>
             <a:pPr indent="0" marL="0">
               <a:buNone/>
             </a:pPr>
             <a:r>
-              <a:rPr lang="en-US" sz="1250" dirty="0">
+              <a:rPr lang="en-US" sz="1550" dirty="0">
                 <a:solidFill>
                   <a:srgbClr val="17364A"/>
                 </a:solidFill>
@@ -9251,32 +9635,32 @@
               </a:rPr>
               <a:t>Appears in tracks: analytics-modeling</a:t>
             </a:r>
-            <a:endParaRPr lang="en-US" sz="1250" dirty="0"/>
-          </a:p>
-        </p:txBody>
-      </p:sp>
-      <p:sp>
-        <p:nvSpPr>
-          <p:cNvPr id="12" name="Shape 10"/>
-          <p:cNvSpPr/>
-          <p:nvPr/>
-        </p:nvSpPr>
-        <p:spPr>
-          <a:xfrm>
-            <a:off x="7909560" y="3611880"/>
-            <a:ext cx="3154680" cy="1783080"/>
+            <a:endParaRPr lang="en-US" sz="1550" dirty="0"/>
+          </a:p>
+        </p:txBody>
+      </p:sp>
+      <p:sp>
+        <p:nvSpPr>
+          <p:cNvPr id="13" name="Shape 11"/>
+          <p:cNvSpPr/>
+          <p:nvPr/>
+        </p:nvSpPr>
+        <p:spPr>
+          <a:xfrm>
+            <a:off x="7635240" y="3730752"/>
+            <a:ext cx="1033272" cy="749808"/>
           </a:xfrm>
           <a:prstGeom prst="roundRect">
             <a:avLst>
-              <a:gd name="adj" fmla="val 6154"/>
+              <a:gd name="adj" fmla="val 14634"/>
             </a:avLst>
           </a:prstGeom>
           <a:solidFill>
-            <a:srgbClr val="EEF8ED"/>
+            <a:srgbClr val="0068B7"/>
           </a:solidFill>
           <a:ln w="12700">
             <a:solidFill>
-              <a:srgbClr val="B9D7E6"/>
+              <a:srgbClr val="0068B7"/>
             </a:solidFill>
             <a:prstDash val="solid"/>
           </a:ln>
@@ -9284,81 +9668,256 @@
       </p:sp>
       <p:sp>
         <p:nvSpPr>
-          <p:cNvPr id="13" name="Text 11"/>
-          <p:cNvSpPr/>
-          <p:nvPr/>
-        </p:nvSpPr>
-        <p:spPr>
-          <a:xfrm>
-            <a:off x="8074152" y="3758184"/>
-            <a:ext cx="2825496" cy="201168"/>
-          </a:xfrm>
-          <a:prstGeom prst="rect">
-            <a:avLst/>
-          </a:prstGeom>
-          <a:noFill/>
-          <a:ln/>
-        </p:spPr>
-        <p:txBody>
-          <a:bodyPr wrap="square" lIns="0" tIns="0" rIns="0" bIns="0" rtlCol="0" anchor="ctr"/>
-          <a:lstStyle/>
-          <a:p>
-            <a:pPr indent="0" marL="0">
-              <a:buNone/>
-            </a:pPr>
-            <a:r>
-              <a:rPr lang="en-US" sz="950" b="1" dirty="0">
-                <a:solidFill>
-                  <a:srgbClr val="0068B7"/>
-                </a:solidFill>
-                <a:latin typeface="Aptos" pitchFamily="34" charset="0"/>
-                <a:ea typeface="Aptos" pitchFamily="34" charset="-122"/>
-                <a:cs typeface="Aptos" pitchFamily="34" charset="-120"/>
-              </a:rPr>
-              <a:t>Learning approach</a:t>
-            </a:r>
-            <a:endParaRPr lang="en-US" sz="950" dirty="0"/>
-          </a:p>
-        </p:txBody>
-      </p:sp>
-      <p:sp>
-        <p:nvSpPr>
           <p:cNvPr id="14" name="Text 12"/>
           <p:cNvSpPr/>
           <p:nvPr/>
         </p:nvSpPr>
         <p:spPr>
           <a:xfrm>
-            <a:off x="8074152" y="4050792"/>
-            <a:ext cx="2825496" cy="1216152"/>
-          </a:xfrm>
-          <a:prstGeom prst="rect">
-            <a:avLst/>
-          </a:prstGeom>
-          <a:noFill/>
-          <a:ln/>
-        </p:spPr>
-        <p:txBody>
-          <a:bodyPr wrap="square" lIns="0" tIns="0" rIns="0" bIns="0" rtlCol="0" anchor="t">
+            <a:off x="7708392" y="3922776"/>
+            <a:ext cx="886968" cy="310896"/>
+          </a:xfrm>
+          <a:prstGeom prst="rect">
+            <a:avLst/>
+          </a:prstGeom>
+          <a:noFill/>
+          <a:ln/>
+        </p:spPr>
+        <p:txBody>
+          <a:bodyPr wrap="square" lIns="0" tIns="0" rIns="0" bIns="0" rtlCol="0" anchor="ctr">
             <a:normAutofit/>
           </a:bodyPr>
           <a:lstStyle/>
           <a:p>
-            <a:pPr indent="0" marL="0">
-              <a:buNone/>
-            </a:pPr>
-            <a:r>
-              <a:rPr lang="en-US" sz="1250" dirty="0">
-                <a:solidFill>
-                  <a:srgbClr val="17364A"/>
-                </a:solidFill>
-                <a:latin typeface="Aptos" pitchFamily="34" charset="0"/>
-                <a:ea typeface="Aptos" pitchFamily="34" charset="-122"/>
-                <a:cs typeface="Aptos" pitchFamily="34" charset="-120"/>
-              </a:rPr>
-              <a:t>Review the core ideas, complete the practical exercise, check your understanding, and use the related plays and tools to apply the lesson.</a:t>
-            </a:r>
-            <a:endParaRPr lang="en-US" sz="1250" dirty="0"/>
+            <a:pPr algn="ctr" indent="0" marL="0">
+              <a:buNone/>
+            </a:pPr>
+            <a:r>
+              <a:rPr lang="en-US" sz="1500" b="1" dirty="0">
+                <a:solidFill>
+                  <a:srgbClr val="FFFFFF"/>
+                </a:solidFill>
+                <a:latin typeface="Aptos" pitchFamily="34" charset="0"/>
+                <a:ea typeface="Aptos" pitchFamily="34" charset="-122"/>
+                <a:cs typeface="Aptos" pitchFamily="34" charset="-120"/>
+              </a:rPr>
+              <a:t>Learn</a:t>
+            </a:r>
+            <a:endParaRPr lang="en-US" sz="1500" dirty="0"/>
+          </a:p>
+        </p:txBody>
+      </p:sp>
+      <p:sp>
+        <p:nvSpPr>
+          <p:cNvPr id="15" name="Text 13"/>
+          <p:cNvSpPr/>
+          <p:nvPr/>
+        </p:nvSpPr>
+        <p:spPr>
+          <a:xfrm>
+            <a:off x="8695944" y="3941064"/>
+            <a:ext cx="201168" cy="256032"/>
+          </a:xfrm>
+          <a:prstGeom prst="rect">
+            <a:avLst/>
+          </a:prstGeom>
+          <a:noFill/>
+          <a:ln/>
+        </p:spPr>
+        <p:txBody>
+          <a:bodyPr wrap="square" lIns="0" tIns="0" rIns="0" bIns="0" rtlCol="0" anchor="ctr"/>
+          <a:lstStyle/>
+          <a:p>
+            <a:pPr algn="ctr" indent="0" marL="0">
+              <a:buNone/>
+            </a:pPr>
+            <a:r>
+              <a:rPr lang="en-US" sz="1800" b="1" dirty="0">
+                <a:solidFill>
+                  <a:srgbClr val="0068B7"/>
+                </a:solidFill>
+                <a:latin typeface="Aptos" pitchFamily="34" charset="0"/>
+                <a:ea typeface="Aptos" pitchFamily="34" charset="-122"/>
+                <a:cs typeface="Aptos" pitchFamily="34" charset="-120"/>
+              </a:rPr>
+              <a:t>â†’</a:t>
+            </a:r>
+            <a:endParaRPr lang="en-US" sz="1800" dirty="0"/>
+          </a:p>
+        </p:txBody>
+      </p:sp>
+      <p:sp>
+        <p:nvSpPr>
+          <p:cNvPr id="16" name="Shape 14"/>
+          <p:cNvSpPr/>
+          <p:nvPr/>
+        </p:nvSpPr>
+        <p:spPr>
+          <a:xfrm>
+            <a:off x="8924544" y="3730752"/>
+            <a:ext cx="1033272" cy="749808"/>
+          </a:xfrm>
+          <a:prstGeom prst="roundRect">
+            <a:avLst>
+              <a:gd name="adj" fmla="val 14634"/>
+            </a:avLst>
+          </a:prstGeom>
+          <a:solidFill>
+            <a:srgbClr val="2F8A28"/>
+          </a:solidFill>
+          <a:ln w="12700">
+            <a:solidFill>
+              <a:srgbClr val="2F8A28"/>
+            </a:solidFill>
+            <a:prstDash val="solid"/>
+          </a:ln>
+        </p:spPr>
+      </p:sp>
+      <p:sp>
+        <p:nvSpPr>
+          <p:cNvPr id="17" name="Text 15"/>
+          <p:cNvSpPr/>
+          <p:nvPr/>
+        </p:nvSpPr>
+        <p:spPr>
+          <a:xfrm>
+            <a:off x="8997696" y="3922776"/>
+            <a:ext cx="886968" cy="310896"/>
+          </a:xfrm>
+          <a:prstGeom prst="rect">
+            <a:avLst/>
+          </a:prstGeom>
+          <a:noFill/>
+          <a:ln/>
+        </p:spPr>
+        <p:txBody>
+          <a:bodyPr wrap="square" lIns="0" tIns="0" rIns="0" bIns="0" rtlCol="0" anchor="ctr">
+            <a:normAutofit/>
+          </a:bodyPr>
+          <a:lstStyle/>
+          <a:p>
+            <a:pPr algn="ctr" indent="0" marL="0">
+              <a:buNone/>
+            </a:pPr>
+            <a:r>
+              <a:rPr lang="en-US" sz="1500" b="1" dirty="0">
+                <a:solidFill>
+                  <a:srgbClr val="FFFFFF"/>
+                </a:solidFill>
+                <a:latin typeface="Aptos" pitchFamily="34" charset="0"/>
+                <a:ea typeface="Aptos" pitchFamily="34" charset="-122"/>
+                <a:cs typeface="Aptos" pitchFamily="34" charset="-120"/>
+              </a:rPr>
+              <a:t>Apply</a:t>
+            </a:r>
+            <a:endParaRPr lang="en-US" sz="1500" dirty="0"/>
+          </a:p>
+        </p:txBody>
+      </p:sp>
+      <p:sp>
+        <p:nvSpPr>
+          <p:cNvPr id="18" name="Text 16"/>
+          <p:cNvSpPr/>
+          <p:nvPr/>
+        </p:nvSpPr>
+        <p:spPr>
+          <a:xfrm>
+            <a:off x="9985248" y="3941064"/>
+            <a:ext cx="201168" cy="256032"/>
+          </a:xfrm>
+          <a:prstGeom prst="rect">
+            <a:avLst/>
+          </a:prstGeom>
+          <a:noFill/>
+          <a:ln/>
+        </p:spPr>
+        <p:txBody>
+          <a:bodyPr wrap="square" lIns="0" tIns="0" rIns="0" bIns="0" rtlCol="0" anchor="ctr"/>
+          <a:lstStyle/>
+          <a:p>
+            <a:pPr algn="ctr" indent="0" marL="0">
+              <a:buNone/>
+            </a:pPr>
+            <a:r>
+              <a:rPr lang="en-US" sz="1800" b="1" dirty="0">
+                <a:solidFill>
+                  <a:srgbClr val="0068B7"/>
+                </a:solidFill>
+                <a:latin typeface="Aptos" pitchFamily="34" charset="0"/>
+                <a:ea typeface="Aptos" pitchFamily="34" charset="-122"/>
+                <a:cs typeface="Aptos" pitchFamily="34" charset="-120"/>
+              </a:rPr>
+              <a:t>â†’</a:t>
+            </a:r>
+            <a:endParaRPr lang="en-US" sz="1800" dirty="0"/>
+          </a:p>
+        </p:txBody>
+      </p:sp>
+      <p:sp>
+        <p:nvSpPr>
+          <p:cNvPr id="19" name="Shape 17"/>
+          <p:cNvSpPr/>
+          <p:nvPr/>
+        </p:nvSpPr>
+        <p:spPr>
+          <a:xfrm>
+            <a:off x="10213848" y="3730752"/>
+            <a:ext cx="1033272" cy="749808"/>
+          </a:xfrm>
+          <a:prstGeom prst="roundRect">
+            <a:avLst>
+              <a:gd name="adj" fmla="val 14634"/>
+            </a:avLst>
+          </a:prstGeom>
+          <a:solidFill>
+            <a:srgbClr val="6A4CA3"/>
+          </a:solidFill>
+          <a:ln w="12700">
+            <a:solidFill>
+              <a:srgbClr val="6A4CA3"/>
+            </a:solidFill>
+            <a:prstDash val="solid"/>
+          </a:ln>
+        </p:spPr>
+      </p:sp>
+      <p:sp>
+        <p:nvSpPr>
+          <p:cNvPr id="20" name="Text 18"/>
+          <p:cNvSpPr/>
+          <p:nvPr/>
+        </p:nvSpPr>
+        <p:spPr>
+          <a:xfrm>
+            <a:off x="10287000" y="3922776"/>
+            <a:ext cx="886968" cy="310896"/>
+          </a:xfrm>
+          <a:prstGeom prst="rect">
+            <a:avLst/>
+          </a:prstGeom>
+          <a:noFill/>
+          <a:ln/>
+        </p:spPr>
+        <p:txBody>
+          <a:bodyPr wrap="square" lIns="0" tIns="0" rIns="0" bIns="0" rtlCol="0" anchor="ctr">
+            <a:normAutofit/>
+          </a:bodyPr>
+          <a:lstStyle/>
+          <a:p>
+            <a:pPr algn="ctr" indent="0" marL="0">
+              <a:buNone/>
+            </a:pPr>
+            <a:r>
+              <a:rPr lang="en-US" sz="1500" b="1" dirty="0">
+                <a:solidFill>
+                  <a:srgbClr val="FFFFFF"/>
+                </a:solidFill>
+                <a:latin typeface="Aptos" pitchFamily="34" charset="0"/>
+                <a:ea typeface="Aptos" pitchFamily="34" charset="-122"/>
+                <a:cs typeface="Aptos" pitchFamily="34" charset="-120"/>
+              </a:rPr>
+              <a:t>Document</a:t>
+            </a:r>
+            <a:endParaRPr lang="en-US" sz="1500" dirty="0"/>
           </a:p>
         </p:txBody>
       </p:sp>
@@ -9555,7 +10114,7 @@
                 <a:ea typeface="Aptos" pitchFamily="34" charset="-122"/>
                 <a:cs typeface="Aptos" pitchFamily="34" charset="-120"/>
               </a:rPr>
-              <a:t>© Paula Soper</a:t>
+              <a:t>Â© Paula Soper</a:t>
             </a:r>
             <a:endParaRPr lang="en-US" sz="800" dirty="0"/>
           </a:p>
@@ -9569,8 +10128,47 @@
         </p:nvSpPr>
         <p:spPr>
           <a:xfrm>
+            <a:off x="11137392" y="6510528"/>
+            <a:ext cx="411480" cy="201168"/>
+          </a:xfrm>
+          <a:prstGeom prst="rect">
+            <a:avLst/>
+          </a:prstGeom>
+          <a:noFill/>
+          <a:ln/>
+        </p:spPr>
+        <p:txBody>
+          <a:bodyPr wrap="square" lIns="0" tIns="0" rIns="0" bIns="0" rtlCol="0" anchor="ctr"/>
+          <a:lstStyle/>
+          <a:p>
+            <a:pPr algn="r" indent="0" marL="0">
+              <a:buNone/>
+            </a:pPr>
+            <a:r>
+              <a:rPr lang="en-US" sz="900" dirty="0">
+                <a:solidFill>
+                  <a:srgbClr val="5F7181"/>
+                </a:solidFill>
+                <a:latin typeface="Aptos" pitchFamily="34" charset="0"/>
+                <a:ea typeface="Aptos" pitchFamily="34" charset="-122"/>
+                <a:cs typeface="Aptos" pitchFamily="34" charset="-120"/>
+              </a:rPr>
+              <a:t>20</a:t>
+            </a:r>
+            <a:endParaRPr lang="en-US" sz="900" dirty="0"/>
+          </a:p>
+        </p:txBody>
+      </p:sp>
+      <p:sp>
+        <p:nvSpPr>
+          <p:cNvPr id="8" name="Text 6"/>
+          <p:cNvSpPr/>
+          <p:nvPr/>
+        </p:nvSpPr>
+        <p:spPr>
+          <a:xfrm>
             <a:off x="640080" y="658368"/>
-            <a:ext cx="10881360" cy="566928"/>
+            <a:ext cx="10881360" cy="713232"/>
           </a:xfrm>
           <a:prstGeom prst="rect">
             <a:avLst/>
@@ -9588,7 +10186,7 @@
               <a:buNone/>
             </a:pPr>
             <a:r>
-              <a:rPr lang="en-US" sz="2700" b="1" dirty="0">
+              <a:rPr lang="en-US" sz="3400" b="1" dirty="0">
                 <a:solidFill>
                   <a:srgbClr val="003A63"/>
                 </a:solidFill>
@@ -9598,20 +10196,20 @@
               </a:rPr>
               <a:t>Expected Artifact or Evidence Continued</a:t>
             </a:r>
-            <a:endParaRPr lang="en-US" sz="2700" dirty="0"/>
-          </a:p>
-        </p:txBody>
-      </p:sp>
-      <p:sp>
-        <p:nvSpPr>
-          <p:cNvPr id="8" name="Text 6"/>
-          <p:cNvSpPr/>
-          <p:nvPr/>
-        </p:nvSpPr>
-        <p:spPr>
-          <a:xfrm>
-            <a:off x="868680" y="1417320"/>
-            <a:ext cx="6675120" cy="4434840"/>
+            <a:endParaRPr lang="en-US" sz="3400" dirty="0"/>
+          </a:p>
+        </p:txBody>
+      </p:sp>
+      <p:sp>
+        <p:nvSpPr>
+          <p:cNvPr id="9" name="Text 7"/>
+          <p:cNvSpPr/>
+          <p:nvPr/>
+        </p:nvSpPr>
+        <p:spPr>
+          <a:xfrm>
+            <a:off x="868680" y="1508760"/>
+            <a:ext cx="6537960" cy="4160520"/>
           </a:xfrm>
           <a:prstGeom prst="rect">
             <a:avLst/>
@@ -9626,7 +10224,7 @@
           <a:lstStyle/>
           <a:p>
             <a:r>
-              <a:rPr lang="en-US" sz="1700" dirty="0">
+              <a:rPr lang="en-US" sz="2100" dirty="0">
                 <a:solidFill>
                   <a:srgbClr val="17364A"/>
                 </a:solidFill>
@@ -9636,13 +10234,13 @@
               </a:rPr>
               <a:t>AI incident trigger and escalation plan</a:t>
             </a:r>
-            <a:endParaRPr lang="en-US" sz="1700" dirty="0"/>
-          </a:p>
-        </p:txBody>
-      </p:sp>
-      <p:sp>
-        <p:nvSpPr>
-          <p:cNvPr id="9" name="Shape 7"/>
+            <a:endParaRPr lang="en-US" sz="2100" dirty="0"/>
+          </a:p>
+        </p:txBody>
+      </p:sp>
+      <p:sp>
+        <p:nvSpPr>
+          <p:cNvPr id="10" name="Shape 8"/>
           <p:cNvSpPr/>
           <p:nvPr/>
         </p:nvSpPr>
@@ -9669,14 +10267,14 @@
       </p:sp>
       <p:sp>
         <p:nvSpPr>
-          <p:cNvPr id="10" name="Text 8"/>
+          <p:cNvPr id="11" name="Text 9"/>
           <p:cNvSpPr/>
           <p:nvPr/>
         </p:nvSpPr>
         <p:spPr>
           <a:xfrm>
             <a:off x="8074152" y="1563624"/>
-            <a:ext cx="2825496" cy="201168"/>
+            <a:ext cx="2825496" cy="256032"/>
           </a:xfrm>
           <a:prstGeom prst="rect">
             <a:avLst/>
@@ -9692,7 +10290,7 @@
               <a:buNone/>
             </a:pPr>
             <a:r>
-              <a:rPr lang="en-US" sz="950" b="1" dirty="0">
+              <a:rPr lang="en-US" sz="1300" b="1" dirty="0">
                 <a:solidFill>
                   <a:srgbClr val="0068B7"/>
                 </a:solidFill>
@@ -9702,20 +10300,20 @@
               </a:rPr>
               <a:t>Key idea</a:t>
             </a:r>
-            <a:endParaRPr lang="en-US" sz="950" dirty="0"/>
-          </a:p>
-        </p:txBody>
-      </p:sp>
-      <p:sp>
-        <p:nvSpPr>
-          <p:cNvPr id="11" name="Text 9"/>
-          <p:cNvSpPr/>
-          <p:nvPr/>
-        </p:nvSpPr>
-        <p:spPr>
-          <a:xfrm>
-            <a:off x="8074152" y="1856232"/>
-            <a:ext cx="2825496" cy="1261872"/>
+            <a:endParaRPr lang="en-US" sz="1300" dirty="0"/>
+          </a:p>
+        </p:txBody>
+      </p:sp>
+      <p:sp>
+        <p:nvSpPr>
+          <p:cNvPr id="12" name="Text 10"/>
+          <p:cNvSpPr/>
+          <p:nvPr/>
+        </p:nvSpPr>
+        <p:spPr>
+          <a:xfrm>
+            <a:off x="8074152" y="1920240"/>
+            <a:ext cx="2825496" cy="1188720"/>
           </a:xfrm>
           <a:prstGeom prst="rect">
             <a:avLst/>
@@ -9733,7 +10331,7 @@
               <a:buNone/>
             </a:pPr>
             <a:r>
-              <a:rPr lang="en-US" sz="1250" dirty="0">
+              <a:rPr lang="en-US" sz="1550" dirty="0">
                 <a:solidFill>
                   <a:srgbClr val="17364A"/>
                 </a:solidFill>
@@ -9743,13 +10341,13 @@
               </a:rPr>
               <a:t>AI incident trigger and escalation plan</a:t>
             </a:r>
-            <a:endParaRPr lang="en-US" sz="1250" dirty="0"/>
-          </a:p>
-        </p:txBody>
-      </p:sp>
-      <p:sp>
-        <p:nvSpPr>
-          <p:cNvPr id="12" name="Shape 10"/>
+            <a:endParaRPr lang="en-US" sz="1550" dirty="0"/>
+          </a:p>
+        </p:txBody>
+      </p:sp>
+      <p:sp>
+        <p:nvSpPr>
+          <p:cNvPr id="13" name="Shape 11"/>
           <p:cNvSpPr/>
           <p:nvPr/>
         </p:nvSpPr>
@@ -9776,14 +10374,14 @@
       </p:sp>
       <p:sp>
         <p:nvSpPr>
-          <p:cNvPr id="13" name="Text 11"/>
+          <p:cNvPr id="14" name="Text 12"/>
           <p:cNvSpPr/>
           <p:nvPr/>
         </p:nvSpPr>
         <p:spPr>
           <a:xfrm>
             <a:off x="8074152" y="3666744"/>
-            <a:ext cx="2825496" cy="201168"/>
+            <a:ext cx="2825496" cy="256032"/>
           </a:xfrm>
           <a:prstGeom prst="rect">
             <a:avLst/>
@@ -9799,7 +10397,7 @@
               <a:buNone/>
             </a:pPr>
             <a:r>
-              <a:rPr lang="en-US" sz="950" b="1" dirty="0">
+              <a:rPr lang="en-US" sz="1300" b="1" dirty="0">
                 <a:solidFill>
                   <a:srgbClr val="0068B7"/>
                 </a:solidFill>
@@ -9809,20 +10407,20 @@
               </a:rPr>
               <a:t>Use this for</a:t>
             </a:r>
-            <a:endParaRPr lang="en-US" sz="950" dirty="0"/>
-          </a:p>
-        </p:txBody>
-      </p:sp>
-      <p:sp>
-        <p:nvSpPr>
-          <p:cNvPr id="14" name="Text 12"/>
-          <p:cNvSpPr/>
-          <p:nvPr/>
-        </p:nvSpPr>
-        <p:spPr>
-          <a:xfrm>
-            <a:off x="8074152" y="3959352"/>
-            <a:ext cx="2825496" cy="1170432"/>
+            <a:endParaRPr lang="en-US" sz="1300" dirty="0"/>
+          </a:p>
+        </p:txBody>
+      </p:sp>
+      <p:sp>
+        <p:nvSpPr>
+          <p:cNvPr id="15" name="Text 13"/>
+          <p:cNvSpPr/>
+          <p:nvPr/>
+        </p:nvSpPr>
+        <p:spPr>
+          <a:xfrm>
+            <a:off x="8074152" y="4023360"/>
+            <a:ext cx="2825496" cy="1097280"/>
           </a:xfrm>
           <a:prstGeom prst="rect">
             <a:avLst/>
@@ -9840,7 +10438,7 @@
               <a:buNone/>
             </a:pPr>
             <a:r>
-              <a:rPr lang="en-US" sz="1250" dirty="0">
+              <a:rPr lang="en-US" sz="1550" dirty="0">
                 <a:solidFill>
                   <a:srgbClr val="17364A"/>
                 </a:solidFill>
@@ -9850,7 +10448,7 @@
               </a:rPr>
               <a:t>Connect the concept to public health decisions, safeguards, documentation, or implementation work.</a:t>
             </a:r>
-            <a:endParaRPr lang="en-US" sz="1250" dirty="0"/>
+            <a:endParaRPr lang="en-US" sz="1550" dirty="0"/>
           </a:p>
         </p:txBody>
       </p:sp>
@@ -10047,7 +10645,7 @@
                 <a:ea typeface="Aptos" pitchFamily="34" charset="-122"/>
                 <a:cs typeface="Aptos" pitchFamily="34" charset="-120"/>
               </a:rPr>
-              <a:t>© Paula Soper</a:t>
+              <a:t>Â© Paula Soper</a:t>
             </a:r>
             <a:endParaRPr lang="en-US" sz="800" dirty="0"/>
           </a:p>
@@ -10055,7 +10653,46 @@
       </p:sp>
       <p:sp>
         <p:nvSpPr>
-          <p:cNvPr id="7" name="Shape 5"/>
+          <p:cNvPr id="7" name="Text 5"/>
+          <p:cNvSpPr/>
+          <p:nvPr/>
+        </p:nvSpPr>
+        <p:spPr>
+          <a:xfrm>
+            <a:off x="11137392" y="6510528"/>
+            <a:ext cx="411480" cy="201168"/>
+          </a:xfrm>
+          <a:prstGeom prst="rect">
+            <a:avLst/>
+          </a:prstGeom>
+          <a:noFill/>
+          <a:ln/>
+        </p:spPr>
+        <p:txBody>
+          <a:bodyPr wrap="square" lIns="0" tIns="0" rIns="0" bIns="0" rtlCol="0" anchor="ctr"/>
+          <a:lstStyle/>
+          <a:p>
+            <a:pPr algn="r" indent="0" marL="0">
+              <a:buNone/>
+            </a:pPr>
+            <a:r>
+              <a:rPr lang="en-US" sz="900" dirty="0">
+                <a:solidFill>
+                  <a:srgbClr val="5F7181"/>
+                </a:solidFill>
+                <a:latin typeface="Aptos" pitchFamily="34" charset="0"/>
+                <a:ea typeface="Aptos" pitchFamily="34" charset="-122"/>
+                <a:cs typeface="Aptos" pitchFamily="34" charset="-120"/>
+              </a:rPr>
+              <a:t>21</a:t>
+            </a:r>
+            <a:endParaRPr lang="en-US" sz="900" dirty="0"/>
+          </a:p>
+        </p:txBody>
+      </p:sp>
+      <p:sp>
+        <p:nvSpPr>
+          <p:cNvPr id="8" name="Shape 6"/>
           <p:cNvSpPr/>
           <p:nvPr/>
         </p:nvSpPr>
@@ -10080,7 +10717,7 @@
       </p:sp>
       <p:sp>
         <p:nvSpPr>
-          <p:cNvPr id="8" name="Text 6"/>
+          <p:cNvPr id="9" name="Text 7"/>
           <p:cNvSpPr/>
           <p:nvPr/>
         </p:nvSpPr>
@@ -10119,14 +10756,14 @@
       </p:sp>
       <p:sp>
         <p:nvSpPr>
-          <p:cNvPr id="9" name="Text 7"/>
+          <p:cNvPr id="10" name="Text 8"/>
           <p:cNvSpPr/>
           <p:nvPr/>
         </p:nvSpPr>
         <p:spPr>
           <a:xfrm>
             <a:off x="640080" y="621792"/>
-            <a:ext cx="10881360" cy="566928"/>
+            <a:ext cx="10881360" cy="713232"/>
           </a:xfrm>
           <a:prstGeom prst="rect">
             <a:avLst/>
@@ -10144,7 +10781,7 @@
               <a:buNone/>
             </a:pPr>
             <a:r>
-              <a:rPr lang="en-US" sz="2700" b="1" dirty="0">
+              <a:rPr lang="en-US" sz="3400" b="1" dirty="0">
                 <a:solidFill>
                   <a:srgbClr val="003A63"/>
                 </a:solidFill>
@@ -10154,20 +10791,20 @@
               </a:rPr>
               <a:t>Expected Assignment</a:t>
             </a:r>
-            <a:endParaRPr lang="en-US" sz="2700" dirty="0"/>
-          </a:p>
-        </p:txBody>
-      </p:sp>
-      <p:sp>
-        <p:nvSpPr>
-          <p:cNvPr id="10" name="Text 8"/>
-          <p:cNvSpPr/>
-          <p:nvPr/>
-        </p:nvSpPr>
-        <p:spPr>
-          <a:xfrm>
-            <a:off x="868680" y="1417320"/>
-            <a:ext cx="6675120" cy="4434840"/>
+            <a:endParaRPr lang="en-US" sz="3400" dirty="0"/>
+          </a:p>
+        </p:txBody>
+      </p:sp>
+      <p:sp>
+        <p:nvSpPr>
+          <p:cNvPr id="11" name="Text 9"/>
+          <p:cNvSpPr/>
+          <p:nvPr/>
+        </p:nvSpPr>
+        <p:spPr>
+          <a:xfrm>
+            <a:off x="868680" y="1508760"/>
+            <a:ext cx="6537960" cy="4160520"/>
           </a:xfrm>
           <a:prstGeom prst="rect">
             <a:avLst/>
@@ -10182,7 +10819,7 @@
           <a:lstStyle/>
           <a:p>
             <a:r>
-              <a:rPr lang="en-US" sz="1700" dirty="0">
+              <a:rPr lang="en-US" sz="2100" dirty="0">
                 <a:solidFill>
                   <a:srgbClr val="17364A"/>
                 </a:solidFill>
@@ -10192,11 +10829,11 @@
               </a:rPr>
               <a:t>Secure AI workflow checklist</a:t>
             </a:r>
-            <a:endParaRPr lang="en-US" sz="1700" dirty="0"/>
-          </a:p>
-          <a:p>
-            <a:r>
-              <a:rPr lang="en-US" sz="1700" dirty="0">
+            <a:endParaRPr lang="en-US" sz="2100" dirty="0"/>
+          </a:p>
+          <a:p>
+            <a:r>
+              <a:rPr lang="en-US" sz="2100" dirty="0">
                 <a:solidFill>
                   <a:srgbClr val="17364A"/>
                 </a:solidFill>
@@ -10206,11 +10843,11 @@
               </a:rPr>
               <a:t>Vendor and implementation security questions</a:t>
             </a:r>
-            <a:endParaRPr lang="en-US" sz="1700" dirty="0"/>
-          </a:p>
-          <a:p>
-            <a:r>
-              <a:rPr lang="en-US" sz="1700" dirty="0">
+            <a:endParaRPr lang="en-US" sz="2100" dirty="0"/>
+          </a:p>
+          <a:p>
+            <a:r>
+              <a:rPr lang="en-US" sz="2100" dirty="0">
                 <a:solidFill>
                   <a:srgbClr val="17364A"/>
                 </a:solidFill>
@@ -10220,27 +10857,13 @@
               </a:rPr>
               <a:t>Prompt injection risk notes</a:t>
             </a:r>
-            <a:endParaRPr lang="en-US" sz="1700" dirty="0"/>
-          </a:p>
-          <a:p>
-            <a:r>
-              <a:rPr lang="en-US" sz="1700" dirty="0">
-                <a:solidFill>
-                  <a:srgbClr val="17364A"/>
-                </a:solidFill>
-                <a:latin typeface="Aptos" pitchFamily="34" charset="0"/>
-                <a:ea typeface="Aptos" pitchFamily="34" charset="-122"/>
-                <a:cs typeface="Aptos" pitchFamily="34" charset="-120"/>
-              </a:rPr>
-              <a:t>AI incident trigger and escalation plan</a:t>
-            </a:r>
-            <a:endParaRPr lang="en-US" sz="1700" dirty="0"/>
-          </a:p>
-        </p:txBody>
-      </p:sp>
-      <p:sp>
-        <p:nvSpPr>
-          <p:cNvPr id="11" name="Shape 9"/>
+            <a:endParaRPr lang="en-US" sz="2100" dirty="0"/>
+          </a:p>
+        </p:txBody>
+      </p:sp>
+      <p:sp>
+        <p:nvSpPr>
+          <p:cNvPr id="12" name="Shape 10"/>
           <p:cNvSpPr/>
           <p:nvPr/>
         </p:nvSpPr>
@@ -10267,14 +10890,14 @@
       </p:sp>
       <p:sp>
         <p:nvSpPr>
-          <p:cNvPr id="12" name="Text 10"/>
+          <p:cNvPr id="13" name="Text 11"/>
           <p:cNvSpPr/>
           <p:nvPr/>
         </p:nvSpPr>
         <p:spPr>
           <a:xfrm>
             <a:off x="8074152" y="1563624"/>
-            <a:ext cx="2825496" cy="201168"/>
+            <a:ext cx="2825496" cy="256032"/>
           </a:xfrm>
           <a:prstGeom prst="rect">
             <a:avLst/>
@@ -10290,7 +10913,7 @@
               <a:buNone/>
             </a:pPr>
             <a:r>
-              <a:rPr lang="en-US" sz="950" b="1" dirty="0">
+              <a:rPr lang="en-US" sz="1300" b="1" dirty="0">
                 <a:solidFill>
                   <a:srgbClr val="0068B7"/>
                 </a:solidFill>
@@ -10300,20 +10923,20 @@
               </a:rPr>
               <a:t>Key idea</a:t>
             </a:r>
-            <a:endParaRPr lang="en-US" sz="950" dirty="0"/>
-          </a:p>
-        </p:txBody>
-      </p:sp>
-      <p:sp>
-        <p:nvSpPr>
-          <p:cNvPr id="13" name="Text 11"/>
-          <p:cNvSpPr/>
-          <p:nvPr/>
-        </p:nvSpPr>
-        <p:spPr>
-          <a:xfrm>
-            <a:off x="8074152" y="1856232"/>
-            <a:ext cx="2825496" cy="1261872"/>
+            <a:endParaRPr lang="en-US" sz="1300" dirty="0"/>
+          </a:p>
+        </p:txBody>
+      </p:sp>
+      <p:sp>
+        <p:nvSpPr>
+          <p:cNvPr id="14" name="Text 12"/>
+          <p:cNvSpPr/>
+          <p:nvPr/>
+        </p:nvSpPr>
+        <p:spPr>
+          <a:xfrm>
+            <a:off x="8074152" y="1920240"/>
+            <a:ext cx="2825496" cy="1188720"/>
           </a:xfrm>
           <a:prstGeom prst="rect">
             <a:avLst/>
@@ -10331,7 +10954,7 @@
               <a:buNone/>
             </a:pPr>
             <a:r>
-              <a:rPr lang="en-US" sz="1250" dirty="0">
+              <a:rPr lang="en-US" sz="1550" dirty="0">
                 <a:solidFill>
                   <a:srgbClr val="17364A"/>
                 </a:solidFill>
@@ -10341,13 +10964,13 @@
               </a:rPr>
               <a:t>Secure AI workflow checklist</a:t>
             </a:r>
-            <a:endParaRPr lang="en-US" sz="1250" dirty="0"/>
-          </a:p>
-        </p:txBody>
-      </p:sp>
-      <p:sp>
-        <p:nvSpPr>
-          <p:cNvPr id="14" name="Shape 12"/>
+            <a:endParaRPr lang="en-US" sz="1550" dirty="0"/>
+          </a:p>
+        </p:txBody>
+      </p:sp>
+      <p:sp>
+        <p:nvSpPr>
+          <p:cNvPr id="15" name="Shape 13"/>
           <p:cNvSpPr/>
           <p:nvPr/>
         </p:nvSpPr>
@@ -10374,14 +10997,14 @@
       </p:sp>
       <p:sp>
         <p:nvSpPr>
-          <p:cNvPr id="15" name="Text 13"/>
+          <p:cNvPr id="16" name="Text 14"/>
           <p:cNvSpPr/>
           <p:nvPr/>
         </p:nvSpPr>
         <p:spPr>
           <a:xfrm>
             <a:off x="8074152" y="3666744"/>
-            <a:ext cx="2825496" cy="201168"/>
+            <a:ext cx="2825496" cy="256032"/>
           </a:xfrm>
           <a:prstGeom prst="rect">
             <a:avLst/>
@@ -10397,7 +11020,7 @@
               <a:buNone/>
             </a:pPr>
             <a:r>
-              <a:rPr lang="en-US" sz="950" b="1" dirty="0">
+              <a:rPr lang="en-US" sz="1300" b="1" dirty="0">
                 <a:solidFill>
                   <a:srgbClr val="0068B7"/>
                 </a:solidFill>
@@ -10407,20 +11030,20 @@
               </a:rPr>
               <a:t>Use this for</a:t>
             </a:r>
-            <a:endParaRPr lang="en-US" sz="950" dirty="0"/>
-          </a:p>
-        </p:txBody>
-      </p:sp>
-      <p:sp>
-        <p:nvSpPr>
-          <p:cNvPr id="16" name="Text 14"/>
-          <p:cNvSpPr/>
-          <p:nvPr/>
-        </p:nvSpPr>
-        <p:spPr>
-          <a:xfrm>
-            <a:off x="8074152" y="3959352"/>
-            <a:ext cx="2825496" cy="1170432"/>
+            <a:endParaRPr lang="en-US" sz="1300" dirty="0"/>
+          </a:p>
+        </p:txBody>
+      </p:sp>
+      <p:sp>
+        <p:nvSpPr>
+          <p:cNvPr id="17" name="Text 15"/>
+          <p:cNvSpPr/>
+          <p:nvPr/>
+        </p:nvSpPr>
+        <p:spPr>
+          <a:xfrm>
+            <a:off x="8074152" y="4023360"/>
+            <a:ext cx="2825496" cy="1097280"/>
           </a:xfrm>
           <a:prstGeom prst="rect">
             <a:avLst/>
@@ -10438,7 +11061,7 @@
               <a:buNone/>
             </a:pPr>
             <a:r>
-              <a:rPr lang="en-US" sz="1250" dirty="0">
+              <a:rPr lang="en-US" sz="1550" dirty="0">
                 <a:solidFill>
                   <a:srgbClr val="17364A"/>
                 </a:solidFill>
@@ -10448,7 +11071,7 @@
               </a:rPr>
               <a:t>Connect the concept to public health decisions, safeguards, documentation, or implementation work.</a:t>
             </a:r>
-            <a:endParaRPr lang="en-US" sz="1250" dirty="0"/>
+            <a:endParaRPr lang="en-US" sz="1550" dirty="0"/>
           </a:p>
         </p:txBody>
       </p:sp>
@@ -10645,7 +11268,7 @@
                 <a:ea typeface="Aptos" pitchFamily="34" charset="-122"/>
                 <a:cs typeface="Aptos" pitchFamily="34" charset="-120"/>
               </a:rPr>
-              <a:t>© Paula Soper</a:t>
+              <a:t>Â© Paula Soper</a:t>
             </a:r>
             <a:endParaRPr lang="en-US" sz="800" dirty="0"/>
           </a:p>
@@ -10653,7 +11276,46 @@
       </p:sp>
       <p:sp>
         <p:nvSpPr>
-          <p:cNvPr id="7" name="Shape 5"/>
+          <p:cNvPr id="7" name="Text 5"/>
+          <p:cNvSpPr/>
+          <p:nvPr/>
+        </p:nvSpPr>
+        <p:spPr>
+          <a:xfrm>
+            <a:off x="11137392" y="6510528"/>
+            <a:ext cx="411480" cy="201168"/>
+          </a:xfrm>
+          <a:prstGeom prst="rect">
+            <a:avLst/>
+          </a:prstGeom>
+          <a:noFill/>
+          <a:ln/>
+        </p:spPr>
+        <p:txBody>
+          <a:bodyPr wrap="square" lIns="0" tIns="0" rIns="0" bIns="0" rtlCol="0" anchor="ctr"/>
+          <a:lstStyle/>
+          <a:p>
+            <a:pPr algn="r" indent="0" marL="0">
+              <a:buNone/>
+            </a:pPr>
+            <a:r>
+              <a:rPr lang="en-US" sz="900" dirty="0">
+                <a:solidFill>
+                  <a:srgbClr val="5F7181"/>
+                </a:solidFill>
+                <a:latin typeface="Aptos" pitchFamily="34" charset="0"/>
+                <a:ea typeface="Aptos" pitchFamily="34" charset="-122"/>
+                <a:cs typeface="Aptos" pitchFamily="34" charset="-120"/>
+              </a:rPr>
+              <a:t>22</a:t>
+            </a:r>
+            <a:endParaRPr lang="en-US" sz="900" dirty="0"/>
+          </a:p>
+        </p:txBody>
+      </p:sp>
+      <p:sp>
+        <p:nvSpPr>
+          <p:cNvPr id="8" name="Shape 6"/>
           <p:cNvSpPr/>
           <p:nvPr/>
         </p:nvSpPr>
@@ -10678,7 +11340,7 @@
       </p:sp>
       <p:sp>
         <p:nvSpPr>
-          <p:cNvPr id="8" name="Text 6"/>
+          <p:cNvPr id="9" name="Text 7"/>
           <p:cNvSpPr/>
           <p:nvPr/>
         </p:nvSpPr>
@@ -10717,14 +11379,14 @@
       </p:sp>
       <p:sp>
         <p:nvSpPr>
-          <p:cNvPr id="9" name="Text 7"/>
+          <p:cNvPr id="10" name="Text 8"/>
           <p:cNvSpPr/>
           <p:nvPr/>
         </p:nvSpPr>
         <p:spPr>
           <a:xfrm>
             <a:off x="640080" y="621792"/>
-            <a:ext cx="10881360" cy="566928"/>
+            <a:ext cx="10881360" cy="713232"/>
           </a:xfrm>
           <a:prstGeom prst="rect">
             <a:avLst/>
@@ -10742,7 +11404,7 @@
               <a:buNone/>
             </a:pPr>
             <a:r>
-              <a:rPr lang="en-US" sz="2700" b="1" dirty="0">
+              <a:rPr lang="en-US" sz="3400" b="1" dirty="0">
                 <a:solidFill>
                   <a:srgbClr val="003A63"/>
                 </a:solidFill>
@@ -10752,20 +11414,20 @@
               </a:rPr>
               <a:t>Knowledge Check</a:t>
             </a:r>
-            <a:endParaRPr lang="en-US" sz="2700" dirty="0"/>
-          </a:p>
-        </p:txBody>
-      </p:sp>
-      <p:sp>
-        <p:nvSpPr>
-          <p:cNvPr id="10" name="Text 8"/>
-          <p:cNvSpPr/>
-          <p:nvPr/>
-        </p:nvSpPr>
-        <p:spPr>
-          <a:xfrm>
-            <a:off x="868680" y="1417320"/>
-            <a:ext cx="6675120" cy="4434840"/>
+            <a:endParaRPr lang="en-US" sz="3400" dirty="0"/>
+          </a:p>
+        </p:txBody>
+      </p:sp>
+      <p:sp>
+        <p:nvSpPr>
+          <p:cNvPr id="11" name="Text 9"/>
+          <p:cNvSpPr/>
+          <p:nvPr/>
+        </p:nvSpPr>
+        <p:spPr>
+          <a:xfrm>
+            <a:off x="868680" y="1508760"/>
+            <a:ext cx="6537960" cy="4160520"/>
           </a:xfrm>
           <a:prstGeom prst="rect">
             <a:avLst/>
@@ -10780,7 +11442,7 @@
           <a:lstStyle/>
           <a:p>
             <a:r>
-              <a:rPr lang="en-US" sz="1700" dirty="0">
+              <a:rPr lang="en-US" sz="2100" dirty="0">
                 <a:solidFill>
                   <a:srgbClr val="17364A"/>
                 </a:solidFill>
@@ -10790,11 +11452,11 @@
               </a:rPr>
               <a:t>1. What is prompt injection?</a:t>
             </a:r>
-            <a:endParaRPr lang="en-US" sz="1700" dirty="0"/>
-          </a:p>
-          <a:p>
-            <a:r>
-              <a:rPr lang="en-US" sz="1700" dirty="0">
+            <a:endParaRPr lang="en-US" sz="2100" dirty="0"/>
+          </a:p>
+          <a:p>
+            <a:r>
+              <a:rPr lang="en-US" sz="2100" dirty="0">
                 <a:solidFill>
                   <a:srgbClr val="17364A"/>
                 </a:solidFill>
@@ -10804,11 +11466,11 @@
               </a:rPr>
               <a:t>2. What does least privilege mean?</a:t>
             </a:r>
-            <a:endParaRPr lang="en-US" sz="1700" dirty="0"/>
-          </a:p>
-          <a:p>
-            <a:r>
-              <a:rPr lang="en-US" sz="1700" dirty="0">
+            <a:endParaRPr lang="en-US" sz="2100" dirty="0"/>
+          </a:p>
+          <a:p>
+            <a:r>
+              <a:rPr lang="en-US" sz="2100" dirty="0">
                 <a:solidFill>
                   <a:srgbClr val="17364A"/>
                 </a:solidFill>
@@ -10818,27 +11480,13 @@
               </a:rPr>
               <a:t>3. Why does agentic AI increase security risk?</a:t>
             </a:r>
-            <a:endParaRPr lang="en-US" sz="1700" dirty="0"/>
-          </a:p>
-          <a:p>
-            <a:r>
-              <a:rPr lang="en-US" sz="1700" dirty="0">
-                <a:solidFill>
-                  <a:srgbClr val="17364A"/>
-                </a:solidFill>
-                <a:latin typeface="Aptos" pitchFamily="34" charset="0"/>
-                <a:ea typeface="Aptos" pitchFamily="34" charset="-122"/>
-                <a:cs typeface="Aptos" pitchFamily="34" charset="-120"/>
-              </a:rPr>
-              <a:t>4. Which control helps investigate AI-related incidents?</a:t>
-            </a:r>
-            <a:endParaRPr lang="en-US" sz="1700" dirty="0"/>
-          </a:p>
-        </p:txBody>
-      </p:sp>
-      <p:sp>
-        <p:nvSpPr>
-          <p:cNvPr id="11" name="Shape 9"/>
+            <a:endParaRPr lang="en-US" sz="2100" dirty="0"/>
+          </a:p>
+        </p:txBody>
+      </p:sp>
+      <p:sp>
+        <p:nvSpPr>
+          <p:cNvPr id="12" name="Shape 10"/>
           <p:cNvSpPr/>
           <p:nvPr/>
         </p:nvSpPr>
@@ -10865,14 +11513,14 @@
       </p:sp>
       <p:sp>
         <p:nvSpPr>
-          <p:cNvPr id="12" name="Text 10"/>
+          <p:cNvPr id="13" name="Text 11"/>
           <p:cNvSpPr/>
           <p:nvPr/>
         </p:nvSpPr>
         <p:spPr>
           <a:xfrm>
             <a:off x="8074152" y="1563624"/>
-            <a:ext cx="2825496" cy="201168"/>
+            <a:ext cx="2825496" cy="256032"/>
           </a:xfrm>
           <a:prstGeom prst="rect">
             <a:avLst/>
@@ -10888,7 +11536,7 @@
               <a:buNone/>
             </a:pPr>
             <a:r>
-              <a:rPr lang="en-US" sz="950" b="1" dirty="0">
+              <a:rPr lang="en-US" sz="1300" b="1" dirty="0">
                 <a:solidFill>
                   <a:srgbClr val="0068B7"/>
                 </a:solidFill>
@@ -10898,20 +11546,20 @@
               </a:rPr>
               <a:t>Key idea</a:t>
             </a:r>
-            <a:endParaRPr lang="en-US" sz="950" dirty="0"/>
-          </a:p>
-        </p:txBody>
-      </p:sp>
-      <p:sp>
-        <p:nvSpPr>
-          <p:cNvPr id="13" name="Text 11"/>
-          <p:cNvSpPr/>
-          <p:nvPr/>
-        </p:nvSpPr>
-        <p:spPr>
-          <a:xfrm>
-            <a:off x="8074152" y="1856232"/>
-            <a:ext cx="2825496" cy="1261872"/>
+            <a:endParaRPr lang="en-US" sz="1300" dirty="0"/>
+          </a:p>
+        </p:txBody>
+      </p:sp>
+      <p:sp>
+        <p:nvSpPr>
+          <p:cNvPr id="14" name="Text 12"/>
+          <p:cNvSpPr/>
+          <p:nvPr/>
+        </p:nvSpPr>
+        <p:spPr>
+          <a:xfrm>
+            <a:off x="8074152" y="1920240"/>
+            <a:ext cx="2825496" cy="1188720"/>
           </a:xfrm>
           <a:prstGeom prst="rect">
             <a:avLst/>
@@ -10929,7 +11577,7 @@
               <a:buNone/>
             </a:pPr>
             <a:r>
-              <a:rPr lang="en-US" sz="1250" dirty="0">
+              <a:rPr lang="en-US" sz="1550" dirty="0">
                 <a:solidFill>
                   <a:srgbClr val="17364A"/>
                 </a:solidFill>
@@ -10939,13 +11587,13 @@
               </a:rPr>
               <a:t>1. What is prompt injection?</a:t>
             </a:r>
-            <a:endParaRPr lang="en-US" sz="1250" dirty="0"/>
-          </a:p>
-        </p:txBody>
-      </p:sp>
-      <p:sp>
-        <p:nvSpPr>
-          <p:cNvPr id="14" name="Shape 12"/>
+            <a:endParaRPr lang="en-US" sz="1550" dirty="0"/>
+          </a:p>
+        </p:txBody>
+      </p:sp>
+      <p:sp>
+        <p:nvSpPr>
+          <p:cNvPr id="15" name="Shape 13"/>
           <p:cNvSpPr/>
           <p:nvPr/>
         </p:nvSpPr>
@@ -10972,14 +11620,14 @@
       </p:sp>
       <p:sp>
         <p:nvSpPr>
-          <p:cNvPr id="15" name="Text 13"/>
+          <p:cNvPr id="16" name="Text 14"/>
           <p:cNvSpPr/>
           <p:nvPr/>
         </p:nvSpPr>
         <p:spPr>
           <a:xfrm>
             <a:off x="8074152" y="3666744"/>
-            <a:ext cx="2825496" cy="201168"/>
+            <a:ext cx="2825496" cy="256032"/>
           </a:xfrm>
           <a:prstGeom prst="rect">
             <a:avLst/>
@@ -10995,7 +11643,7 @@
               <a:buNone/>
             </a:pPr>
             <a:r>
-              <a:rPr lang="en-US" sz="950" b="1" dirty="0">
+              <a:rPr lang="en-US" sz="1300" b="1" dirty="0">
                 <a:solidFill>
                   <a:srgbClr val="0068B7"/>
                 </a:solidFill>
@@ -11005,20 +11653,20 @@
               </a:rPr>
               <a:t>Use this for</a:t>
             </a:r>
-            <a:endParaRPr lang="en-US" sz="950" dirty="0"/>
-          </a:p>
-        </p:txBody>
-      </p:sp>
-      <p:sp>
-        <p:nvSpPr>
-          <p:cNvPr id="16" name="Text 14"/>
-          <p:cNvSpPr/>
-          <p:nvPr/>
-        </p:nvSpPr>
-        <p:spPr>
-          <a:xfrm>
-            <a:off x="8074152" y="3959352"/>
-            <a:ext cx="2825496" cy="1170432"/>
+            <a:endParaRPr lang="en-US" sz="1300" dirty="0"/>
+          </a:p>
+        </p:txBody>
+      </p:sp>
+      <p:sp>
+        <p:nvSpPr>
+          <p:cNvPr id="17" name="Text 15"/>
+          <p:cNvSpPr/>
+          <p:nvPr/>
+        </p:nvSpPr>
+        <p:spPr>
+          <a:xfrm>
+            <a:off x="8074152" y="4023360"/>
+            <a:ext cx="2825496" cy="1097280"/>
           </a:xfrm>
           <a:prstGeom prst="rect">
             <a:avLst/>
@@ -11036,7 +11684,7 @@
               <a:buNone/>
             </a:pPr>
             <a:r>
-              <a:rPr lang="en-US" sz="1250" dirty="0">
+              <a:rPr lang="en-US" sz="1550" dirty="0">
                 <a:solidFill>
                   <a:srgbClr val="17364A"/>
                 </a:solidFill>
@@ -11046,7 +11694,7 @@
               </a:rPr>
               <a:t>Connect the concept to public health decisions, safeguards, documentation, or implementation work.</a:t>
             </a:r>
-            <a:endParaRPr lang="en-US" sz="1250" dirty="0"/>
+            <a:endParaRPr lang="en-US" sz="1550" dirty="0"/>
           </a:p>
         </p:txBody>
       </p:sp>
@@ -11243,7 +11891,7 @@
                 <a:ea typeface="Aptos" pitchFamily="34" charset="-122"/>
                 <a:cs typeface="Aptos" pitchFamily="34" charset="-120"/>
               </a:rPr>
-              <a:t>© Paula Soper</a:t>
+              <a:t>Â© Paula Soper</a:t>
             </a:r>
             <a:endParaRPr lang="en-US" sz="800" dirty="0"/>
           </a:p>
@@ -11251,7 +11899,46 @@
       </p:sp>
       <p:sp>
         <p:nvSpPr>
-          <p:cNvPr id="7" name="Shape 5"/>
+          <p:cNvPr id="7" name="Text 5"/>
+          <p:cNvSpPr/>
+          <p:nvPr/>
+        </p:nvSpPr>
+        <p:spPr>
+          <a:xfrm>
+            <a:off x="11137392" y="6510528"/>
+            <a:ext cx="411480" cy="201168"/>
+          </a:xfrm>
+          <a:prstGeom prst="rect">
+            <a:avLst/>
+          </a:prstGeom>
+          <a:noFill/>
+          <a:ln/>
+        </p:spPr>
+        <p:txBody>
+          <a:bodyPr wrap="square" lIns="0" tIns="0" rIns="0" bIns="0" rtlCol="0" anchor="ctr"/>
+          <a:lstStyle/>
+          <a:p>
+            <a:pPr algn="r" indent="0" marL="0">
+              <a:buNone/>
+            </a:pPr>
+            <a:r>
+              <a:rPr lang="en-US" sz="900" dirty="0">
+                <a:solidFill>
+                  <a:srgbClr val="5F7181"/>
+                </a:solidFill>
+                <a:latin typeface="Aptos" pitchFamily="34" charset="0"/>
+                <a:ea typeface="Aptos" pitchFamily="34" charset="-122"/>
+                <a:cs typeface="Aptos" pitchFamily="34" charset="-120"/>
+              </a:rPr>
+              <a:t>23</a:t>
+            </a:r>
+            <a:endParaRPr lang="en-US" sz="900" dirty="0"/>
+          </a:p>
+        </p:txBody>
+      </p:sp>
+      <p:sp>
+        <p:nvSpPr>
+          <p:cNvPr id="8" name="Shape 6"/>
           <p:cNvSpPr/>
           <p:nvPr/>
         </p:nvSpPr>
@@ -11276,7 +11963,7 @@
       </p:sp>
       <p:sp>
         <p:nvSpPr>
-          <p:cNvPr id="8" name="Text 6"/>
+          <p:cNvPr id="9" name="Text 7"/>
           <p:cNvSpPr/>
           <p:nvPr/>
         </p:nvSpPr>
@@ -11315,14 +12002,14 @@
       </p:sp>
       <p:sp>
         <p:nvSpPr>
-          <p:cNvPr id="9" name="Text 7"/>
+          <p:cNvPr id="10" name="Text 8"/>
           <p:cNvSpPr/>
           <p:nvPr/>
         </p:nvSpPr>
         <p:spPr>
           <a:xfrm>
             <a:off x="640080" y="621792"/>
-            <a:ext cx="10881360" cy="566928"/>
+            <a:ext cx="10881360" cy="713232"/>
           </a:xfrm>
           <a:prstGeom prst="rect">
             <a:avLst/>
@@ -11340,7 +12027,7 @@
               <a:buNone/>
             </a:pPr>
             <a:r>
-              <a:rPr lang="en-US" sz="2700" b="1" dirty="0">
+              <a:rPr lang="en-US" sz="3400" b="1" dirty="0">
                 <a:solidFill>
                   <a:srgbClr val="003A63"/>
                 </a:solidFill>
@@ -11350,20 +12037,20 @@
               </a:rPr>
               <a:t>References and Resources</a:t>
             </a:r>
-            <a:endParaRPr lang="en-US" sz="2700" dirty="0"/>
-          </a:p>
-        </p:txBody>
-      </p:sp>
-      <p:sp>
-        <p:nvSpPr>
-          <p:cNvPr id="10" name="Text 8"/>
-          <p:cNvSpPr/>
-          <p:nvPr/>
-        </p:nvSpPr>
-        <p:spPr>
-          <a:xfrm>
-            <a:off x="868680" y="1417320"/>
-            <a:ext cx="6675120" cy="4434840"/>
+            <a:endParaRPr lang="en-US" sz="3400" dirty="0"/>
+          </a:p>
+        </p:txBody>
+      </p:sp>
+      <p:sp>
+        <p:nvSpPr>
+          <p:cNvPr id="11" name="Text 9"/>
+          <p:cNvSpPr/>
+          <p:nvPr/>
+        </p:nvSpPr>
+        <p:spPr>
+          <a:xfrm>
+            <a:off x="868680" y="1508760"/>
+            <a:ext cx="6537960" cy="4160520"/>
           </a:xfrm>
           <a:prstGeom prst="rect">
             <a:avLst/>
@@ -11378,7 +12065,7 @@
           <a:lstStyle/>
           <a:p>
             <a:r>
-              <a:rPr lang="en-US" sz="1700" dirty="0">
+              <a:rPr lang="en-US" sz="2100" dirty="0">
                 <a:solidFill>
                   <a:srgbClr val="17364A"/>
                 </a:solidFill>
@@ -11386,13 +12073,13 @@
                 <a:ea typeface="Aptos" pitchFamily="34" charset="-122"/>
                 <a:cs typeface="Aptos" pitchFamily="34" charset="-120"/>
               </a:rPr>
-              <a:t>OWASP Top 10 for Large Language Model Applications: https://owasp.org/www-project-top-10-for-large-language-model-applications/</a:t>
-            </a:r>
-            <a:endParaRPr lang="en-US" sz="1700" dirty="0"/>
-          </a:p>
-          <a:p>
-            <a:r>
-              <a:rPr lang="en-US" sz="1700" dirty="0">
+              <a:t>OWASP Top 10 for Large Language Model Applications:.</a:t>
+            </a:r>
+            <a:endParaRPr lang="en-US" sz="2100" dirty="0"/>
+          </a:p>
+          <a:p>
+            <a:r>
+              <a:rPr lang="en-US" sz="2100" dirty="0">
                 <a:solidFill>
                   <a:srgbClr val="17364A"/>
                 </a:solidFill>
@@ -11400,13 +12087,13 @@
                 <a:ea typeface="Aptos" pitchFamily="34" charset="-122"/>
                 <a:cs typeface="Aptos" pitchFamily="34" charset="-120"/>
               </a:rPr>
-              <a:t>NIST Artificial Intelligence Risk Management Framework: https://www.nist.gov/itl/ai-risk-management-framework</a:t>
-            </a:r>
-            <a:endParaRPr lang="en-US" sz="1700" dirty="0"/>
-          </a:p>
-          <a:p>
-            <a:r>
-              <a:rPr lang="en-US" sz="1700" dirty="0">
+              <a:t>NIST Artificial Intelligence Risk Management Framework:.</a:t>
+            </a:r>
+            <a:endParaRPr lang="en-US" sz="2100" dirty="0"/>
+          </a:p>
+          <a:p>
+            <a:r>
+              <a:rPr lang="en-US" sz="2100" dirty="0">
                 <a:solidFill>
                   <a:srgbClr val="17364A"/>
                 </a:solidFill>
@@ -11416,27 +12103,13 @@
               </a:rPr>
               <a:t>NIST AI RMF Generative AI Profile:.</a:t>
             </a:r>
-            <a:endParaRPr lang="en-US" sz="1700" dirty="0"/>
-          </a:p>
-          <a:p>
-            <a:r>
-              <a:rPr lang="en-US" sz="1700" dirty="0">
-                <a:solidFill>
-                  <a:srgbClr val="17364A"/>
-                </a:solidFill>
-                <a:latin typeface="Aptos" pitchFamily="34" charset="0"/>
-                <a:ea typeface="Aptos" pitchFamily="34" charset="-122"/>
-                <a:cs typeface="Aptos" pitchFamily="34" charset="-120"/>
-              </a:rPr>
-              <a:t>NIST Privacy Framework: https://www.nist.gov/privacy-framework</a:t>
-            </a:r>
-            <a:endParaRPr lang="en-US" sz="1700" dirty="0"/>
-          </a:p>
-        </p:txBody>
-      </p:sp>
-      <p:sp>
-        <p:nvSpPr>
-          <p:cNvPr id="11" name="Shape 9"/>
+            <a:endParaRPr lang="en-US" sz="2100" dirty="0"/>
+          </a:p>
+        </p:txBody>
+      </p:sp>
+      <p:sp>
+        <p:nvSpPr>
+          <p:cNvPr id="12" name="Shape 10"/>
           <p:cNvSpPr/>
           <p:nvPr/>
         </p:nvSpPr>
@@ -11463,14 +12136,14 @@
       </p:sp>
       <p:sp>
         <p:nvSpPr>
-          <p:cNvPr id="12" name="Text 10"/>
+          <p:cNvPr id="13" name="Text 11"/>
           <p:cNvSpPr/>
           <p:nvPr/>
         </p:nvSpPr>
         <p:spPr>
           <a:xfrm>
             <a:off x="8074152" y="1563624"/>
-            <a:ext cx="2825496" cy="201168"/>
+            <a:ext cx="2825496" cy="256032"/>
           </a:xfrm>
           <a:prstGeom prst="rect">
             <a:avLst/>
@@ -11486,7 +12159,7 @@
               <a:buNone/>
             </a:pPr>
             <a:r>
-              <a:rPr lang="en-US" sz="950" b="1" dirty="0">
+              <a:rPr lang="en-US" sz="1300" b="1" dirty="0">
                 <a:solidFill>
                   <a:srgbClr val="0068B7"/>
                 </a:solidFill>
@@ -11496,20 +12169,20 @@
               </a:rPr>
               <a:t>Key idea</a:t>
             </a:r>
-            <a:endParaRPr lang="en-US" sz="950" dirty="0"/>
-          </a:p>
-        </p:txBody>
-      </p:sp>
-      <p:sp>
-        <p:nvSpPr>
-          <p:cNvPr id="13" name="Text 11"/>
-          <p:cNvSpPr/>
-          <p:nvPr/>
-        </p:nvSpPr>
-        <p:spPr>
-          <a:xfrm>
-            <a:off x="8074152" y="1856232"/>
-            <a:ext cx="2825496" cy="1261872"/>
+            <a:endParaRPr lang="en-US" sz="1300" dirty="0"/>
+          </a:p>
+        </p:txBody>
+      </p:sp>
+      <p:sp>
+        <p:nvSpPr>
+          <p:cNvPr id="14" name="Text 12"/>
+          <p:cNvSpPr/>
+          <p:nvPr/>
+        </p:nvSpPr>
+        <p:spPr>
+          <a:xfrm>
+            <a:off x="8074152" y="1920240"/>
+            <a:ext cx="2825496" cy="1188720"/>
           </a:xfrm>
           <a:prstGeom prst="rect">
             <a:avLst/>
@@ -11527,7 +12200,7 @@
               <a:buNone/>
             </a:pPr>
             <a:r>
-              <a:rPr lang="en-US" sz="1250" dirty="0">
+              <a:rPr lang="en-US" sz="1550" dirty="0">
                 <a:solidFill>
                   <a:srgbClr val="17364A"/>
                 </a:solidFill>
@@ -11535,15 +12208,15 @@
                 <a:ea typeface="Aptos" pitchFamily="34" charset="-122"/>
                 <a:cs typeface="Aptos" pitchFamily="34" charset="-120"/>
               </a:rPr>
-              <a:t>OWASP Top 10 for Large Language Model Applications: https://owasp.org/www-project-top-10-for-large-language-model-applications/</a:t>
-            </a:r>
-            <a:endParaRPr lang="en-US" sz="1250" dirty="0"/>
-          </a:p>
-        </p:txBody>
-      </p:sp>
-      <p:sp>
-        <p:nvSpPr>
-          <p:cNvPr id="14" name="Shape 12"/>
+              <a:t>OWASP Top 10 for Large Language Model Applications:.</a:t>
+            </a:r>
+            <a:endParaRPr lang="en-US" sz="1550" dirty="0"/>
+          </a:p>
+        </p:txBody>
+      </p:sp>
+      <p:sp>
+        <p:nvSpPr>
+          <p:cNvPr id="15" name="Shape 13"/>
           <p:cNvSpPr/>
           <p:nvPr/>
         </p:nvSpPr>
@@ -11570,14 +12243,14 @@
       </p:sp>
       <p:sp>
         <p:nvSpPr>
-          <p:cNvPr id="15" name="Text 13"/>
+          <p:cNvPr id="16" name="Text 14"/>
           <p:cNvSpPr/>
           <p:nvPr/>
         </p:nvSpPr>
         <p:spPr>
           <a:xfrm>
             <a:off x="8074152" y="3666744"/>
-            <a:ext cx="2825496" cy="201168"/>
+            <a:ext cx="2825496" cy="256032"/>
           </a:xfrm>
           <a:prstGeom prst="rect">
             <a:avLst/>
@@ -11593,7 +12266,7 @@
               <a:buNone/>
             </a:pPr>
             <a:r>
-              <a:rPr lang="en-US" sz="950" b="1" dirty="0">
+              <a:rPr lang="en-US" sz="1300" b="1" dirty="0">
                 <a:solidFill>
                   <a:srgbClr val="0068B7"/>
                 </a:solidFill>
@@ -11603,20 +12276,20 @@
               </a:rPr>
               <a:t>Use this for</a:t>
             </a:r>
-            <a:endParaRPr lang="en-US" sz="950" dirty="0"/>
-          </a:p>
-        </p:txBody>
-      </p:sp>
-      <p:sp>
-        <p:nvSpPr>
-          <p:cNvPr id="16" name="Text 14"/>
-          <p:cNvSpPr/>
-          <p:nvPr/>
-        </p:nvSpPr>
-        <p:spPr>
-          <a:xfrm>
-            <a:off x="8074152" y="3959352"/>
-            <a:ext cx="2825496" cy="1170432"/>
+            <a:endParaRPr lang="en-US" sz="1300" dirty="0"/>
+          </a:p>
+        </p:txBody>
+      </p:sp>
+      <p:sp>
+        <p:nvSpPr>
+          <p:cNvPr id="17" name="Text 15"/>
+          <p:cNvSpPr/>
+          <p:nvPr/>
+        </p:nvSpPr>
+        <p:spPr>
+          <a:xfrm>
+            <a:off x="8074152" y="4023360"/>
+            <a:ext cx="2825496" cy="1097280"/>
           </a:xfrm>
           <a:prstGeom prst="rect">
             <a:avLst/>
@@ -11634,7 +12307,7 @@
               <a:buNone/>
             </a:pPr>
             <a:r>
-              <a:rPr lang="en-US" sz="1250" dirty="0">
+              <a:rPr lang="en-US" sz="1550" dirty="0">
                 <a:solidFill>
                   <a:srgbClr val="17364A"/>
                 </a:solidFill>
@@ -11644,7 +12317,7 @@
               </a:rPr>
               <a:t>Connect the concept to public health decisions, safeguards, documentation, or implementation work.</a:t>
             </a:r>
-            <a:endParaRPr lang="en-US" sz="1250" dirty="0"/>
+            <a:endParaRPr lang="en-US" sz="1550" dirty="0"/>
           </a:p>
         </p:txBody>
       </p:sp>
@@ -11841,7 +12514,7 @@
                 <a:ea typeface="Aptos" pitchFamily="34" charset="-122"/>
                 <a:cs typeface="Aptos" pitchFamily="34" charset="-120"/>
               </a:rPr>
-              <a:t>© Paula Soper</a:t>
+              <a:t>Â© Paula Soper</a:t>
             </a:r>
             <a:endParaRPr lang="en-US" sz="800" dirty="0"/>
           </a:p>
@@ -11855,8 +12528,47 @@
         </p:nvSpPr>
         <p:spPr>
           <a:xfrm>
+            <a:off x="11137392" y="6510528"/>
+            <a:ext cx="411480" cy="201168"/>
+          </a:xfrm>
+          <a:prstGeom prst="rect">
+            <a:avLst/>
+          </a:prstGeom>
+          <a:noFill/>
+          <a:ln/>
+        </p:spPr>
+        <p:txBody>
+          <a:bodyPr wrap="square" lIns="0" tIns="0" rIns="0" bIns="0" rtlCol="0" anchor="ctr"/>
+          <a:lstStyle/>
+          <a:p>
+            <a:pPr algn="r" indent="0" marL="0">
+              <a:buNone/>
+            </a:pPr>
+            <a:r>
+              <a:rPr lang="en-US" sz="900" dirty="0">
+                <a:solidFill>
+                  <a:srgbClr val="5F7181"/>
+                </a:solidFill>
+                <a:latin typeface="Aptos" pitchFamily="34" charset="0"/>
+                <a:ea typeface="Aptos" pitchFamily="34" charset="-122"/>
+                <a:cs typeface="Aptos" pitchFamily="34" charset="-120"/>
+              </a:rPr>
+              <a:t>3</a:t>
+            </a:r>
+            <a:endParaRPr lang="en-US" sz="900" dirty="0"/>
+          </a:p>
+        </p:txBody>
+      </p:sp>
+      <p:sp>
+        <p:nvSpPr>
+          <p:cNvPr id="8" name="Text 6"/>
+          <p:cNvSpPr/>
+          <p:nvPr/>
+        </p:nvSpPr>
+        <p:spPr>
+          <a:xfrm>
             <a:off x="640080" y="658368"/>
-            <a:ext cx="10881360" cy="566928"/>
+            <a:ext cx="10881360" cy="713232"/>
           </a:xfrm>
           <a:prstGeom prst="rect">
             <a:avLst/>
@@ -11874,7 +12586,7 @@
               <a:buNone/>
             </a:pPr>
             <a:r>
-              <a:rPr lang="en-US" sz="2700" b="1" dirty="0">
+              <a:rPr lang="en-US" sz="3400" b="1" dirty="0">
                 <a:solidFill>
                   <a:srgbClr val="003A63"/>
                 </a:solidFill>
@@ -11884,20 +12596,20 @@
               </a:rPr>
               <a:t>How this module connects to the playbook</a:t>
             </a:r>
-            <a:endParaRPr lang="en-US" sz="2700" dirty="0"/>
-          </a:p>
-        </p:txBody>
-      </p:sp>
-      <p:sp>
-        <p:nvSpPr>
-          <p:cNvPr id="8" name="Text 6"/>
-          <p:cNvSpPr/>
-          <p:nvPr/>
-        </p:nvSpPr>
-        <p:spPr>
-          <a:xfrm>
-            <a:off x="868680" y="1417320"/>
-            <a:ext cx="6903720" cy="4480560"/>
+            <a:endParaRPr lang="en-US" sz="3400" dirty="0"/>
+          </a:p>
+        </p:txBody>
+      </p:sp>
+      <p:sp>
+        <p:nvSpPr>
+          <p:cNvPr id="9" name="Text 7"/>
+          <p:cNvSpPr/>
+          <p:nvPr/>
+        </p:nvSpPr>
+        <p:spPr>
+          <a:xfrm>
+            <a:off x="868680" y="1508760"/>
+            <a:ext cx="6812280" cy="3977640"/>
           </a:xfrm>
           <a:prstGeom prst="rect">
             <a:avLst/>
@@ -11912,7 +12624,7 @@
           <a:lstStyle/>
           <a:p>
             <a:r>
-              <a:rPr lang="en-US" sz="1540" dirty="0">
+              <a:rPr lang="en-US" sz="1900" dirty="0">
                 <a:solidFill>
                   <a:srgbClr val="17364A"/>
                 </a:solidFill>
@@ -11920,13 +12632,13 @@
                 <a:ea typeface="Aptos" pitchFamily="34" charset="-122"/>
                 <a:cs typeface="Aptos" pitchFamily="34" charset="-120"/>
               </a:rPr>
-              <a:t>Play 11: Build and Deploy AI Solutions - This lesson informs Play 11 by helping learners connect the lesson topic to build and deploy.</a:t>
-            </a:r>
-            <a:endParaRPr lang="en-US" sz="1540" dirty="0"/>
-          </a:p>
-          <a:p>
-            <a:r>
-              <a:rPr lang="en-US" sz="1540" dirty="0">
+              <a:t>Play 11: Build and Deploy AI Solutions - This lesson informs Play 11 by helping learners connect the lesson.</a:t>
+            </a:r>
+            <a:endParaRPr lang="en-US" sz="1900" dirty="0"/>
+          </a:p>
+          <a:p>
+            <a:r>
+              <a:rPr lang="en-US" sz="1900" dirty="0">
                 <a:solidFill>
                   <a:srgbClr val="17364A"/>
                 </a:solidFill>
@@ -11934,13 +12646,13 @@
                 <a:ea typeface="Aptos" pitchFamily="34" charset="-122"/>
                 <a:cs typeface="Aptos" pitchFamily="34" charset="-120"/>
               </a:rPr>
-              <a:t>Play 1: Vision &amp; Guardrails - This lesson informs Play 1 by helping learners connect the lesson topic to vision &amp; guardrails work in.</a:t>
-            </a:r>
-            <a:endParaRPr lang="en-US" sz="1540" dirty="0"/>
-          </a:p>
-          <a:p>
-            <a:r>
-              <a:rPr lang="en-US" sz="1540" dirty="0">
+              <a:t>Play 1: Vision &amp; Guardrails - This lesson informs Play 1 by helping learners connect the lesson topic to.</a:t>
+            </a:r>
+            <a:endParaRPr lang="en-US" sz="1900" dirty="0"/>
+          </a:p>
+          <a:p>
+            <a:r>
+              <a:rPr lang="en-US" sz="1900" dirty="0">
                 <a:solidFill>
                   <a:srgbClr val="17364A"/>
                 </a:solidFill>
@@ -11948,13 +12660,13 @@
                 <a:ea typeface="Aptos" pitchFamily="34" charset="-122"/>
                 <a:cs typeface="Aptos" pitchFamily="34" charset="-120"/>
               </a:rPr>
-              <a:t>Play 7: Prioritize Use Cases - This lesson informs Play 7 by helping learners connect the lesson topic to prioritize use cases work.</a:t>
-            </a:r>
-            <a:endParaRPr lang="en-US" sz="1540" dirty="0"/>
-          </a:p>
-          <a:p>
-            <a:r>
-              <a:rPr lang="en-US" sz="1540" dirty="0">
+              <a:t>Play 7: Prioritize Use Cases - This lesson informs Play 7 by helping learners connect the lesson topic to.</a:t>
+            </a:r>
+            <a:endParaRPr lang="en-US" sz="1900" dirty="0"/>
+          </a:p>
+          <a:p>
+            <a:r>
+              <a:rPr lang="en-US" sz="1900" dirty="0">
                 <a:solidFill>
                   <a:srgbClr val="17364A"/>
                 </a:solidFill>
@@ -11962,15 +12674,15 @@
                 <a:ea typeface="Aptos" pitchFamily="34" charset="-122"/>
                 <a:cs typeface="Aptos" pitchFamily="34" charset="-120"/>
               </a:rPr>
-              <a:t>Play 8: Develop a Funding Strategy - This lesson informs Play 8 by helping learners connect the lesson topic to develop a funding.</a:t>
-            </a:r>
-            <a:endParaRPr lang="en-US" sz="1540" dirty="0"/>
-          </a:p>
-        </p:txBody>
-      </p:sp>
-      <p:sp>
-        <p:nvSpPr>
-          <p:cNvPr id="9" name="Shape 7"/>
+              <a:t>Play 8: Develop a Funding Strategy - This lesson informs Play 8 by helping learners connect the lesson topic.</a:t>
+            </a:r>
+            <a:endParaRPr lang="en-US" sz="1900" dirty="0"/>
+          </a:p>
+        </p:txBody>
+      </p:sp>
+      <p:sp>
+        <p:nvSpPr>
+          <p:cNvPr id="10" name="Shape 8"/>
           <p:cNvSpPr/>
           <p:nvPr/>
         </p:nvSpPr>
@@ -11997,14 +12709,14 @@
       </p:sp>
       <p:sp>
         <p:nvSpPr>
-          <p:cNvPr id="10" name="Text 8"/>
+          <p:cNvPr id="11" name="Text 9"/>
           <p:cNvSpPr/>
           <p:nvPr/>
         </p:nvSpPr>
         <p:spPr>
           <a:xfrm>
             <a:off x="8211312" y="1563624"/>
-            <a:ext cx="2734056" cy="201168"/>
+            <a:ext cx="2734056" cy="256032"/>
           </a:xfrm>
           <a:prstGeom prst="rect">
             <a:avLst/>
@@ -12020,7 +12732,7 @@
               <a:buNone/>
             </a:pPr>
             <a:r>
-              <a:rPr lang="en-US" sz="950" b="1" dirty="0">
+              <a:rPr lang="en-US" sz="1300" b="1" dirty="0">
                 <a:solidFill>
                   <a:srgbClr val="0068B7"/>
                 </a:solidFill>
@@ -12030,20 +12742,20 @@
               </a:rPr>
               <a:t>Apply the lesson</a:t>
             </a:r>
-            <a:endParaRPr lang="en-US" sz="950" dirty="0"/>
-          </a:p>
-        </p:txBody>
-      </p:sp>
-      <p:sp>
-        <p:nvSpPr>
-          <p:cNvPr id="11" name="Text 9"/>
-          <p:cNvSpPr/>
-          <p:nvPr/>
-        </p:nvSpPr>
-        <p:spPr>
-          <a:xfrm>
-            <a:off x="8211312" y="1856232"/>
-            <a:ext cx="2734056" cy="1536192"/>
+            <a:endParaRPr lang="en-US" sz="1300" dirty="0"/>
+          </a:p>
+        </p:txBody>
+      </p:sp>
+      <p:sp>
+        <p:nvSpPr>
+          <p:cNvPr id="12" name="Text 10"/>
+          <p:cNvSpPr/>
+          <p:nvPr/>
+        </p:nvSpPr>
+        <p:spPr>
+          <a:xfrm>
+            <a:off x="8211312" y="1920240"/>
+            <a:ext cx="2734056" cy="1463040"/>
           </a:xfrm>
           <a:prstGeom prst="rect">
             <a:avLst/>
@@ -12061,7 +12773,7 @@
               <a:buNone/>
             </a:pPr>
             <a:r>
-              <a:rPr lang="en-US" sz="1250" dirty="0">
+              <a:rPr lang="en-US" sz="1550" dirty="0">
                 <a:solidFill>
                   <a:srgbClr val="17364A"/>
                 </a:solidFill>
@@ -12071,32 +12783,32 @@
               </a:rPr>
               <a:t>Use the related plays to identify decisions, participants, timing, approvals, and documentation needed for responsible implementation.</a:t>
             </a:r>
-            <a:endParaRPr lang="en-US" sz="1250" dirty="0"/>
-          </a:p>
-        </p:txBody>
-      </p:sp>
-      <p:sp>
-        <p:nvSpPr>
-          <p:cNvPr id="12" name="Shape 10"/>
-          <p:cNvSpPr/>
-          <p:nvPr/>
-        </p:nvSpPr>
-        <p:spPr>
-          <a:xfrm>
-            <a:off x="8046720" y="3794760"/>
-            <a:ext cx="3063240" cy="1508760"/>
+            <a:endParaRPr lang="en-US" sz="1550" dirty="0"/>
+          </a:p>
+        </p:txBody>
+      </p:sp>
+      <p:sp>
+        <p:nvSpPr>
+          <p:cNvPr id="13" name="Shape 11"/>
+          <p:cNvSpPr/>
+          <p:nvPr/>
+        </p:nvSpPr>
+        <p:spPr>
+          <a:xfrm>
+            <a:off x="7818120" y="3977640"/>
+            <a:ext cx="972312" cy="749808"/>
           </a:xfrm>
           <a:prstGeom prst="roundRect">
             <a:avLst>
-              <a:gd name="adj" fmla="val 7273"/>
+              <a:gd name="adj" fmla="val 14634"/>
             </a:avLst>
           </a:prstGeom>
           <a:solidFill>
-            <a:srgbClr val="FFF4D9"/>
+            <a:srgbClr val="0068B7"/>
           </a:solidFill>
           <a:ln w="12700">
             <a:solidFill>
-              <a:srgbClr val="B9D7E6"/>
+              <a:srgbClr val="0068B7"/>
             </a:solidFill>
             <a:prstDash val="solid"/>
           </a:ln>
@@ -12104,81 +12816,256 @@
       </p:sp>
       <p:sp>
         <p:nvSpPr>
-          <p:cNvPr id="13" name="Text 11"/>
-          <p:cNvSpPr/>
-          <p:nvPr/>
-        </p:nvSpPr>
-        <p:spPr>
-          <a:xfrm>
-            <a:off x="8211312" y="3941064"/>
-            <a:ext cx="2734056" cy="201168"/>
-          </a:xfrm>
-          <a:prstGeom prst="rect">
-            <a:avLst/>
-          </a:prstGeom>
-          <a:noFill/>
-          <a:ln/>
-        </p:spPr>
-        <p:txBody>
-          <a:bodyPr wrap="square" lIns="0" tIns="0" rIns="0" bIns="0" rtlCol="0" anchor="ctr"/>
-          <a:lstStyle/>
-          <a:p>
-            <a:pPr indent="0" marL="0">
-              <a:buNone/>
-            </a:pPr>
-            <a:r>
-              <a:rPr lang="en-US" sz="950" b="1" dirty="0">
-                <a:solidFill>
-                  <a:srgbClr val="0068B7"/>
-                </a:solidFill>
-                <a:latin typeface="Aptos" pitchFamily="34" charset="0"/>
-                <a:ea typeface="Aptos" pitchFamily="34" charset="-122"/>
-                <a:cs typeface="Aptos" pitchFamily="34" charset="-120"/>
-              </a:rPr>
-              <a:t>Keep in mind</a:t>
-            </a:r>
-            <a:endParaRPr lang="en-US" sz="950" dirty="0"/>
-          </a:p>
-        </p:txBody>
-      </p:sp>
-      <p:sp>
-        <p:nvSpPr>
           <p:cNvPr id="14" name="Text 12"/>
           <p:cNvSpPr/>
           <p:nvPr/>
         </p:nvSpPr>
         <p:spPr>
           <a:xfrm>
-            <a:off x="8211312" y="4233672"/>
-            <a:ext cx="2734056" cy="941832"/>
-          </a:xfrm>
-          <a:prstGeom prst="rect">
-            <a:avLst/>
-          </a:prstGeom>
-          <a:noFill/>
-          <a:ln/>
-        </p:spPr>
-        <p:txBody>
-          <a:bodyPr wrap="square" lIns="0" tIns="0" rIns="0" bIns="0" rtlCol="0" anchor="t">
+            <a:off x="7891272" y="4169664"/>
+            <a:ext cx="826008" cy="310896"/>
+          </a:xfrm>
+          <a:prstGeom prst="rect">
+            <a:avLst/>
+          </a:prstGeom>
+          <a:noFill/>
+          <a:ln/>
+        </p:spPr>
+        <p:txBody>
+          <a:bodyPr wrap="square" lIns="0" tIns="0" rIns="0" bIns="0" rtlCol="0" anchor="ctr">
             <a:normAutofit/>
           </a:bodyPr>
           <a:lstStyle/>
           <a:p>
-            <a:pPr indent="0" marL="0">
-              <a:buNone/>
-            </a:pPr>
-            <a:r>
-              <a:rPr lang="en-US" sz="1250" dirty="0">
-                <a:solidFill>
-                  <a:srgbClr val="17364A"/>
-                </a:solidFill>
-                <a:latin typeface="Aptos" pitchFamily="34" charset="0"/>
-                <a:ea typeface="Aptos" pitchFamily="34" charset="-122"/>
-                <a:cs typeface="Aptos" pitchFamily="34" charset="-120"/>
-              </a:rPr>
-              <a:t>The playbook connection helps turn training into agency work, not just individual knowledge.</a:t>
-            </a:r>
-            <a:endParaRPr lang="en-US" sz="1250" dirty="0"/>
+            <a:pPr algn="ctr" indent="0" marL="0">
+              <a:buNone/>
+            </a:pPr>
+            <a:r>
+              <a:rPr lang="en-US" sz="1500" b="1" dirty="0">
+                <a:solidFill>
+                  <a:srgbClr val="FFFFFF"/>
+                </a:solidFill>
+                <a:latin typeface="Aptos" pitchFamily="34" charset="0"/>
+                <a:ea typeface="Aptos" pitchFamily="34" charset="-122"/>
+                <a:cs typeface="Aptos" pitchFamily="34" charset="-120"/>
+              </a:rPr>
+              <a:t>Lesson</a:t>
+            </a:r>
+            <a:endParaRPr lang="en-US" sz="1500" dirty="0"/>
+          </a:p>
+        </p:txBody>
+      </p:sp>
+      <p:sp>
+        <p:nvSpPr>
+          <p:cNvPr id="15" name="Text 13"/>
+          <p:cNvSpPr/>
+          <p:nvPr/>
+        </p:nvSpPr>
+        <p:spPr>
+          <a:xfrm>
+            <a:off x="8817864" y="4187952"/>
+            <a:ext cx="201168" cy="256032"/>
+          </a:xfrm>
+          <a:prstGeom prst="rect">
+            <a:avLst/>
+          </a:prstGeom>
+          <a:noFill/>
+          <a:ln/>
+        </p:spPr>
+        <p:txBody>
+          <a:bodyPr wrap="square" lIns="0" tIns="0" rIns="0" bIns="0" rtlCol="0" anchor="ctr"/>
+          <a:lstStyle/>
+          <a:p>
+            <a:pPr algn="ctr" indent="0" marL="0">
+              <a:buNone/>
+            </a:pPr>
+            <a:r>
+              <a:rPr lang="en-US" sz="1800" b="1" dirty="0">
+                <a:solidFill>
+                  <a:srgbClr val="0068B7"/>
+                </a:solidFill>
+                <a:latin typeface="Aptos" pitchFamily="34" charset="0"/>
+                <a:ea typeface="Aptos" pitchFamily="34" charset="-122"/>
+                <a:cs typeface="Aptos" pitchFamily="34" charset="-120"/>
+              </a:rPr>
+              <a:t>â†’</a:t>
+            </a:r>
+            <a:endParaRPr lang="en-US" sz="1800" dirty="0"/>
+          </a:p>
+        </p:txBody>
+      </p:sp>
+      <p:sp>
+        <p:nvSpPr>
+          <p:cNvPr id="16" name="Shape 14"/>
+          <p:cNvSpPr/>
+          <p:nvPr/>
+        </p:nvSpPr>
+        <p:spPr>
+          <a:xfrm>
+            <a:off x="9046464" y="3977640"/>
+            <a:ext cx="972312" cy="749808"/>
+          </a:xfrm>
+          <a:prstGeom prst="roundRect">
+            <a:avLst>
+              <a:gd name="adj" fmla="val 14634"/>
+            </a:avLst>
+          </a:prstGeom>
+          <a:solidFill>
+            <a:srgbClr val="2F8A28"/>
+          </a:solidFill>
+          <a:ln w="12700">
+            <a:solidFill>
+              <a:srgbClr val="2F8A28"/>
+            </a:solidFill>
+            <a:prstDash val="solid"/>
+          </a:ln>
+        </p:spPr>
+      </p:sp>
+      <p:sp>
+        <p:nvSpPr>
+          <p:cNvPr id="17" name="Text 15"/>
+          <p:cNvSpPr/>
+          <p:nvPr/>
+        </p:nvSpPr>
+        <p:spPr>
+          <a:xfrm>
+            <a:off x="9119616" y="4169664"/>
+            <a:ext cx="826008" cy="310896"/>
+          </a:xfrm>
+          <a:prstGeom prst="rect">
+            <a:avLst/>
+          </a:prstGeom>
+          <a:noFill/>
+          <a:ln/>
+        </p:spPr>
+        <p:txBody>
+          <a:bodyPr wrap="square" lIns="0" tIns="0" rIns="0" bIns="0" rtlCol="0" anchor="ctr">
+            <a:normAutofit/>
+          </a:bodyPr>
+          <a:lstStyle/>
+          <a:p>
+            <a:pPr algn="ctr" indent="0" marL="0">
+              <a:buNone/>
+            </a:pPr>
+            <a:r>
+              <a:rPr lang="en-US" sz="1500" b="1" dirty="0">
+                <a:solidFill>
+                  <a:srgbClr val="FFFFFF"/>
+                </a:solidFill>
+                <a:latin typeface="Aptos" pitchFamily="34" charset="0"/>
+                <a:ea typeface="Aptos" pitchFamily="34" charset="-122"/>
+                <a:cs typeface="Aptos" pitchFamily="34" charset="-120"/>
+              </a:rPr>
+              <a:t>Plays</a:t>
+            </a:r>
+            <a:endParaRPr lang="en-US" sz="1500" dirty="0"/>
+          </a:p>
+        </p:txBody>
+      </p:sp>
+      <p:sp>
+        <p:nvSpPr>
+          <p:cNvPr id="18" name="Text 16"/>
+          <p:cNvSpPr/>
+          <p:nvPr/>
+        </p:nvSpPr>
+        <p:spPr>
+          <a:xfrm>
+            <a:off x="10046208" y="4187952"/>
+            <a:ext cx="201168" cy="256032"/>
+          </a:xfrm>
+          <a:prstGeom prst="rect">
+            <a:avLst/>
+          </a:prstGeom>
+          <a:noFill/>
+          <a:ln/>
+        </p:spPr>
+        <p:txBody>
+          <a:bodyPr wrap="square" lIns="0" tIns="0" rIns="0" bIns="0" rtlCol="0" anchor="ctr"/>
+          <a:lstStyle/>
+          <a:p>
+            <a:pPr algn="ctr" indent="0" marL="0">
+              <a:buNone/>
+            </a:pPr>
+            <a:r>
+              <a:rPr lang="en-US" sz="1800" b="1" dirty="0">
+                <a:solidFill>
+                  <a:srgbClr val="0068B7"/>
+                </a:solidFill>
+                <a:latin typeface="Aptos" pitchFamily="34" charset="0"/>
+                <a:ea typeface="Aptos" pitchFamily="34" charset="-122"/>
+                <a:cs typeface="Aptos" pitchFamily="34" charset="-120"/>
+              </a:rPr>
+              <a:t>â†’</a:t>
+            </a:r>
+            <a:endParaRPr lang="en-US" sz="1800" dirty="0"/>
+          </a:p>
+        </p:txBody>
+      </p:sp>
+      <p:sp>
+        <p:nvSpPr>
+          <p:cNvPr id="19" name="Shape 17"/>
+          <p:cNvSpPr/>
+          <p:nvPr/>
+        </p:nvSpPr>
+        <p:spPr>
+          <a:xfrm>
+            <a:off x="10274808" y="3977640"/>
+            <a:ext cx="972312" cy="749808"/>
+          </a:xfrm>
+          <a:prstGeom prst="roundRect">
+            <a:avLst>
+              <a:gd name="adj" fmla="val 14634"/>
+            </a:avLst>
+          </a:prstGeom>
+          <a:solidFill>
+            <a:srgbClr val="6A4CA3"/>
+          </a:solidFill>
+          <a:ln w="12700">
+            <a:solidFill>
+              <a:srgbClr val="6A4CA3"/>
+            </a:solidFill>
+            <a:prstDash val="solid"/>
+          </a:ln>
+        </p:spPr>
+      </p:sp>
+      <p:sp>
+        <p:nvSpPr>
+          <p:cNvPr id="20" name="Text 18"/>
+          <p:cNvSpPr/>
+          <p:nvPr/>
+        </p:nvSpPr>
+        <p:spPr>
+          <a:xfrm>
+            <a:off x="10347960" y="4169664"/>
+            <a:ext cx="826008" cy="310896"/>
+          </a:xfrm>
+          <a:prstGeom prst="rect">
+            <a:avLst/>
+          </a:prstGeom>
+          <a:noFill/>
+          <a:ln/>
+        </p:spPr>
+        <p:txBody>
+          <a:bodyPr wrap="square" lIns="0" tIns="0" rIns="0" bIns="0" rtlCol="0" anchor="ctr">
+            <a:normAutofit/>
+          </a:bodyPr>
+          <a:lstStyle/>
+          <a:p>
+            <a:pPr algn="ctr" indent="0" marL="0">
+              <a:buNone/>
+            </a:pPr>
+            <a:r>
+              <a:rPr lang="en-US" sz="1500" b="1" dirty="0">
+                <a:solidFill>
+                  <a:srgbClr val="FFFFFF"/>
+                </a:solidFill>
+                <a:latin typeface="Aptos" pitchFamily="34" charset="0"/>
+                <a:ea typeface="Aptos" pitchFamily="34" charset="-122"/>
+                <a:cs typeface="Aptos" pitchFamily="34" charset="-120"/>
+              </a:rPr>
+              <a:t>Action</a:t>
+            </a:r>
+            <a:endParaRPr lang="en-US" sz="1500" dirty="0"/>
           </a:p>
         </p:txBody>
       </p:sp>
@@ -12375,7 +13262,7 @@
                 <a:ea typeface="Aptos" pitchFamily="34" charset="-122"/>
                 <a:cs typeface="Aptos" pitchFamily="34" charset="-120"/>
               </a:rPr>
-              <a:t>© Paula Soper</a:t>
+              <a:t>Â© Paula Soper</a:t>
             </a:r>
             <a:endParaRPr lang="en-US" sz="800" dirty="0"/>
           </a:p>
@@ -12389,8 +13276,47 @@
         </p:nvSpPr>
         <p:spPr>
           <a:xfrm>
+            <a:off x="11137392" y="6510528"/>
+            <a:ext cx="411480" cy="201168"/>
+          </a:xfrm>
+          <a:prstGeom prst="rect">
+            <a:avLst/>
+          </a:prstGeom>
+          <a:noFill/>
+          <a:ln/>
+        </p:spPr>
+        <p:txBody>
+          <a:bodyPr wrap="square" lIns="0" tIns="0" rIns="0" bIns="0" rtlCol="0" anchor="ctr"/>
+          <a:lstStyle/>
+          <a:p>
+            <a:pPr algn="r" indent="0" marL="0">
+              <a:buNone/>
+            </a:pPr>
+            <a:r>
+              <a:rPr lang="en-US" sz="900" dirty="0">
+                <a:solidFill>
+                  <a:srgbClr val="5F7181"/>
+                </a:solidFill>
+                <a:latin typeface="Aptos" pitchFamily="34" charset="0"/>
+                <a:ea typeface="Aptos" pitchFamily="34" charset="-122"/>
+                <a:cs typeface="Aptos" pitchFamily="34" charset="-120"/>
+              </a:rPr>
+              <a:t>4</a:t>
+            </a:r>
+            <a:endParaRPr lang="en-US" sz="900" dirty="0"/>
+          </a:p>
+        </p:txBody>
+      </p:sp>
+      <p:sp>
+        <p:nvSpPr>
+          <p:cNvPr id="8" name="Text 6"/>
+          <p:cNvSpPr/>
+          <p:nvPr/>
+        </p:nvSpPr>
+        <p:spPr>
+          <a:xfrm>
             <a:off x="640080" y="658368"/>
-            <a:ext cx="10881360" cy="566928"/>
+            <a:ext cx="10881360" cy="713232"/>
           </a:xfrm>
           <a:prstGeom prst="rect">
             <a:avLst/>
@@ -12408,7 +13334,7 @@
               <a:buNone/>
             </a:pPr>
             <a:r>
-              <a:rPr lang="en-US" sz="2700" b="1" dirty="0">
+              <a:rPr lang="en-US" sz="3400" b="1" dirty="0">
                 <a:solidFill>
                   <a:srgbClr val="003A63"/>
                 </a:solidFill>
@@ -12418,20 +13344,20 @@
               </a:rPr>
               <a:t>Related toolkit resources</a:t>
             </a:r>
-            <a:endParaRPr lang="en-US" sz="2700" dirty="0"/>
-          </a:p>
-        </p:txBody>
-      </p:sp>
-      <p:sp>
-        <p:nvSpPr>
-          <p:cNvPr id="8" name="Text 6"/>
-          <p:cNvSpPr/>
-          <p:nvPr/>
-        </p:nvSpPr>
-        <p:spPr>
-          <a:xfrm>
-            <a:off x="868680" y="1417320"/>
-            <a:ext cx="6903720" cy="4480560"/>
+            <a:endParaRPr lang="en-US" sz="3400" dirty="0"/>
+          </a:p>
+        </p:txBody>
+      </p:sp>
+      <p:sp>
+        <p:nvSpPr>
+          <p:cNvPr id="9" name="Text 7"/>
+          <p:cNvSpPr/>
+          <p:nvPr/>
+        </p:nvSpPr>
+        <p:spPr>
+          <a:xfrm>
+            <a:off x="868680" y="1508760"/>
+            <a:ext cx="6812280" cy="3977640"/>
           </a:xfrm>
           <a:prstGeom prst="rect">
             <a:avLst/>
@@ -12446,7 +13372,7 @@
           <a:lstStyle/>
           <a:p>
             <a:r>
-              <a:rPr lang="en-US" sz="1460" dirty="0">
+              <a:rPr lang="en-US" sz="1850" dirty="0">
                 <a:solidFill>
                   <a:srgbClr val="17364A"/>
                 </a:solidFill>
@@ -12454,13 +13380,13 @@
                 <a:ea typeface="Aptos" pitchFamily="34" charset="-122"/>
                 <a:cs typeface="Aptos" pitchFamily="34" charset="-120"/>
               </a:rPr>
-              <a:t>Tool 32: Vendor Evaluation Checklist (Checklist) - Use this tool to complete or strengthen the practical exercise for the module.</a:t>
-            </a:r>
-            <a:endParaRPr lang="en-US" sz="1460" dirty="0"/>
-          </a:p>
-          <a:p>
-            <a:r>
-              <a:rPr lang="en-US" sz="1460" dirty="0">
+              <a:t>Tool 32: Vendor Evaluation Checklist (Checklist) - Use this tool to complete or strengthen the practical.</a:t>
+            </a:r>
+            <a:endParaRPr lang="en-US" sz="1850" dirty="0"/>
+          </a:p>
+          <a:p>
+            <a:r>
+              <a:rPr lang="en-US" sz="1850" dirty="0">
                 <a:solidFill>
                   <a:srgbClr val="17364A"/>
                 </a:solidFill>
@@ -12468,13 +13394,13 @@
                 <a:ea typeface="Aptos" pitchFamily="34" charset="-122"/>
                 <a:cs typeface="Aptos" pitchFamily="34" charset="-120"/>
               </a:rPr>
-              <a:t>Tool 34: STLT AI Procurement and Vendor Addendum (Checklist) - Use this tool to complete or strengthen the practical exercise for the.</a:t>
-            </a:r>
-            <a:endParaRPr lang="en-US" sz="1460" dirty="0"/>
-          </a:p>
-          <a:p>
-            <a:r>
-              <a:rPr lang="en-US" sz="1460" dirty="0">
+              <a:t>Tool 34: STLT AI Procurement and Vendor Addendum (Checklist) - Use this tool to complete or strengthen the.</a:t>
+            </a:r>
+            <a:endParaRPr lang="en-US" sz="1850" dirty="0"/>
+          </a:p>
+          <a:p>
+            <a:r>
+              <a:rPr lang="en-US" sz="1850" dirty="0">
                 <a:solidFill>
                   <a:srgbClr val="17364A"/>
                 </a:solidFill>
@@ -12482,13 +13408,13 @@
                 <a:ea typeface="Aptos" pitchFamily="34" charset="-122"/>
                 <a:cs typeface="Aptos" pitchFamily="34" charset="-120"/>
               </a:rPr>
-              <a:t>Tool 4: AI Policy Landscape Scan (Worksheet) - Use AI Policy Landscape Scan to translate this lesson into a documented public health.</a:t>
-            </a:r>
-            <a:endParaRPr lang="en-US" sz="1460" dirty="0"/>
-          </a:p>
-          <a:p>
-            <a:r>
-              <a:rPr lang="en-US" sz="1460" dirty="0">
+              <a:t>Tool 4: AI Policy Landscape Scan (Worksheet) - Use AI Policy Landscape Scan to translate this lesson into a.</a:t>
+            </a:r>
+            <a:endParaRPr lang="en-US" sz="1850" dirty="0"/>
+          </a:p>
+          <a:p>
+            <a:r>
+              <a:rPr lang="en-US" sz="1850" dirty="0">
                 <a:solidFill>
                   <a:srgbClr val="17364A"/>
                 </a:solidFill>
@@ -12496,29 +13422,15 @@
                 <a:ea typeface="Aptos" pitchFamily="34" charset="-122"/>
                 <a:cs typeface="Aptos" pitchFamily="34" charset="-120"/>
               </a:rPr>
-              <a:t>Tool 5: AI Environmental and Resource Impact Review (Checklist) - Use AI Environmental and Resource Impact Review to translate this.</a:t>
-            </a:r>
-            <a:endParaRPr lang="en-US" sz="1460" dirty="0"/>
-          </a:p>
-          <a:p>
-            <a:r>
-              <a:rPr lang="en-US" sz="1460" dirty="0">
-                <a:solidFill>
-                  <a:srgbClr val="17364A"/>
-                </a:solidFill>
-                <a:latin typeface="Aptos" pitchFamily="34" charset="0"/>
-                <a:ea typeface="Aptos" pitchFamily="34" charset="-122"/>
-                <a:cs typeface="Aptos" pitchFamily="34" charset="-120"/>
-              </a:rPr>
-              <a:t>Tool 6: Human-Centered AI Decision Rule Checklist (Checklist) - Use Human-Centered AI Decision Rule Checklist to translate this.</a:t>
-            </a:r>
-            <a:endParaRPr lang="en-US" sz="1460" dirty="0"/>
-          </a:p>
-        </p:txBody>
-      </p:sp>
-      <p:sp>
-        <p:nvSpPr>
-          <p:cNvPr id="9" name="Shape 7"/>
+              <a:t>Tool 5: AI Environmental and Resource Impact Review (Checklist) - Use AI Environmental and Resource Impact.</a:t>
+            </a:r>
+            <a:endParaRPr lang="en-US" sz="1850" dirty="0"/>
+          </a:p>
+        </p:txBody>
+      </p:sp>
+      <p:sp>
+        <p:nvSpPr>
+          <p:cNvPr id="10" name="Shape 8"/>
           <p:cNvSpPr/>
           <p:nvPr/>
         </p:nvSpPr>
@@ -12545,14 +13457,14 @@
       </p:sp>
       <p:sp>
         <p:nvSpPr>
-          <p:cNvPr id="10" name="Text 8"/>
+          <p:cNvPr id="11" name="Text 9"/>
           <p:cNvSpPr/>
           <p:nvPr/>
         </p:nvSpPr>
         <p:spPr>
           <a:xfrm>
             <a:off x="8211312" y="1563624"/>
-            <a:ext cx="2734056" cy="201168"/>
+            <a:ext cx="2734056" cy="256032"/>
           </a:xfrm>
           <a:prstGeom prst="rect">
             <a:avLst/>
@@ -12568,7 +13480,7 @@
               <a:buNone/>
             </a:pPr>
             <a:r>
-              <a:rPr lang="en-US" sz="950" b="1" dirty="0">
+              <a:rPr lang="en-US" sz="1300" b="1" dirty="0">
                 <a:solidFill>
                   <a:srgbClr val="0068B7"/>
                 </a:solidFill>
@@ -12578,20 +13490,20 @@
               </a:rPr>
               <a:t>Use the tools</a:t>
             </a:r>
-            <a:endParaRPr lang="en-US" sz="950" dirty="0"/>
-          </a:p>
-        </p:txBody>
-      </p:sp>
-      <p:sp>
-        <p:nvSpPr>
-          <p:cNvPr id="11" name="Text 9"/>
-          <p:cNvSpPr/>
-          <p:nvPr/>
-        </p:nvSpPr>
-        <p:spPr>
-          <a:xfrm>
-            <a:off x="8211312" y="1856232"/>
-            <a:ext cx="2734056" cy="1536192"/>
+            <a:endParaRPr lang="en-US" sz="1300" dirty="0"/>
+          </a:p>
+        </p:txBody>
+      </p:sp>
+      <p:sp>
+        <p:nvSpPr>
+          <p:cNvPr id="12" name="Text 10"/>
+          <p:cNvSpPr/>
+          <p:nvPr/>
+        </p:nvSpPr>
+        <p:spPr>
+          <a:xfrm>
+            <a:off x="8211312" y="1920240"/>
+            <a:ext cx="2734056" cy="1463040"/>
           </a:xfrm>
           <a:prstGeom prst="rect">
             <a:avLst/>
@@ -12609,7 +13521,7 @@
               <a:buNone/>
             </a:pPr>
             <a:r>
-              <a:rPr lang="en-US" sz="1250" dirty="0">
+              <a:rPr lang="en-US" sz="1550" dirty="0">
                 <a:solidFill>
                   <a:srgbClr val="17364A"/>
                 </a:solidFill>
@@ -12619,32 +13531,32 @@
               </a:rPr>
               <a:t>Use linked tools when your department needs a structured worksheet, template, checklist, review process, or documentation artifact.</a:t>
             </a:r>
-            <a:endParaRPr lang="en-US" sz="1250" dirty="0"/>
-          </a:p>
-        </p:txBody>
-      </p:sp>
-      <p:sp>
-        <p:nvSpPr>
-          <p:cNvPr id="12" name="Shape 10"/>
-          <p:cNvSpPr/>
-          <p:nvPr/>
-        </p:nvSpPr>
-        <p:spPr>
-          <a:xfrm>
-            <a:off x="8046720" y="3794760"/>
-            <a:ext cx="3063240" cy="1508760"/>
+            <a:endParaRPr lang="en-US" sz="1550" dirty="0"/>
+          </a:p>
+        </p:txBody>
+      </p:sp>
+      <p:sp>
+        <p:nvSpPr>
+          <p:cNvPr id="13" name="Shape 11"/>
+          <p:cNvSpPr/>
+          <p:nvPr/>
+        </p:nvSpPr>
+        <p:spPr>
+          <a:xfrm>
+            <a:off x="7818120" y="3977640"/>
+            <a:ext cx="972312" cy="749808"/>
           </a:xfrm>
           <a:prstGeom prst="roundRect">
             <a:avLst>
-              <a:gd name="adj" fmla="val 7273"/>
+              <a:gd name="adj" fmla="val 14634"/>
             </a:avLst>
           </a:prstGeom>
           <a:solidFill>
-            <a:srgbClr val="EEF8ED"/>
+            <a:srgbClr val="0068B7"/>
           </a:solidFill>
           <a:ln w="12700">
             <a:solidFill>
-              <a:srgbClr val="B9D7E6"/>
+              <a:srgbClr val="0068B7"/>
             </a:solidFill>
             <a:prstDash val="solid"/>
           </a:ln>
@@ -12652,81 +13564,256 @@
       </p:sp>
       <p:sp>
         <p:nvSpPr>
-          <p:cNvPr id="13" name="Text 11"/>
-          <p:cNvSpPr/>
-          <p:nvPr/>
-        </p:nvSpPr>
-        <p:spPr>
-          <a:xfrm>
-            <a:off x="8211312" y="3941064"/>
-            <a:ext cx="2734056" cy="201168"/>
-          </a:xfrm>
-          <a:prstGeom prst="rect">
-            <a:avLst/>
-          </a:prstGeom>
-          <a:noFill/>
-          <a:ln/>
-        </p:spPr>
-        <p:txBody>
-          <a:bodyPr wrap="square" lIns="0" tIns="0" rIns="0" bIns="0" rtlCol="0" anchor="ctr"/>
-          <a:lstStyle/>
-          <a:p>
-            <a:pPr indent="0" marL="0">
-              <a:buNone/>
-            </a:pPr>
-            <a:r>
-              <a:rPr lang="en-US" sz="950" b="1" dirty="0">
-                <a:solidFill>
-                  <a:srgbClr val="0068B7"/>
-                </a:solidFill>
-                <a:latin typeface="Aptos" pitchFamily="34" charset="0"/>
-                <a:ea typeface="Aptos" pitchFamily="34" charset="-122"/>
-                <a:cs typeface="Aptos" pitchFamily="34" charset="-120"/>
-              </a:rPr>
-              <a:t>Avoid duplication</a:t>
-            </a:r>
-            <a:endParaRPr lang="en-US" sz="950" dirty="0"/>
-          </a:p>
-        </p:txBody>
-      </p:sp>
-      <p:sp>
-        <p:nvSpPr>
           <p:cNvPr id="14" name="Text 12"/>
           <p:cNvSpPr/>
           <p:nvPr/>
         </p:nvSpPr>
         <p:spPr>
           <a:xfrm>
-            <a:off x="8211312" y="4233672"/>
-            <a:ext cx="2734056" cy="941832"/>
-          </a:xfrm>
-          <a:prstGeom prst="rect">
-            <a:avLst/>
-          </a:prstGeom>
-          <a:noFill/>
-          <a:ln/>
-        </p:spPr>
-        <p:txBody>
-          <a:bodyPr wrap="square" lIns="0" tIns="0" rIns="0" bIns="0" rtlCol="0" anchor="t">
+            <a:off x="7891272" y="4169664"/>
+            <a:ext cx="826008" cy="310896"/>
+          </a:xfrm>
+          <a:prstGeom prst="rect">
+            <a:avLst/>
+          </a:prstGeom>
+          <a:noFill/>
+          <a:ln/>
+        </p:spPr>
+        <p:txBody>
+          <a:bodyPr wrap="square" lIns="0" tIns="0" rIns="0" bIns="0" rtlCol="0" anchor="ctr">
             <a:normAutofit/>
           </a:bodyPr>
           <a:lstStyle/>
           <a:p>
-            <a:pPr indent="0" marL="0">
-              <a:buNone/>
-            </a:pPr>
-            <a:r>
-              <a:rPr lang="en-US" sz="1250" dirty="0">
-                <a:solidFill>
-                  <a:srgbClr val="17364A"/>
-                </a:solidFill>
-                <a:latin typeface="Aptos" pitchFamily="34" charset="0"/>
-                <a:ea typeface="Aptos" pitchFamily="34" charset="-122"/>
-                <a:cs typeface="Aptos" pitchFamily="34" charset="-120"/>
-              </a:rPr>
-              <a:t>If your department already has a strong equivalent tool, adapt or use the existing process instead of recreating it.</a:t>
-            </a:r>
-            <a:endParaRPr lang="en-US" sz="1250" dirty="0"/>
+            <a:pPr algn="ctr" indent="0" marL="0">
+              <a:buNone/>
+            </a:pPr>
+            <a:r>
+              <a:rPr lang="en-US" sz="1500" b="1" dirty="0">
+                <a:solidFill>
+                  <a:srgbClr val="FFFFFF"/>
+                </a:solidFill>
+                <a:latin typeface="Aptos" pitchFamily="34" charset="0"/>
+                <a:ea typeface="Aptos" pitchFamily="34" charset="-122"/>
+                <a:cs typeface="Aptos" pitchFamily="34" charset="-120"/>
+              </a:rPr>
+              <a:t>Concept</a:t>
+            </a:r>
+            <a:endParaRPr lang="en-US" sz="1500" dirty="0"/>
+          </a:p>
+        </p:txBody>
+      </p:sp>
+      <p:sp>
+        <p:nvSpPr>
+          <p:cNvPr id="15" name="Text 13"/>
+          <p:cNvSpPr/>
+          <p:nvPr/>
+        </p:nvSpPr>
+        <p:spPr>
+          <a:xfrm>
+            <a:off x="8817864" y="4187952"/>
+            <a:ext cx="201168" cy="256032"/>
+          </a:xfrm>
+          <a:prstGeom prst="rect">
+            <a:avLst/>
+          </a:prstGeom>
+          <a:noFill/>
+          <a:ln/>
+        </p:spPr>
+        <p:txBody>
+          <a:bodyPr wrap="square" lIns="0" tIns="0" rIns="0" bIns="0" rtlCol="0" anchor="ctr"/>
+          <a:lstStyle/>
+          <a:p>
+            <a:pPr algn="ctr" indent="0" marL="0">
+              <a:buNone/>
+            </a:pPr>
+            <a:r>
+              <a:rPr lang="en-US" sz="1800" b="1" dirty="0">
+                <a:solidFill>
+                  <a:srgbClr val="0068B7"/>
+                </a:solidFill>
+                <a:latin typeface="Aptos" pitchFamily="34" charset="0"/>
+                <a:ea typeface="Aptos" pitchFamily="34" charset="-122"/>
+                <a:cs typeface="Aptos" pitchFamily="34" charset="-120"/>
+              </a:rPr>
+              <a:t>â†’</a:t>
+            </a:r>
+            <a:endParaRPr lang="en-US" sz="1800" dirty="0"/>
+          </a:p>
+        </p:txBody>
+      </p:sp>
+      <p:sp>
+        <p:nvSpPr>
+          <p:cNvPr id="16" name="Shape 14"/>
+          <p:cNvSpPr/>
+          <p:nvPr/>
+        </p:nvSpPr>
+        <p:spPr>
+          <a:xfrm>
+            <a:off x="9046464" y="3977640"/>
+            <a:ext cx="972312" cy="749808"/>
+          </a:xfrm>
+          <a:prstGeom prst="roundRect">
+            <a:avLst>
+              <a:gd name="adj" fmla="val 14634"/>
+            </a:avLst>
+          </a:prstGeom>
+          <a:solidFill>
+            <a:srgbClr val="2F8A28"/>
+          </a:solidFill>
+          <a:ln w="12700">
+            <a:solidFill>
+              <a:srgbClr val="2F8A28"/>
+            </a:solidFill>
+            <a:prstDash val="solid"/>
+          </a:ln>
+        </p:spPr>
+      </p:sp>
+      <p:sp>
+        <p:nvSpPr>
+          <p:cNvPr id="17" name="Text 15"/>
+          <p:cNvSpPr/>
+          <p:nvPr/>
+        </p:nvSpPr>
+        <p:spPr>
+          <a:xfrm>
+            <a:off x="9119616" y="4169664"/>
+            <a:ext cx="826008" cy="310896"/>
+          </a:xfrm>
+          <a:prstGeom prst="rect">
+            <a:avLst/>
+          </a:prstGeom>
+          <a:noFill/>
+          <a:ln/>
+        </p:spPr>
+        <p:txBody>
+          <a:bodyPr wrap="square" lIns="0" tIns="0" rIns="0" bIns="0" rtlCol="0" anchor="ctr">
+            <a:normAutofit/>
+          </a:bodyPr>
+          <a:lstStyle/>
+          <a:p>
+            <a:pPr algn="ctr" indent="0" marL="0">
+              <a:buNone/>
+            </a:pPr>
+            <a:r>
+              <a:rPr lang="en-US" sz="1500" b="1" dirty="0">
+                <a:solidFill>
+                  <a:srgbClr val="FFFFFF"/>
+                </a:solidFill>
+                <a:latin typeface="Aptos" pitchFamily="34" charset="0"/>
+                <a:ea typeface="Aptos" pitchFamily="34" charset="-122"/>
+                <a:cs typeface="Aptos" pitchFamily="34" charset="-120"/>
+              </a:rPr>
+              <a:t>Tool</a:t>
+            </a:r>
+            <a:endParaRPr lang="en-US" sz="1500" dirty="0"/>
+          </a:p>
+        </p:txBody>
+      </p:sp>
+      <p:sp>
+        <p:nvSpPr>
+          <p:cNvPr id="18" name="Text 16"/>
+          <p:cNvSpPr/>
+          <p:nvPr/>
+        </p:nvSpPr>
+        <p:spPr>
+          <a:xfrm>
+            <a:off x="10046208" y="4187952"/>
+            <a:ext cx="201168" cy="256032"/>
+          </a:xfrm>
+          <a:prstGeom prst="rect">
+            <a:avLst/>
+          </a:prstGeom>
+          <a:noFill/>
+          <a:ln/>
+        </p:spPr>
+        <p:txBody>
+          <a:bodyPr wrap="square" lIns="0" tIns="0" rIns="0" bIns="0" rtlCol="0" anchor="ctr"/>
+          <a:lstStyle/>
+          <a:p>
+            <a:pPr algn="ctr" indent="0" marL="0">
+              <a:buNone/>
+            </a:pPr>
+            <a:r>
+              <a:rPr lang="en-US" sz="1800" b="1" dirty="0">
+                <a:solidFill>
+                  <a:srgbClr val="0068B7"/>
+                </a:solidFill>
+                <a:latin typeface="Aptos" pitchFamily="34" charset="0"/>
+                <a:ea typeface="Aptos" pitchFamily="34" charset="-122"/>
+                <a:cs typeface="Aptos" pitchFamily="34" charset="-120"/>
+              </a:rPr>
+              <a:t>â†’</a:t>
+            </a:r>
+            <a:endParaRPr lang="en-US" sz="1800" dirty="0"/>
+          </a:p>
+        </p:txBody>
+      </p:sp>
+      <p:sp>
+        <p:nvSpPr>
+          <p:cNvPr id="19" name="Shape 17"/>
+          <p:cNvSpPr/>
+          <p:nvPr/>
+        </p:nvSpPr>
+        <p:spPr>
+          <a:xfrm>
+            <a:off x="10274808" y="3977640"/>
+            <a:ext cx="972312" cy="749808"/>
+          </a:xfrm>
+          <a:prstGeom prst="roundRect">
+            <a:avLst>
+              <a:gd name="adj" fmla="val 14634"/>
+            </a:avLst>
+          </a:prstGeom>
+          <a:solidFill>
+            <a:srgbClr val="D69A2D"/>
+          </a:solidFill>
+          <a:ln w="12700">
+            <a:solidFill>
+              <a:srgbClr val="D69A2D"/>
+            </a:solidFill>
+            <a:prstDash val="solid"/>
+          </a:ln>
+        </p:spPr>
+      </p:sp>
+      <p:sp>
+        <p:nvSpPr>
+          <p:cNvPr id="20" name="Text 18"/>
+          <p:cNvSpPr/>
+          <p:nvPr/>
+        </p:nvSpPr>
+        <p:spPr>
+          <a:xfrm>
+            <a:off x="10347960" y="4169664"/>
+            <a:ext cx="826008" cy="310896"/>
+          </a:xfrm>
+          <a:prstGeom prst="rect">
+            <a:avLst/>
+          </a:prstGeom>
+          <a:noFill/>
+          <a:ln/>
+        </p:spPr>
+        <p:txBody>
+          <a:bodyPr wrap="square" lIns="0" tIns="0" rIns="0" bIns="0" rtlCol="0" anchor="ctr">
+            <a:normAutofit/>
+          </a:bodyPr>
+          <a:lstStyle/>
+          <a:p>
+            <a:pPr algn="ctr" indent="0" marL="0">
+              <a:buNone/>
+            </a:pPr>
+            <a:r>
+              <a:rPr lang="en-US" sz="1500" b="1" dirty="0">
+                <a:solidFill>
+                  <a:srgbClr val="FFFFFF"/>
+                </a:solidFill>
+                <a:latin typeface="Aptos" pitchFamily="34" charset="0"/>
+                <a:ea typeface="Aptos" pitchFamily="34" charset="-122"/>
+                <a:cs typeface="Aptos" pitchFamily="34" charset="-120"/>
+              </a:rPr>
+              <a:t>Artifact</a:t>
+            </a:r>
+            <a:endParaRPr lang="en-US" sz="1500" dirty="0"/>
           </a:p>
         </p:txBody>
       </p:sp>
@@ -12923,7 +14010,7 @@
                 <a:ea typeface="Aptos" pitchFamily="34" charset="-122"/>
                 <a:cs typeface="Aptos" pitchFamily="34" charset="-120"/>
               </a:rPr>
-              <a:t>© Paula Soper</a:t>
+              <a:t>Â© Paula Soper</a:t>
             </a:r>
             <a:endParaRPr lang="en-US" sz="800" dirty="0"/>
           </a:p>
@@ -12931,7 +14018,46 @@
       </p:sp>
       <p:sp>
         <p:nvSpPr>
-          <p:cNvPr id="7" name="Shape 5"/>
+          <p:cNvPr id="7" name="Text 5"/>
+          <p:cNvSpPr/>
+          <p:nvPr/>
+        </p:nvSpPr>
+        <p:spPr>
+          <a:xfrm>
+            <a:off x="11137392" y="6510528"/>
+            <a:ext cx="411480" cy="201168"/>
+          </a:xfrm>
+          <a:prstGeom prst="rect">
+            <a:avLst/>
+          </a:prstGeom>
+          <a:noFill/>
+          <a:ln/>
+        </p:spPr>
+        <p:txBody>
+          <a:bodyPr wrap="square" lIns="0" tIns="0" rIns="0" bIns="0" rtlCol="0" anchor="ctr"/>
+          <a:lstStyle/>
+          <a:p>
+            <a:pPr algn="r" indent="0" marL="0">
+              <a:buNone/>
+            </a:pPr>
+            <a:r>
+              <a:rPr lang="en-US" sz="900" dirty="0">
+                <a:solidFill>
+                  <a:srgbClr val="5F7181"/>
+                </a:solidFill>
+                <a:latin typeface="Aptos" pitchFamily="34" charset="0"/>
+                <a:ea typeface="Aptos" pitchFamily="34" charset="-122"/>
+                <a:cs typeface="Aptos" pitchFamily="34" charset="-120"/>
+              </a:rPr>
+              <a:t>5</a:t>
+            </a:r>
+            <a:endParaRPr lang="en-US" sz="900" dirty="0"/>
+          </a:p>
+        </p:txBody>
+      </p:sp>
+      <p:sp>
+        <p:nvSpPr>
+          <p:cNvPr id="8" name="Shape 6"/>
           <p:cNvSpPr/>
           <p:nvPr/>
         </p:nvSpPr>
@@ -12956,7 +14082,7 @@
       </p:sp>
       <p:sp>
         <p:nvSpPr>
-          <p:cNvPr id="8" name="Text 6"/>
+          <p:cNvPr id="9" name="Text 7"/>
           <p:cNvSpPr/>
           <p:nvPr/>
         </p:nvSpPr>
@@ -12995,14 +14121,14 @@
       </p:sp>
       <p:sp>
         <p:nvSpPr>
-          <p:cNvPr id="9" name="Text 7"/>
+          <p:cNvPr id="10" name="Text 8"/>
           <p:cNvSpPr/>
           <p:nvPr/>
         </p:nvSpPr>
         <p:spPr>
           <a:xfrm>
             <a:off x="640080" y="621792"/>
-            <a:ext cx="10881360" cy="566928"/>
+            <a:ext cx="10881360" cy="713232"/>
           </a:xfrm>
           <a:prstGeom prst="rect">
             <a:avLst/>
@@ -13020,7 +14146,7 @@
               <a:buNone/>
             </a:pPr>
             <a:r>
-              <a:rPr lang="en-US" sz="2700" b="1" dirty="0">
+              <a:rPr lang="en-US" sz="3400" b="1" dirty="0">
                 <a:solidFill>
                   <a:srgbClr val="003A63"/>
                 </a:solidFill>
@@ -13030,20 +14156,20 @@
               </a:rPr>
               <a:t>Learning Objectives</a:t>
             </a:r>
-            <a:endParaRPr lang="en-US" sz="2700" dirty="0"/>
-          </a:p>
-        </p:txBody>
-      </p:sp>
-      <p:sp>
-        <p:nvSpPr>
-          <p:cNvPr id="10" name="Text 8"/>
-          <p:cNvSpPr/>
-          <p:nvPr/>
-        </p:nvSpPr>
-        <p:spPr>
-          <a:xfrm>
-            <a:off x="868680" y="1417320"/>
-            <a:ext cx="6675120" cy="4434840"/>
+            <a:endParaRPr lang="en-US" sz="3400" dirty="0"/>
+          </a:p>
+        </p:txBody>
+      </p:sp>
+      <p:sp>
+        <p:nvSpPr>
+          <p:cNvPr id="11" name="Text 9"/>
+          <p:cNvSpPr/>
+          <p:nvPr/>
+        </p:nvSpPr>
+        <p:spPr>
+          <a:xfrm>
+            <a:off x="868680" y="1508760"/>
+            <a:ext cx="6537960" cy="4160520"/>
           </a:xfrm>
           <a:prstGeom prst="rect">
             <a:avLst/>
@@ -13058,7 +14184,7 @@
           <a:lstStyle/>
           <a:p>
             <a:r>
-              <a:rPr lang="en-US" sz="1700" dirty="0">
+              <a:rPr lang="en-US" sz="2100" dirty="0">
                 <a:solidFill>
                   <a:srgbClr val="17364A"/>
                 </a:solidFill>
@@ -13068,11 +14194,11 @@
               </a:rPr>
               <a:t>Define AI security in public health operational terms.</a:t>
             </a:r>
-            <a:endParaRPr lang="en-US" sz="1700" dirty="0"/>
-          </a:p>
-          <a:p>
-            <a:r>
-              <a:rPr lang="en-US" sz="1700" dirty="0">
+            <a:endParaRPr lang="en-US" sz="2100" dirty="0"/>
+          </a:p>
+          <a:p>
+            <a:r>
+              <a:rPr lang="en-US" sz="2100" dirty="0">
                 <a:solidFill>
                   <a:srgbClr val="17364A"/>
                 </a:solidFill>
@@ -13080,13 +14206,13 @@
                 <a:ea typeface="Aptos" pitchFamily="34" charset="-122"/>
                 <a:cs typeface="Aptos" pitchFamily="34" charset="-120"/>
               </a:rPr>
-              <a:t>Identify prompt injection, data leakage, sensitive information disclosure, insecure output handling, excessive agency, and.</a:t>
-            </a:r>
-            <a:endParaRPr lang="en-US" sz="1700" dirty="0"/>
-          </a:p>
-          <a:p>
-            <a:r>
-              <a:rPr lang="en-US" sz="1700" dirty="0">
+              <a:t>Identify prompt injection, data leakage, sensitive information disclosure, insecure output handling,.</a:t>
+            </a:r>
+            <a:endParaRPr lang="en-US" sz="2100" dirty="0"/>
+          </a:p>
+          <a:p>
+            <a:r>
+              <a:rPr lang="en-US" sz="2100" dirty="0">
                 <a:solidFill>
                   <a:srgbClr val="17364A"/>
                 </a:solidFill>
@@ -13096,27 +14222,13 @@
               </a:rPr>
               <a:t>Explain why RAG, plugins, APIs, and agentic workflows increase the need for security controls.</a:t>
             </a:r>
-            <a:endParaRPr lang="en-US" sz="1700" dirty="0"/>
-          </a:p>
-          <a:p>
-            <a:r>
-              <a:rPr lang="en-US" sz="1700" dirty="0">
-                <a:solidFill>
-                  <a:srgbClr val="17364A"/>
-                </a:solidFill>
-                <a:latin typeface="Aptos" pitchFamily="34" charset="0"/>
-                <a:ea typeface="Aptos" pitchFamily="34" charset="-122"/>
-                <a:cs typeface="Aptos" pitchFamily="34" charset="-120"/>
-              </a:rPr>
-              <a:t>Apply least privilege, approved-tool use, access controls, logging, testing, and incident response to AI workflows.</a:t>
-            </a:r>
-            <a:endParaRPr lang="en-US" sz="1700" dirty="0"/>
-          </a:p>
-        </p:txBody>
-      </p:sp>
-      <p:sp>
-        <p:nvSpPr>
-          <p:cNvPr id="11" name="Shape 9"/>
+            <a:endParaRPr lang="en-US" sz="2100" dirty="0"/>
+          </a:p>
+        </p:txBody>
+      </p:sp>
+      <p:sp>
+        <p:nvSpPr>
+          <p:cNvPr id="12" name="Shape 10"/>
           <p:cNvSpPr/>
           <p:nvPr/>
         </p:nvSpPr>
@@ -13143,14 +14255,14 @@
       </p:sp>
       <p:sp>
         <p:nvSpPr>
-          <p:cNvPr id="12" name="Text 10"/>
+          <p:cNvPr id="13" name="Text 11"/>
           <p:cNvSpPr/>
           <p:nvPr/>
         </p:nvSpPr>
         <p:spPr>
           <a:xfrm>
             <a:off x="8074152" y="1563624"/>
-            <a:ext cx="2825496" cy="201168"/>
+            <a:ext cx="2825496" cy="256032"/>
           </a:xfrm>
           <a:prstGeom prst="rect">
             <a:avLst/>
@@ -13166,7 +14278,7 @@
               <a:buNone/>
             </a:pPr>
             <a:r>
-              <a:rPr lang="en-US" sz="950" b="1" dirty="0">
+              <a:rPr lang="en-US" sz="1300" b="1" dirty="0">
                 <a:solidFill>
                   <a:srgbClr val="0068B7"/>
                 </a:solidFill>
@@ -13176,20 +14288,20 @@
               </a:rPr>
               <a:t>Key idea</a:t>
             </a:r>
-            <a:endParaRPr lang="en-US" sz="950" dirty="0"/>
-          </a:p>
-        </p:txBody>
-      </p:sp>
-      <p:sp>
-        <p:nvSpPr>
-          <p:cNvPr id="13" name="Text 11"/>
-          <p:cNvSpPr/>
-          <p:nvPr/>
-        </p:nvSpPr>
-        <p:spPr>
-          <a:xfrm>
-            <a:off x="8074152" y="1856232"/>
-            <a:ext cx="2825496" cy="1261872"/>
+            <a:endParaRPr lang="en-US" sz="1300" dirty="0"/>
+          </a:p>
+        </p:txBody>
+      </p:sp>
+      <p:sp>
+        <p:nvSpPr>
+          <p:cNvPr id="14" name="Text 12"/>
+          <p:cNvSpPr/>
+          <p:nvPr/>
+        </p:nvSpPr>
+        <p:spPr>
+          <a:xfrm>
+            <a:off x="8074152" y="1920240"/>
+            <a:ext cx="2825496" cy="1188720"/>
           </a:xfrm>
           <a:prstGeom prst="rect">
             <a:avLst/>
@@ -13207,7 +14319,7 @@
               <a:buNone/>
             </a:pPr>
             <a:r>
-              <a:rPr lang="en-US" sz="1250" dirty="0">
+              <a:rPr lang="en-US" sz="1550" dirty="0">
                 <a:solidFill>
                   <a:srgbClr val="17364A"/>
                 </a:solidFill>
@@ -13217,13 +14329,13 @@
               </a:rPr>
               <a:t>Define AI security in public health operational terms.</a:t>
             </a:r>
-            <a:endParaRPr lang="en-US" sz="1250" dirty="0"/>
-          </a:p>
-        </p:txBody>
-      </p:sp>
-      <p:sp>
-        <p:nvSpPr>
-          <p:cNvPr id="14" name="Shape 12"/>
+            <a:endParaRPr lang="en-US" sz="1550" dirty="0"/>
+          </a:p>
+        </p:txBody>
+      </p:sp>
+      <p:sp>
+        <p:nvSpPr>
+          <p:cNvPr id="15" name="Shape 13"/>
           <p:cNvSpPr/>
           <p:nvPr/>
         </p:nvSpPr>
@@ -13250,14 +14362,14 @@
       </p:sp>
       <p:sp>
         <p:nvSpPr>
-          <p:cNvPr id="15" name="Text 13"/>
+          <p:cNvPr id="16" name="Text 14"/>
           <p:cNvSpPr/>
           <p:nvPr/>
         </p:nvSpPr>
         <p:spPr>
           <a:xfrm>
             <a:off x="8074152" y="3666744"/>
-            <a:ext cx="2825496" cy="201168"/>
+            <a:ext cx="2825496" cy="256032"/>
           </a:xfrm>
           <a:prstGeom prst="rect">
             <a:avLst/>
@@ -13273,7 +14385,7 @@
               <a:buNone/>
             </a:pPr>
             <a:r>
-              <a:rPr lang="en-US" sz="950" b="1" dirty="0">
+              <a:rPr lang="en-US" sz="1300" b="1" dirty="0">
                 <a:solidFill>
                   <a:srgbClr val="0068B7"/>
                 </a:solidFill>
@@ -13283,20 +14395,20 @@
               </a:rPr>
               <a:t>Use this for</a:t>
             </a:r>
-            <a:endParaRPr lang="en-US" sz="950" dirty="0"/>
-          </a:p>
-        </p:txBody>
-      </p:sp>
-      <p:sp>
-        <p:nvSpPr>
-          <p:cNvPr id="16" name="Text 14"/>
-          <p:cNvSpPr/>
-          <p:nvPr/>
-        </p:nvSpPr>
-        <p:spPr>
-          <a:xfrm>
-            <a:off x="8074152" y="3959352"/>
-            <a:ext cx="2825496" cy="1170432"/>
+            <a:endParaRPr lang="en-US" sz="1300" dirty="0"/>
+          </a:p>
+        </p:txBody>
+      </p:sp>
+      <p:sp>
+        <p:nvSpPr>
+          <p:cNvPr id="17" name="Text 15"/>
+          <p:cNvSpPr/>
+          <p:nvPr/>
+        </p:nvSpPr>
+        <p:spPr>
+          <a:xfrm>
+            <a:off x="8074152" y="4023360"/>
+            <a:ext cx="2825496" cy="1097280"/>
           </a:xfrm>
           <a:prstGeom prst="rect">
             <a:avLst/>
@@ -13314,7 +14426,7 @@
               <a:buNone/>
             </a:pPr>
             <a:r>
-              <a:rPr lang="en-US" sz="1250" dirty="0">
+              <a:rPr lang="en-US" sz="1550" dirty="0">
                 <a:solidFill>
                   <a:srgbClr val="17364A"/>
                 </a:solidFill>
@@ -13324,7 +14436,7 @@
               </a:rPr>
               <a:t>Connect the concept to public health decisions, safeguards, documentation, or implementation work.</a:t>
             </a:r>
-            <a:endParaRPr lang="en-US" sz="1250" dirty="0"/>
+            <a:endParaRPr lang="en-US" sz="1550" dirty="0"/>
           </a:p>
         </p:txBody>
       </p:sp>
@@ -13521,7 +14633,7 @@
                 <a:ea typeface="Aptos" pitchFamily="34" charset="-122"/>
                 <a:cs typeface="Aptos" pitchFamily="34" charset="-120"/>
               </a:rPr>
-              <a:t>© Paula Soper</a:t>
+              <a:t>Â© Paula Soper</a:t>
             </a:r>
             <a:endParaRPr lang="en-US" sz="800" dirty="0"/>
           </a:p>
@@ -13535,8 +14647,47 @@
         </p:nvSpPr>
         <p:spPr>
           <a:xfrm>
+            <a:off x="11137392" y="6510528"/>
+            <a:ext cx="411480" cy="201168"/>
+          </a:xfrm>
+          <a:prstGeom prst="rect">
+            <a:avLst/>
+          </a:prstGeom>
+          <a:noFill/>
+          <a:ln/>
+        </p:spPr>
+        <p:txBody>
+          <a:bodyPr wrap="square" lIns="0" tIns="0" rIns="0" bIns="0" rtlCol="0" anchor="ctr"/>
+          <a:lstStyle/>
+          <a:p>
+            <a:pPr algn="r" indent="0" marL="0">
+              <a:buNone/>
+            </a:pPr>
+            <a:r>
+              <a:rPr lang="en-US" sz="900" dirty="0">
+                <a:solidFill>
+                  <a:srgbClr val="5F7181"/>
+                </a:solidFill>
+                <a:latin typeface="Aptos" pitchFamily="34" charset="0"/>
+                <a:ea typeface="Aptos" pitchFamily="34" charset="-122"/>
+                <a:cs typeface="Aptos" pitchFamily="34" charset="-120"/>
+              </a:rPr>
+              <a:t>6</a:t>
+            </a:r>
+            <a:endParaRPr lang="en-US" sz="900" dirty="0"/>
+          </a:p>
+        </p:txBody>
+      </p:sp>
+      <p:sp>
+        <p:nvSpPr>
+          <p:cNvPr id="8" name="Text 6"/>
+          <p:cNvSpPr/>
+          <p:nvPr/>
+        </p:nvSpPr>
+        <p:spPr>
+          <a:xfrm>
             <a:off x="640080" y="658368"/>
-            <a:ext cx="10881360" cy="566928"/>
+            <a:ext cx="10881360" cy="713232"/>
           </a:xfrm>
           <a:prstGeom prst="rect">
             <a:avLst/>
@@ -13554,7 +14705,7 @@
               <a:buNone/>
             </a:pPr>
             <a:r>
-              <a:rPr lang="en-US" sz="2700" b="1" dirty="0">
+              <a:rPr lang="en-US" sz="3400" b="1" dirty="0">
                 <a:solidFill>
                   <a:srgbClr val="003A63"/>
                 </a:solidFill>
@@ -13564,20 +14715,20 @@
               </a:rPr>
               <a:t>Learning Objectives Continued</a:t>
             </a:r>
-            <a:endParaRPr lang="en-US" sz="2700" dirty="0"/>
-          </a:p>
-        </p:txBody>
-      </p:sp>
-      <p:sp>
-        <p:nvSpPr>
-          <p:cNvPr id="8" name="Text 6"/>
-          <p:cNvSpPr/>
-          <p:nvPr/>
-        </p:nvSpPr>
-        <p:spPr>
-          <a:xfrm>
-            <a:off x="868680" y="1417320"/>
-            <a:ext cx="6675120" cy="4434840"/>
+            <a:endParaRPr lang="en-US" sz="3400" dirty="0"/>
+          </a:p>
+        </p:txBody>
+      </p:sp>
+      <p:sp>
+        <p:nvSpPr>
+          <p:cNvPr id="9" name="Text 7"/>
+          <p:cNvSpPr/>
+          <p:nvPr/>
+        </p:nvSpPr>
+        <p:spPr>
+          <a:xfrm>
+            <a:off x="868680" y="1508760"/>
+            <a:ext cx="6537960" cy="4160520"/>
           </a:xfrm>
           <a:prstGeom prst="rect">
             <a:avLst/>
@@ -13592,7 +14743,7 @@
           <a:lstStyle/>
           <a:p>
             <a:r>
-              <a:rPr lang="en-US" sz="1700" dirty="0">
+              <a:rPr lang="en-US" sz="2100" dirty="0">
                 <a:solidFill>
                   <a:srgbClr val="17364A"/>
                 </a:solidFill>
@@ -13602,13 +14753,13 @@
               </a:rPr>
               <a:t>Produce a secure AI workflow checklist.</a:t>
             </a:r>
-            <a:endParaRPr lang="en-US" sz="1700" dirty="0"/>
-          </a:p>
-        </p:txBody>
-      </p:sp>
-      <p:sp>
-        <p:nvSpPr>
-          <p:cNvPr id="9" name="Shape 7"/>
+            <a:endParaRPr lang="en-US" sz="2100" dirty="0"/>
+          </a:p>
+        </p:txBody>
+      </p:sp>
+      <p:sp>
+        <p:nvSpPr>
+          <p:cNvPr id="10" name="Shape 8"/>
           <p:cNvSpPr/>
           <p:nvPr/>
         </p:nvSpPr>
@@ -13635,14 +14786,14 @@
       </p:sp>
       <p:sp>
         <p:nvSpPr>
-          <p:cNvPr id="10" name="Text 8"/>
+          <p:cNvPr id="11" name="Text 9"/>
           <p:cNvSpPr/>
           <p:nvPr/>
         </p:nvSpPr>
         <p:spPr>
           <a:xfrm>
             <a:off x="8074152" y="1563624"/>
-            <a:ext cx="2825496" cy="201168"/>
+            <a:ext cx="2825496" cy="256032"/>
           </a:xfrm>
           <a:prstGeom prst="rect">
             <a:avLst/>
@@ -13658,7 +14809,7 @@
               <a:buNone/>
             </a:pPr>
             <a:r>
-              <a:rPr lang="en-US" sz="950" b="1" dirty="0">
+              <a:rPr lang="en-US" sz="1300" b="1" dirty="0">
                 <a:solidFill>
                   <a:srgbClr val="0068B7"/>
                 </a:solidFill>
@@ -13668,20 +14819,20 @@
               </a:rPr>
               <a:t>Key idea</a:t>
             </a:r>
-            <a:endParaRPr lang="en-US" sz="950" dirty="0"/>
-          </a:p>
-        </p:txBody>
-      </p:sp>
-      <p:sp>
-        <p:nvSpPr>
-          <p:cNvPr id="11" name="Text 9"/>
-          <p:cNvSpPr/>
-          <p:nvPr/>
-        </p:nvSpPr>
-        <p:spPr>
-          <a:xfrm>
-            <a:off x="8074152" y="1856232"/>
-            <a:ext cx="2825496" cy="1261872"/>
+            <a:endParaRPr lang="en-US" sz="1300" dirty="0"/>
+          </a:p>
+        </p:txBody>
+      </p:sp>
+      <p:sp>
+        <p:nvSpPr>
+          <p:cNvPr id="12" name="Text 10"/>
+          <p:cNvSpPr/>
+          <p:nvPr/>
+        </p:nvSpPr>
+        <p:spPr>
+          <a:xfrm>
+            <a:off x="8074152" y="1920240"/>
+            <a:ext cx="2825496" cy="1188720"/>
           </a:xfrm>
           <a:prstGeom prst="rect">
             <a:avLst/>
@@ -13699,7 +14850,7 @@
               <a:buNone/>
             </a:pPr>
             <a:r>
-              <a:rPr lang="en-US" sz="1250" dirty="0">
+              <a:rPr lang="en-US" sz="1550" dirty="0">
                 <a:solidFill>
                   <a:srgbClr val="17364A"/>
                 </a:solidFill>
@@ -13709,13 +14860,13 @@
               </a:rPr>
               <a:t>Produce a secure AI workflow checklist.</a:t>
             </a:r>
-            <a:endParaRPr lang="en-US" sz="1250" dirty="0"/>
-          </a:p>
-        </p:txBody>
-      </p:sp>
-      <p:sp>
-        <p:nvSpPr>
-          <p:cNvPr id="12" name="Shape 10"/>
+            <a:endParaRPr lang="en-US" sz="1550" dirty="0"/>
+          </a:p>
+        </p:txBody>
+      </p:sp>
+      <p:sp>
+        <p:nvSpPr>
+          <p:cNvPr id="13" name="Shape 11"/>
           <p:cNvSpPr/>
           <p:nvPr/>
         </p:nvSpPr>
@@ -13742,14 +14893,14 @@
       </p:sp>
       <p:sp>
         <p:nvSpPr>
-          <p:cNvPr id="13" name="Text 11"/>
+          <p:cNvPr id="14" name="Text 12"/>
           <p:cNvSpPr/>
           <p:nvPr/>
         </p:nvSpPr>
         <p:spPr>
           <a:xfrm>
             <a:off x="8074152" y="3666744"/>
-            <a:ext cx="2825496" cy="201168"/>
+            <a:ext cx="2825496" cy="256032"/>
           </a:xfrm>
           <a:prstGeom prst="rect">
             <a:avLst/>
@@ -13765,7 +14916,7 @@
               <a:buNone/>
             </a:pPr>
             <a:r>
-              <a:rPr lang="en-US" sz="950" b="1" dirty="0">
+              <a:rPr lang="en-US" sz="1300" b="1" dirty="0">
                 <a:solidFill>
                   <a:srgbClr val="0068B7"/>
                 </a:solidFill>
@@ -13775,20 +14926,20 @@
               </a:rPr>
               <a:t>Use this for</a:t>
             </a:r>
-            <a:endParaRPr lang="en-US" sz="950" dirty="0"/>
-          </a:p>
-        </p:txBody>
-      </p:sp>
-      <p:sp>
-        <p:nvSpPr>
-          <p:cNvPr id="14" name="Text 12"/>
-          <p:cNvSpPr/>
-          <p:nvPr/>
-        </p:nvSpPr>
-        <p:spPr>
-          <a:xfrm>
-            <a:off x="8074152" y="3959352"/>
-            <a:ext cx="2825496" cy="1170432"/>
+            <a:endParaRPr lang="en-US" sz="1300" dirty="0"/>
+          </a:p>
+        </p:txBody>
+      </p:sp>
+      <p:sp>
+        <p:nvSpPr>
+          <p:cNvPr id="15" name="Text 13"/>
+          <p:cNvSpPr/>
+          <p:nvPr/>
+        </p:nvSpPr>
+        <p:spPr>
+          <a:xfrm>
+            <a:off x="8074152" y="4023360"/>
+            <a:ext cx="2825496" cy="1097280"/>
           </a:xfrm>
           <a:prstGeom prst="rect">
             <a:avLst/>
@@ -13806,7 +14957,7 @@
               <a:buNone/>
             </a:pPr>
             <a:r>
-              <a:rPr lang="en-US" sz="1250" dirty="0">
+              <a:rPr lang="en-US" sz="1550" dirty="0">
                 <a:solidFill>
                   <a:srgbClr val="17364A"/>
                 </a:solidFill>
@@ -13816,7 +14967,7 @@
               </a:rPr>
               <a:t>Connect the concept to public health decisions, safeguards, documentation, or implementation work.</a:t>
             </a:r>
-            <a:endParaRPr lang="en-US" sz="1250" dirty="0"/>
+            <a:endParaRPr lang="en-US" sz="1550" dirty="0"/>
           </a:p>
         </p:txBody>
       </p:sp>
@@ -14013,7 +15164,7 @@
                 <a:ea typeface="Aptos" pitchFamily="34" charset="-122"/>
                 <a:cs typeface="Aptos" pitchFamily="34" charset="-120"/>
               </a:rPr>
-              <a:t>© Paula Soper</a:t>
+              <a:t>Â© Paula Soper</a:t>
             </a:r>
             <a:endParaRPr lang="en-US" sz="800" dirty="0"/>
           </a:p>
@@ -14021,7 +15172,46 @@
       </p:sp>
       <p:sp>
         <p:nvSpPr>
-          <p:cNvPr id="7" name="Shape 5"/>
+          <p:cNvPr id="7" name="Text 5"/>
+          <p:cNvSpPr/>
+          <p:nvPr/>
+        </p:nvSpPr>
+        <p:spPr>
+          <a:xfrm>
+            <a:off x="11137392" y="6510528"/>
+            <a:ext cx="411480" cy="201168"/>
+          </a:xfrm>
+          <a:prstGeom prst="rect">
+            <a:avLst/>
+          </a:prstGeom>
+          <a:noFill/>
+          <a:ln/>
+        </p:spPr>
+        <p:txBody>
+          <a:bodyPr wrap="square" lIns="0" tIns="0" rIns="0" bIns="0" rtlCol="0" anchor="ctr"/>
+          <a:lstStyle/>
+          <a:p>
+            <a:pPr algn="r" indent="0" marL="0">
+              <a:buNone/>
+            </a:pPr>
+            <a:r>
+              <a:rPr lang="en-US" sz="900" dirty="0">
+                <a:solidFill>
+                  <a:srgbClr val="5F7181"/>
+                </a:solidFill>
+                <a:latin typeface="Aptos" pitchFamily="34" charset="0"/>
+                <a:ea typeface="Aptos" pitchFamily="34" charset="-122"/>
+                <a:cs typeface="Aptos" pitchFamily="34" charset="-120"/>
+              </a:rPr>
+              <a:t>7</a:t>
+            </a:r>
+            <a:endParaRPr lang="en-US" sz="900" dirty="0"/>
+          </a:p>
+        </p:txBody>
+      </p:sp>
+      <p:sp>
+        <p:nvSpPr>
+          <p:cNvPr id="8" name="Shape 6"/>
           <p:cNvSpPr/>
           <p:nvPr/>
         </p:nvSpPr>
@@ -14046,7 +15236,7 @@
       </p:sp>
       <p:sp>
         <p:nvSpPr>
-          <p:cNvPr id="8" name="Text 6"/>
+          <p:cNvPr id="9" name="Text 7"/>
           <p:cNvSpPr/>
           <p:nvPr/>
         </p:nvSpPr>
@@ -14085,14 +15275,14 @@
       </p:sp>
       <p:sp>
         <p:nvSpPr>
-          <p:cNvPr id="9" name="Text 7"/>
+          <p:cNvPr id="10" name="Text 8"/>
           <p:cNvSpPr/>
           <p:nvPr/>
         </p:nvSpPr>
         <p:spPr>
           <a:xfrm>
             <a:off x="640080" y="621792"/>
-            <a:ext cx="10881360" cy="566928"/>
+            <a:ext cx="10881360" cy="713232"/>
           </a:xfrm>
           <a:prstGeom prst="rect">
             <a:avLst/>
@@ -14110,7 +15300,7 @@
               <a:buNone/>
             </a:pPr>
             <a:r>
-              <a:rPr lang="en-US" sz="2700" b="1" dirty="0">
+              <a:rPr lang="en-US" sz="3400" b="1" dirty="0">
                 <a:solidFill>
                   <a:srgbClr val="003A63"/>
                 </a:solidFill>
@@ -14120,20 +15310,20 @@
               </a:rPr>
               <a:t>Module Overview</a:t>
             </a:r>
-            <a:endParaRPr lang="en-US" sz="2700" dirty="0"/>
-          </a:p>
-        </p:txBody>
-      </p:sp>
-      <p:sp>
-        <p:nvSpPr>
-          <p:cNvPr id="10" name="Text 8"/>
-          <p:cNvSpPr/>
-          <p:nvPr/>
-        </p:nvSpPr>
-        <p:spPr>
-          <a:xfrm>
-            <a:off x="868680" y="1417320"/>
-            <a:ext cx="6675120" cy="4434840"/>
+            <a:endParaRPr lang="en-US" sz="3400" dirty="0"/>
+          </a:p>
+        </p:txBody>
+      </p:sp>
+      <p:sp>
+        <p:nvSpPr>
+          <p:cNvPr id="11" name="Text 9"/>
+          <p:cNvSpPr/>
+          <p:nvPr/>
+        </p:nvSpPr>
+        <p:spPr>
+          <a:xfrm>
+            <a:off x="868680" y="1508760"/>
+            <a:ext cx="6537960" cy="4160520"/>
           </a:xfrm>
           <a:prstGeom prst="rect">
             <a:avLst/>
@@ -14148,7 +15338,7 @@
           <a:lstStyle/>
           <a:p>
             <a:r>
-              <a:rPr lang="en-US" sz="1700" dirty="0">
+              <a:rPr lang="en-US" sz="2100" dirty="0">
                 <a:solidFill>
                   <a:srgbClr val="17364A"/>
                 </a:solidFill>
@@ -14156,13 +15346,13 @@
                 <a:ea typeface="Aptos" pitchFamily="34" charset="-122"/>
                 <a:cs typeface="Aptos" pitchFamily="34" charset="-120"/>
               </a:rPr>
-              <a:t>AI security focuses on protecting AI systems, integrations, prompts, outputs, data, users, and connected tools from misuse,.</a:t>
-            </a:r>
-            <a:endParaRPr lang="en-US" sz="1700" dirty="0"/>
-          </a:p>
-          <a:p>
-            <a:r>
-              <a:rPr lang="en-US" sz="1700" dirty="0">
+              <a:t>AI security focuses on protecting AI systems, integrations, prompts, outputs, data, users, and.</a:t>
+            </a:r>
+            <a:endParaRPr lang="en-US" sz="2100" dirty="0"/>
+          </a:p>
+          <a:p>
+            <a:r>
+              <a:rPr lang="en-US" sz="2100" dirty="0">
                 <a:solidFill>
                   <a:srgbClr val="17364A"/>
                 </a:solidFill>
@@ -14170,13 +15360,13 @@
                 <a:ea typeface="Aptos" pitchFamily="34" charset="-122"/>
                 <a:cs typeface="Aptos" pitchFamily="34" charset="-120"/>
               </a:rPr>
-              <a:t>Public health agencies handle sensitive health, demographic, legal, operational, and community information.</a:t>
-            </a:r>
-            <a:endParaRPr lang="en-US" sz="1700" dirty="0"/>
-          </a:p>
-          <a:p>
-            <a:r>
-              <a:rPr lang="en-US" sz="1700" dirty="0">
+              <a:t>Public health agencies handle sensitive health, demographic, legal, operational, and community.</a:t>
+            </a:r>
+            <a:endParaRPr lang="en-US" sz="2100" dirty="0"/>
+          </a:p>
+          <a:p>
+            <a:r>
+              <a:rPr lang="en-US" sz="2100" dirty="0">
                 <a:solidFill>
                   <a:srgbClr val="17364A"/>
                 </a:solidFill>
@@ -14186,27 +15376,13 @@
               </a:rPr>
               <a:t>AI security is therefore a core public health safeguard, not only an IT responsibility.</a:t>
             </a:r>
-            <a:endParaRPr lang="en-US" sz="1700" dirty="0"/>
-          </a:p>
-          <a:p>
-            <a:r>
-              <a:rPr lang="en-US" sz="1700" dirty="0">
-                <a:solidFill>
-                  <a:srgbClr val="17364A"/>
-                </a:solidFill>
-                <a:latin typeface="Aptos" pitchFamily="34" charset="0"/>
-                <a:ea typeface="Aptos" pitchFamily="34" charset="-122"/>
-                <a:cs typeface="Aptos" pitchFamily="34" charset="-120"/>
-              </a:rPr>
-              <a:t>This module introduces security risks that are especially relevant to generative AI, RAG systems, and agentic workflows.</a:t>
-            </a:r>
-            <a:endParaRPr lang="en-US" sz="1700" dirty="0"/>
-          </a:p>
-        </p:txBody>
-      </p:sp>
-      <p:sp>
-        <p:nvSpPr>
-          <p:cNvPr id="11" name="Shape 9"/>
+            <a:endParaRPr lang="en-US" sz="2100" dirty="0"/>
+          </a:p>
+        </p:txBody>
+      </p:sp>
+      <p:sp>
+        <p:nvSpPr>
+          <p:cNvPr id="12" name="Shape 10"/>
           <p:cNvSpPr/>
           <p:nvPr/>
         </p:nvSpPr>
@@ -14233,14 +15409,14 @@
       </p:sp>
       <p:sp>
         <p:nvSpPr>
-          <p:cNvPr id="12" name="Text 10"/>
+          <p:cNvPr id="13" name="Text 11"/>
           <p:cNvSpPr/>
           <p:nvPr/>
         </p:nvSpPr>
         <p:spPr>
           <a:xfrm>
             <a:off x="8074152" y="1563624"/>
-            <a:ext cx="2825496" cy="201168"/>
+            <a:ext cx="2825496" cy="256032"/>
           </a:xfrm>
           <a:prstGeom prst="rect">
             <a:avLst/>
@@ -14256,7 +15432,7 @@
               <a:buNone/>
             </a:pPr>
             <a:r>
-              <a:rPr lang="en-US" sz="950" b="1" dirty="0">
+              <a:rPr lang="en-US" sz="1300" b="1" dirty="0">
                 <a:solidFill>
                   <a:srgbClr val="0068B7"/>
                 </a:solidFill>
@@ -14266,20 +15442,20 @@
               </a:rPr>
               <a:t>Key idea</a:t>
             </a:r>
-            <a:endParaRPr lang="en-US" sz="950" dirty="0"/>
-          </a:p>
-        </p:txBody>
-      </p:sp>
-      <p:sp>
-        <p:nvSpPr>
-          <p:cNvPr id="13" name="Text 11"/>
-          <p:cNvSpPr/>
-          <p:nvPr/>
-        </p:nvSpPr>
-        <p:spPr>
-          <a:xfrm>
-            <a:off x="8074152" y="1856232"/>
-            <a:ext cx="2825496" cy="1261872"/>
+            <a:endParaRPr lang="en-US" sz="1300" dirty="0"/>
+          </a:p>
+        </p:txBody>
+      </p:sp>
+      <p:sp>
+        <p:nvSpPr>
+          <p:cNvPr id="14" name="Text 12"/>
+          <p:cNvSpPr/>
+          <p:nvPr/>
+        </p:nvSpPr>
+        <p:spPr>
+          <a:xfrm>
+            <a:off x="8074152" y="1920240"/>
+            <a:ext cx="2825496" cy="1188720"/>
           </a:xfrm>
           <a:prstGeom prst="rect">
             <a:avLst/>
@@ -14297,7 +15473,7 @@
               <a:buNone/>
             </a:pPr>
             <a:r>
-              <a:rPr lang="en-US" sz="1250" dirty="0">
+              <a:rPr lang="en-US" sz="1550" dirty="0">
                 <a:solidFill>
                   <a:srgbClr val="17364A"/>
                 </a:solidFill>
@@ -14305,15 +15481,15 @@
                 <a:ea typeface="Aptos" pitchFamily="34" charset="-122"/>
                 <a:cs typeface="Aptos" pitchFamily="34" charset="-120"/>
               </a:rPr>
-              <a:t>AI security focuses on protecting AI systems, integrations, prompts, outputs, data, users, and connected tools from misuse,.</a:t>
-            </a:r>
-            <a:endParaRPr lang="en-US" sz="1250" dirty="0"/>
-          </a:p>
-        </p:txBody>
-      </p:sp>
-      <p:sp>
-        <p:nvSpPr>
-          <p:cNvPr id="14" name="Shape 12"/>
+              <a:t>AI security focuses on protecting AI systems, integrations, prompts, outputs, data, users, and.</a:t>
+            </a:r>
+            <a:endParaRPr lang="en-US" sz="1550" dirty="0"/>
+          </a:p>
+        </p:txBody>
+      </p:sp>
+      <p:sp>
+        <p:nvSpPr>
+          <p:cNvPr id="15" name="Shape 13"/>
           <p:cNvSpPr/>
           <p:nvPr/>
         </p:nvSpPr>
@@ -14340,14 +15516,14 @@
       </p:sp>
       <p:sp>
         <p:nvSpPr>
-          <p:cNvPr id="15" name="Text 13"/>
+          <p:cNvPr id="16" name="Text 14"/>
           <p:cNvSpPr/>
           <p:nvPr/>
         </p:nvSpPr>
         <p:spPr>
           <a:xfrm>
             <a:off x="8074152" y="3666744"/>
-            <a:ext cx="2825496" cy="201168"/>
+            <a:ext cx="2825496" cy="256032"/>
           </a:xfrm>
           <a:prstGeom prst="rect">
             <a:avLst/>
@@ -14363,7 +15539,7 @@
               <a:buNone/>
             </a:pPr>
             <a:r>
-              <a:rPr lang="en-US" sz="950" b="1" dirty="0">
+              <a:rPr lang="en-US" sz="1300" b="1" dirty="0">
                 <a:solidFill>
                   <a:srgbClr val="0068B7"/>
                 </a:solidFill>
@@ -14373,20 +15549,20 @@
               </a:rPr>
               <a:t>Use this for</a:t>
             </a:r>
-            <a:endParaRPr lang="en-US" sz="950" dirty="0"/>
-          </a:p>
-        </p:txBody>
-      </p:sp>
-      <p:sp>
-        <p:nvSpPr>
-          <p:cNvPr id="16" name="Text 14"/>
-          <p:cNvSpPr/>
-          <p:nvPr/>
-        </p:nvSpPr>
-        <p:spPr>
-          <a:xfrm>
-            <a:off x="8074152" y="3959352"/>
-            <a:ext cx="2825496" cy="1170432"/>
+            <a:endParaRPr lang="en-US" sz="1300" dirty="0"/>
+          </a:p>
+        </p:txBody>
+      </p:sp>
+      <p:sp>
+        <p:nvSpPr>
+          <p:cNvPr id="17" name="Text 15"/>
+          <p:cNvSpPr/>
+          <p:nvPr/>
+        </p:nvSpPr>
+        <p:spPr>
+          <a:xfrm>
+            <a:off x="8074152" y="4023360"/>
+            <a:ext cx="2825496" cy="1097280"/>
           </a:xfrm>
           <a:prstGeom prst="rect">
             <a:avLst/>
@@ -14404,7 +15580,7 @@
               <a:buNone/>
             </a:pPr>
             <a:r>
-              <a:rPr lang="en-US" sz="1250" dirty="0">
+              <a:rPr lang="en-US" sz="1550" dirty="0">
                 <a:solidFill>
                   <a:srgbClr val="17364A"/>
                 </a:solidFill>
@@ -14414,7 +15590,7 @@
               </a:rPr>
               <a:t>Connect the concept to public health decisions, safeguards, documentation, or implementation work.</a:t>
             </a:r>
-            <a:endParaRPr lang="en-US" sz="1250" dirty="0"/>
+            <a:endParaRPr lang="en-US" sz="1550" dirty="0"/>
           </a:p>
         </p:txBody>
       </p:sp>
@@ -14611,7 +15787,7 @@
                 <a:ea typeface="Aptos" pitchFamily="34" charset="-122"/>
                 <a:cs typeface="Aptos" pitchFamily="34" charset="-120"/>
               </a:rPr>
-              <a:t>© Paula Soper</a:t>
+              <a:t>Â© Paula Soper</a:t>
             </a:r>
             <a:endParaRPr lang="en-US" sz="800" dirty="0"/>
           </a:p>
@@ -14619,7 +15795,46 @@
       </p:sp>
       <p:sp>
         <p:nvSpPr>
-          <p:cNvPr id="7" name="Shape 5"/>
+          <p:cNvPr id="7" name="Text 5"/>
+          <p:cNvSpPr/>
+          <p:nvPr/>
+        </p:nvSpPr>
+        <p:spPr>
+          <a:xfrm>
+            <a:off x="11137392" y="6510528"/>
+            <a:ext cx="411480" cy="201168"/>
+          </a:xfrm>
+          <a:prstGeom prst="rect">
+            <a:avLst/>
+          </a:prstGeom>
+          <a:noFill/>
+          <a:ln/>
+        </p:spPr>
+        <p:txBody>
+          <a:bodyPr wrap="square" lIns="0" tIns="0" rIns="0" bIns="0" rtlCol="0" anchor="ctr"/>
+          <a:lstStyle/>
+          <a:p>
+            <a:pPr algn="r" indent="0" marL="0">
+              <a:buNone/>
+            </a:pPr>
+            <a:r>
+              <a:rPr lang="en-US" sz="900" dirty="0">
+                <a:solidFill>
+                  <a:srgbClr val="5F7181"/>
+                </a:solidFill>
+                <a:latin typeface="Aptos" pitchFamily="34" charset="0"/>
+                <a:ea typeface="Aptos" pitchFamily="34" charset="-122"/>
+                <a:cs typeface="Aptos" pitchFamily="34" charset="-120"/>
+              </a:rPr>
+              <a:t>8</a:t>
+            </a:r>
+            <a:endParaRPr lang="en-US" sz="900" dirty="0"/>
+          </a:p>
+        </p:txBody>
+      </p:sp>
+      <p:sp>
+        <p:nvSpPr>
+          <p:cNvPr id="8" name="Shape 6"/>
           <p:cNvSpPr/>
           <p:nvPr/>
         </p:nvSpPr>
@@ -14644,7 +15859,7 @@
       </p:sp>
       <p:sp>
         <p:nvSpPr>
-          <p:cNvPr id="8" name="Text 6"/>
+          <p:cNvPr id="9" name="Text 7"/>
           <p:cNvSpPr/>
           <p:nvPr/>
         </p:nvSpPr>
@@ -14683,14 +15898,14 @@
       </p:sp>
       <p:sp>
         <p:nvSpPr>
-          <p:cNvPr id="9" name="Text 7"/>
+          <p:cNvPr id="10" name="Text 8"/>
           <p:cNvSpPr/>
           <p:nvPr/>
         </p:nvSpPr>
         <p:spPr>
           <a:xfrm>
             <a:off x="640080" y="621792"/>
-            <a:ext cx="10881360" cy="566928"/>
+            <a:ext cx="10881360" cy="713232"/>
           </a:xfrm>
           <a:prstGeom prst="rect">
             <a:avLst/>
@@ -14708,7 +15923,7 @@
               <a:buNone/>
             </a:pPr>
             <a:r>
-              <a:rPr lang="en-US" sz="2700" b="1" dirty="0">
+              <a:rPr lang="en-US" sz="3400" b="1" dirty="0">
                 <a:solidFill>
                   <a:srgbClr val="003A63"/>
                 </a:solidFill>
@@ -14718,20 +15933,20 @@
               </a:rPr>
               <a:t>Jurisdiction and Agency Policy Note</a:t>
             </a:r>
-            <a:endParaRPr lang="en-US" sz="2700" dirty="0"/>
-          </a:p>
-        </p:txBody>
-      </p:sp>
-      <p:sp>
-        <p:nvSpPr>
-          <p:cNvPr id="10" name="Text 8"/>
-          <p:cNvSpPr/>
-          <p:nvPr/>
-        </p:nvSpPr>
-        <p:spPr>
-          <a:xfrm>
-            <a:off x="868680" y="1417320"/>
-            <a:ext cx="6675120" cy="4434840"/>
+            <a:endParaRPr lang="en-US" sz="3400" dirty="0"/>
+          </a:p>
+        </p:txBody>
+      </p:sp>
+      <p:sp>
+        <p:nvSpPr>
+          <p:cNvPr id="11" name="Text 9"/>
+          <p:cNvSpPr/>
+          <p:nvPr/>
+        </p:nvSpPr>
+        <p:spPr>
+          <a:xfrm>
+            <a:off x="868680" y="1508760"/>
+            <a:ext cx="6537960" cy="4160520"/>
           </a:xfrm>
           <a:prstGeom prst="rect">
             <a:avLst/>
@@ -14746,7 +15961,7 @@
           <a:lstStyle/>
           <a:p>
             <a:r>
-              <a:rPr lang="en-US" sz="1700" dirty="0">
+              <a:rPr lang="en-US" sz="2100" dirty="0">
                 <a:solidFill>
                   <a:srgbClr val="17364A"/>
                 </a:solidFill>
@@ -14756,11 +15971,11 @@
               </a:rPr>
               <a:t>This module provides national-level training guidance for public health agencies and partners.</a:t>
             </a:r>
-            <a:endParaRPr lang="en-US" sz="1700" dirty="0"/>
-          </a:p>
-          <a:p>
-            <a:r>
-              <a:rPr lang="en-US" sz="1700" dirty="0">
+            <a:endParaRPr lang="en-US" sz="2100" dirty="0"/>
+          </a:p>
+          <a:p>
+            <a:r>
+              <a:rPr lang="en-US" sz="2100" dirty="0">
                 <a:solidFill>
                   <a:srgbClr val="17364A"/>
                 </a:solidFill>
@@ -14768,13 +15983,13 @@
                 <a:ea typeface="Aptos" pitchFamily="34" charset="-122"/>
                 <a:cs typeface="Aptos" pitchFamily="34" charset="-120"/>
               </a:rPr>
-              <a:t>It is not legal advice and does not replace review by agency legal counsel, privacy officers, procurement officials, civil.</a:t>
-            </a:r>
-            <a:endParaRPr lang="en-US" sz="1700" dirty="0"/>
-          </a:p>
-          <a:p>
-            <a:r>
-              <a:rPr lang="en-US" sz="1700" dirty="0">
+              <a:t>It is not legal advice and does not replace review by agency legal counsel, privacy officers,.</a:t>
+            </a:r>
+            <a:endParaRPr lang="en-US" sz="2100" dirty="0"/>
+          </a:p>
+          <a:p>
+            <a:r>
+              <a:rPr lang="en-US" sz="2100" dirty="0">
                 <a:solidFill>
                   <a:srgbClr val="17364A"/>
                 </a:solidFill>
@@ -14782,29 +15997,15 @@
                 <a:ea typeface="Aptos" pitchFamily="34" charset="-122"/>
                 <a:cs typeface="Aptos" pitchFamily="34" charset="-120"/>
               </a:rPr>
-              <a:t>Requirements may vary by state, locality, territory, Tribe, agency, funding source, data-sharing agreement, emergency.</a:t>
-            </a:r>
-            <a:endParaRPr lang="en-US" sz="1700" dirty="0"/>
-          </a:p>
-          <a:p>
-            <a:r>
-              <a:rPr lang="en-US" sz="1700" dirty="0">
-                <a:solidFill>
-                  <a:srgbClr val="17364A"/>
-                </a:solidFill>
-                <a:latin typeface="Aptos" pitchFamily="34" charset="0"/>
-                <a:ea typeface="Aptos" pitchFamily="34" charset="-122"/>
-                <a:cs typeface="Aptos" pitchFamily="34" charset="-120"/>
-              </a:rPr>
-              <a:t>Learners should use this module to identify the issues that require review and should confirm applicable requirements.</a:t>
-            </a:r>
-            <a:endParaRPr lang="en-US" sz="1700" dirty="0"/>
-          </a:p>
-        </p:txBody>
-      </p:sp>
-      <p:sp>
-        <p:nvSpPr>
-          <p:cNvPr id="11" name="Shape 9"/>
+              <a:t>Requirements may vary by state, locality, territory, Tribe, agency, funding source, data-sharing.</a:t>
+            </a:r>
+            <a:endParaRPr lang="en-US" sz="2100" dirty="0"/>
+          </a:p>
+        </p:txBody>
+      </p:sp>
+      <p:sp>
+        <p:nvSpPr>
+          <p:cNvPr id="12" name="Shape 10"/>
           <p:cNvSpPr/>
           <p:nvPr/>
         </p:nvSpPr>
@@ -14831,14 +16032,14 @@
       </p:sp>
       <p:sp>
         <p:nvSpPr>
-          <p:cNvPr id="12" name="Text 10"/>
+          <p:cNvPr id="13" name="Text 11"/>
           <p:cNvSpPr/>
           <p:nvPr/>
         </p:nvSpPr>
         <p:spPr>
           <a:xfrm>
             <a:off x="8074152" y="1563624"/>
-            <a:ext cx="2825496" cy="201168"/>
+            <a:ext cx="2825496" cy="256032"/>
           </a:xfrm>
           <a:prstGeom prst="rect">
             <a:avLst/>
@@ -14854,7 +16055,7 @@
               <a:buNone/>
             </a:pPr>
             <a:r>
-              <a:rPr lang="en-US" sz="950" b="1" dirty="0">
+              <a:rPr lang="en-US" sz="1300" b="1" dirty="0">
                 <a:solidFill>
                   <a:srgbClr val="0068B7"/>
                 </a:solidFill>
@@ -14864,20 +16065,20 @@
               </a:rPr>
               <a:t>Key idea</a:t>
             </a:r>
-            <a:endParaRPr lang="en-US" sz="950" dirty="0"/>
-          </a:p>
-        </p:txBody>
-      </p:sp>
-      <p:sp>
-        <p:nvSpPr>
-          <p:cNvPr id="13" name="Text 11"/>
-          <p:cNvSpPr/>
-          <p:nvPr/>
-        </p:nvSpPr>
-        <p:spPr>
-          <a:xfrm>
-            <a:off x="8074152" y="1856232"/>
-            <a:ext cx="2825496" cy="1261872"/>
+            <a:endParaRPr lang="en-US" sz="1300" dirty="0"/>
+          </a:p>
+        </p:txBody>
+      </p:sp>
+      <p:sp>
+        <p:nvSpPr>
+          <p:cNvPr id="14" name="Text 12"/>
+          <p:cNvSpPr/>
+          <p:nvPr/>
+        </p:nvSpPr>
+        <p:spPr>
+          <a:xfrm>
+            <a:off x="8074152" y="1920240"/>
+            <a:ext cx="2825496" cy="1188720"/>
           </a:xfrm>
           <a:prstGeom prst="rect">
             <a:avLst/>
@@ -14895,7 +16096,7 @@
               <a:buNone/>
             </a:pPr>
             <a:r>
-              <a:rPr lang="en-US" sz="1250" dirty="0">
+              <a:rPr lang="en-US" sz="1550" dirty="0">
                 <a:solidFill>
                   <a:srgbClr val="17364A"/>
                 </a:solidFill>
@@ -14905,13 +16106,13 @@
               </a:rPr>
               <a:t>This module provides national-level training guidance for public health agencies and partners.</a:t>
             </a:r>
-            <a:endParaRPr lang="en-US" sz="1250" dirty="0"/>
-          </a:p>
-        </p:txBody>
-      </p:sp>
-      <p:sp>
-        <p:nvSpPr>
-          <p:cNvPr id="14" name="Shape 12"/>
+            <a:endParaRPr lang="en-US" sz="1550" dirty="0"/>
+          </a:p>
+        </p:txBody>
+      </p:sp>
+      <p:sp>
+        <p:nvSpPr>
+          <p:cNvPr id="15" name="Shape 13"/>
           <p:cNvSpPr/>
           <p:nvPr/>
         </p:nvSpPr>
@@ -14938,14 +16139,14 @@
       </p:sp>
       <p:sp>
         <p:nvSpPr>
-          <p:cNvPr id="15" name="Text 13"/>
+          <p:cNvPr id="16" name="Text 14"/>
           <p:cNvSpPr/>
           <p:nvPr/>
         </p:nvSpPr>
         <p:spPr>
           <a:xfrm>
             <a:off x="8074152" y="3666744"/>
-            <a:ext cx="2825496" cy="201168"/>
+            <a:ext cx="2825496" cy="256032"/>
           </a:xfrm>
           <a:prstGeom prst="rect">
             <a:avLst/>
@@ -14961,7 +16162,7 @@
               <a:buNone/>
             </a:pPr>
             <a:r>
-              <a:rPr lang="en-US" sz="950" b="1" dirty="0">
+              <a:rPr lang="en-US" sz="1300" b="1" dirty="0">
                 <a:solidFill>
                   <a:srgbClr val="0068B7"/>
                 </a:solidFill>
@@ -14971,20 +16172,20 @@
               </a:rPr>
               <a:t>Use this for</a:t>
             </a:r>
-            <a:endParaRPr lang="en-US" sz="950" dirty="0"/>
-          </a:p>
-        </p:txBody>
-      </p:sp>
-      <p:sp>
-        <p:nvSpPr>
-          <p:cNvPr id="16" name="Text 14"/>
-          <p:cNvSpPr/>
-          <p:nvPr/>
-        </p:nvSpPr>
-        <p:spPr>
-          <a:xfrm>
-            <a:off x="8074152" y="3959352"/>
-            <a:ext cx="2825496" cy="1170432"/>
+            <a:endParaRPr lang="en-US" sz="1300" dirty="0"/>
+          </a:p>
+        </p:txBody>
+      </p:sp>
+      <p:sp>
+        <p:nvSpPr>
+          <p:cNvPr id="17" name="Text 15"/>
+          <p:cNvSpPr/>
+          <p:nvPr/>
+        </p:nvSpPr>
+        <p:spPr>
+          <a:xfrm>
+            <a:off x="8074152" y="4023360"/>
+            <a:ext cx="2825496" cy="1097280"/>
           </a:xfrm>
           <a:prstGeom prst="rect">
             <a:avLst/>
@@ -15002,7 +16203,7 @@
               <a:buNone/>
             </a:pPr>
             <a:r>
-              <a:rPr lang="en-US" sz="1250" dirty="0">
+              <a:rPr lang="en-US" sz="1550" dirty="0">
                 <a:solidFill>
                   <a:srgbClr val="17364A"/>
                 </a:solidFill>
@@ -15012,7 +16213,7 @@
               </a:rPr>
               <a:t>Connect the concept to public health decisions, safeguards, documentation, or implementation work.</a:t>
             </a:r>
-            <a:endParaRPr lang="en-US" sz="1250" dirty="0"/>
+            <a:endParaRPr lang="en-US" sz="1550" dirty="0"/>
           </a:p>
         </p:txBody>
       </p:sp>
@@ -15209,7 +16410,7 @@
                 <a:ea typeface="Aptos" pitchFamily="34" charset="-122"/>
                 <a:cs typeface="Aptos" pitchFamily="34" charset="-120"/>
               </a:rPr>
-              <a:t>© Paula Soper</a:t>
+              <a:t>Â© Paula Soper</a:t>
             </a:r>
             <a:endParaRPr lang="en-US" sz="800" dirty="0"/>
           </a:p>
@@ -15217,7 +16418,46 @@
       </p:sp>
       <p:sp>
         <p:nvSpPr>
-          <p:cNvPr id="7" name="Shape 5"/>
+          <p:cNvPr id="7" name="Text 5"/>
+          <p:cNvSpPr/>
+          <p:nvPr/>
+        </p:nvSpPr>
+        <p:spPr>
+          <a:xfrm>
+            <a:off x="11137392" y="6510528"/>
+            <a:ext cx="411480" cy="201168"/>
+          </a:xfrm>
+          <a:prstGeom prst="rect">
+            <a:avLst/>
+          </a:prstGeom>
+          <a:noFill/>
+          <a:ln/>
+        </p:spPr>
+        <p:txBody>
+          <a:bodyPr wrap="square" lIns="0" tIns="0" rIns="0" bIns="0" rtlCol="0" anchor="ctr"/>
+          <a:lstStyle/>
+          <a:p>
+            <a:pPr algn="r" indent="0" marL="0">
+              <a:buNone/>
+            </a:pPr>
+            <a:r>
+              <a:rPr lang="en-US" sz="900" dirty="0">
+                <a:solidFill>
+                  <a:srgbClr val="5F7181"/>
+                </a:solidFill>
+                <a:latin typeface="Aptos" pitchFamily="34" charset="0"/>
+                <a:ea typeface="Aptos" pitchFamily="34" charset="-122"/>
+                <a:cs typeface="Aptos" pitchFamily="34" charset="-120"/>
+              </a:rPr>
+              <a:t>9</a:t>
+            </a:r>
+            <a:endParaRPr lang="en-US" sz="900" dirty="0"/>
+          </a:p>
+        </p:txBody>
+      </p:sp>
+      <p:sp>
+        <p:nvSpPr>
+          <p:cNvPr id="8" name="Shape 6"/>
           <p:cNvSpPr/>
           <p:nvPr/>
         </p:nvSpPr>
@@ -15242,7 +16482,7 @@
       </p:sp>
       <p:sp>
         <p:nvSpPr>
-          <p:cNvPr id="8" name="Text 6"/>
+          <p:cNvPr id="9" name="Text 7"/>
           <p:cNvSpPr/>
           <p:nvPr/>
         </p:nvSpPr>
@@ -15281,14 +16521,14 @@
       </p:sp>
       <p:sp>
         <p:nvSpPr>
-          <p:cNvPr id="9" name="Text 7"/>
+          <p:cNvPr id="10" name="Text 8"/>
           <p:cNvSpPr/>
           <p:nvPr/>
         </p:nvSpPr>
         <p:spPr>
           <a:xfrm>
             <a:off x="640080" y="621792"/>
-            <a:ext cx="10881360" cy="566928"/>
+            <a:ext cx="10881360" cy="713232"/>
           </a:xfrm>
           <a:prstGeom prst="rect">
             <a:avLst/>
@@ -15306,7 +16546,7 @@
               <a:buNone/>
             </a:pPr>
             <a:r>
-              <a:rPr lang="en-US" sz="2700" b="1" dirty="0">
+              <a:rPr lang="en-US" sz="3400" b="1" dirty="0">
                 <a:solidFill>
                   <a:srgbClr val="003A63"/>
                 </a:solidFill>
@@ -15316,20 +16556,20 @@
               </a:rPr>
               <a:t>Why This Topic Matters for Public Health AI</a:t>
             </a:r>
-            <a:endParaRPr lang="en-US" sz="2700" dirty="0"/>
-          </a:p>
-        </p:txBody>
-      </p:sp>
-      <p:sp>
-        <p:nvSpPr>
-          <p:cNvPr id="10" name="Text 8"/>
-          <p:cNvSpPr/>
-          <p:nvPr/>
-        </p:nvSpPr>
-        <p:spPr>
-          <a:xfrm>
-            <a:off x="868680" y="1417320"/>
-            <a:ext cx="6675120" cy="4434840"/>
+            <a:endParaRPr lang="en-US" sz="3400" dirty="0"/>
+          </a:p>
+        </p:txBody>
+      </p:sp>
+      <p:sp>
+        <p:nvSpPr>
+          <p:cNvPr id="11" name="Text 9"/>
+          <p:cNvSpPr/>
+          <p:nvPr/>
+        </p:nvSpPr>
+        <p:spPr>
+          <a:xfrm>
+            <a:off x="868680" y="1508760"/>
+            <a:ext cx="6537960" cy="4160520"/>
           </a:xfrm>
           <a:prstGeom prst="rect">
             <a:avLst/>
@@ -15344,7 +16584,7 @@
           <a:lstStyle/>
           <a:p>
             <a:r>
-              <a:rPr lang="en-US" sz="1700" dirty="0">
+              <a:rPr lang="en-US" sz="2100" dirty="0">
                 <a:solidFill>
                   <a:srgbClr val="17364A"/>
                 </a:solidFill>
@@ -15352,13 +16592,13 @@
                 <a:ea typeface="Aptos" pitchFamily="34" charset="-122"/>
                 <a:cs typeface="Aptos" pitchFamily="34" charset="-120"/>
               </a:rPr>
-              <a:t>AI security matters because public health AI tools may process sensitive records, internal protocols, draft communications,.</a:t>
-            </a:r>
-            <a:endParaRPr lang="en-US" sz="1700" dirty="0"/>
-          </a:p>
-          <a:p>
-            <a:r>
-              <a:rPr lang="en-US" sz="1700" dirty="0">
+              <a:t>AI security matters because public health AI tools may process sensitive records, internal protocols,.</a:t>
+            </a:r>
+            <a:endParaRPr lang="en-US" sz="2100" dirty="0"/>
+          </a:p>
+          <a:p>
+            <a:r>
+              <a:rPr lang="en-US" sz="2100" dirty="0">
                 <a:solidFill>
                   <a:srgbClr val="17364A"/>
                 </a:solidFill>
@@ -15366,13 +16606,13 @@
                 <a:ea typeface="Aptos" pitchFamily="34" charset="-122"/>
                 <a:cs typeface="Aptos" pitchFamily="34" charset="-120"/>
               </a:rPr>
-              <a:t>The risks increase when AI tools are connected to email, calendars, case systems, data warehouses, document repositories,.</a:t>
-            </a:r>
-            <a:endParaRPr lang="en-US" sz="1700" dirty="0"/>
-          </a:p>
-          <a:p>
-            <a:r>
-              <a:rPr lang="en-US" sz="1700" dirty="0">
+              <a:t>The risks increase when AI tools are connected to email, calendars, case systems, data warehouses,.</a:t>
+            </a:r>
+            <a:endParaRPr lang="en-US" sz="2100" dirty="0"/>
+          </a:p>
+          <a:p>
+            <a:r>
+              <a:rPr lang="en-US" sz="2100" dirty="0">
                 <a:solidFill>
                   <a:srgbClr val="17364A"/>
                 </a:solidFill>
@@ -15380,29 +16620,15 @@
                 <a:ea typeface="Aptos" pitchFamily="34" charset="-122"/>
                 <a:cs typeface="Aptos" pitchFamily="34" charset="-120"/>
               </a:rPr>
-              <a:t>A security weakness can become a privacy breach, operational disruption, public trust problem, or legal issue.</a:t>
-            </a:r>
-            <a:endParaRPr lang="en-US" sz="1700" dirty="0"/>
-          </a:p>
-          <a:p>
-            <a:r>
-              <a:rPr lang="en-US" sz="1700" dirty="0">
-                <a:solidFill>
-                  <a:srgbClr val="17364A"/>
-                </a:solidFill>
-                <a:latin typeface="Aptos" pitchFamily="34" charset="0"/>
-                <a:ea typeface="Aptos" pitchFamily="34" charset="-122"/>
-                <a:cs typeface="Aptos" pitchFamily="34" charset="-120"/>
-              </a:rPr>
-              <a:t>Prompt injection is particularly important for public health because staff may ask AI tools to process external documents,.</a:t>
-            </a:r>
-            <a:endParaRPr lang="en-US" sz="1700" dirty="0"/>
-          </a:p>
-        </p:txBody>
-      </p:sp>
-      <p:sp>
-        <p:nvSpPr>
-          <p:cNvPr id="11" name="Shape 9"/>
+              <a:t>A security weakness can become a privacy breach, operational disruption, public trust problem, or legal.</a:t>
+            </a:r>
+            <a:endParaRPr lang="en-US" sz="2100" dirty="0"/>
+          </a:p>
+        </p:txBody>
+      </p:sp>
+      <p:sp>
+        <p:nvSpPr>
+          <p:cNvPr id="12" name="Shape 10"/>
           <p:cNvSpPr/>
           <p:nvPr/>
         </p:nvSpPr>
@@ -15429,14 +16655,14 @@
       </p:sp>
       <p:sp>
         <p:nvSpPr>
-          <p:cNvPr id="12" name="Text 10"/>
+          <p:cNvPr id="13" name="Text 11"/>
           <p:cNvSpPr/>
           <p:nvPr/>
         </p:nvSpPr>
         <p:spPr>
           <a:xfrm>
             <a:off x="8074152" y="1563624"/>
-            <a:ext cx="2825496" cy="201168"/>
+            <a:ext cx="2825496" cy="256032"/>
           </a:xfrm>
           <a:prstGeom prst="rect">
             <a:avLst/>
@@ -15452,7 +16678,7 @@
               <a:buNone/>
             </a:pPr>
             <a:r>
-              <a:rPr lang="en-US" sz="950" b="1" dirty="0">
+              <a:rPr lang="en-US" sz="1300" b="1" dirty="0">
                 <a:solidFill>
                   <a:srgbClr val="0068B7"/>
                 </a:solidFill>
@@ -15462,20 +16688,20 @@
               </a:rPr>
               <a:t>Key idea</a:t>
             </a:r>
-            <a:endParaRPr lang="en-US" sz="950" dirty="0"/>
-          </a:p>
-        </p:txBody>
-      </p:sp>
-      <p:sp>
-        <p:nvSpPr>
-          <p:cNvPr id="13" name="Text 11"/>
-          <p:cNvSpPr/>
-          <p:nvPr/>
-        </p:nvSpPr>
-        <p:spPr>
-          <a:xfrm>
-            <a:off x="8074152" y="1856232"/>
-            <a:ext cx="2825496" cy="1261872"/>
+            <a:endParaRPr lang="en-US" sz="1300" dirty="0"/>
+          </a:p>
+        </p:txBody>
+      </p:sp>
+      <p:sp>
+        <p:nvSpPr>
+          <p:cNvPr id="14" name="Text 12"/>
+          <p:cNvSpPr/>
+          <p:nvPr/>
+        </p:nvSpPr>
+        <p:spPr>
+          <a:xfrm>
+            <a:off x="8074152" y="1920240"/>
+            <a:ext cx="2825496" cy="1188720"/>
           </a:xfrm>
           <a:prstGeom prst="rect">
             <a:avLst/>
@@ -15493,7 +16719,7 @@
               <a:buNone/>
             </a:pPr>
             <a:r>
-              <a:rPr lang="en-US" sz="1250" dirty="0">
+              <a:rPr lang="en-US" sz="1550" dirty="0">
                 <a:solidFill>
                   <a:srgbClr val="17364A"/>
                 </a:solidFill>
@@ -15501,15 +16727,15 @@
                 <a:ea typeface="Aptos" pitchFamily="34" charset="-122"/>
                 <a:cs typeface="Aptos" pitchFamily="34" charset="-120"/>
               </a:rPr>
-              <a:t>AI security matters because public health AI tools may process sensitive records, internal protocols, draft communications,.</a:t>
-            </a:r>
-            <a:endParaRPr lang="en-US" sz="1250" dirty="0"/>
-          </a:p>
-        </p:txBody>
-      </p:sp>
-      <p:sp>
-        <p:nvSpPr>
-          <p:cNvPr id="14" name="Shape 12"/>
+              <a:t>AI security matters because public health AI tools may process sensitive records, internal protocols,.</a:t>
+            </a:r>
+            <a:endParaRPr lang="en-US" sz="1550" dirty="0"/>
+          </a:p>
+        </p:txBody>
+      </p:sp>
+      <p:sp>
+        <p:nvSpPr>
+          <p:cNvPr id="15" name="Shape 13"/>
           <p:cNvSpPr/>
           <p:nvPr/>
         </p:nvSpPr>
@@ -15536,14 +16762,14 @@
       </p:sp>
       <p:sp>
         <p:nvSpPr>
-          <p:cNvPr id="15" name="Text 13"/>
+          <p:cNvPr id="16" name="Text 14"/>
           <p:cNvSpPr/>
           <p:nvPr/>
         </p:nvSpPr>
         <p:spPr>
           <a:xfrm>
             <a:off x="8074152" y="3666744"/>
-            <a:ext cx="2825496" cy="201168"/>
+            <a:ext cx="2825496" cy="256032"/>
           </a:xfrm>
           <a:prstGeom prst="rect">
             <a:avLst/>
@@ -15559,7 +16785,7 @@
               <a:buNone/>
             </a:pPr>
             <a:r>
-              <a:rPr lang="en-US" sz="950" b="1" dirty="0">
+              <a:rPr lang="en-US" sz="1300" b="1" dirty="0">
                 <a:solidFill>
                   <a:srgbClr val="0068B7"/>
                 </a:solidFill>
@@ -15569,20 +16795,20 @@
               </a:rPr>
               <a:t>Use this for</a:t>
             </a:r>
-            <a:endParaRPr lang="en-US" sz="950" dirty="0"/>
-          </a:p>
-        </p:txBody>
-      </p:sp>
-      <p:sp>
-        <p:nvSpPr>
-          <p:cNvPr id="16" name="Text 14"/>
-          <p:cNvSpPr/>
-          <p:nvPr/>
-        </p:nvSpPr>
-        <p:spPr>
-          <a:xfrm>
-            <a:off x="8074152" y="3959352"/>
-            <a:ext cx="2825496" cy="1170432"/>
+            <a:endParaRPr lang="en-US" sz="1300" dirty="0"/>
+          </a:p>
+        </p:txBody>
+      </p:sp>
+      <p:sp>
+        <p:nvSpPr>
+          <p:cNvPr id="17" name="Text 15"/>
+          <p:cNvSpPr/>
+          <p:nvPr/>
+        </p:nvSpPr>
+        <p:spPr>
+          <a:xfrm>
+            <a:off x="8074152" y="4023360"/>
+            <a:ext cx="2825496" cy="1097280"/>
           </a:xfrm>
           <a:prstGeom prst="rect">
             <a:avLst/>
@@ -15600,7 +16826,7 @@
               <a:buNone/>
             </a:pPr>
             <a:r>
-              <a:rPr lang="en-US" sz="1250" dirty="0">
+              <a:rPr lang="en-US" sz="1550" dirty="0">
                 <a:solidFill>
                   <a:srgbClr val="17364A"/>
                 </a:solidFill>
@@ -15610,7 +16836,7 @@
               </a:rPr>
               <a:t>Connect the concept to public health decisions, safeguards, documentation, or implementation work.</a:t>
             </a:r>
-            <a:endParaRPr lang="en-US" sz="1250" dirty="0"/>
+            <a:endParaRPr lang="en-US" sz="1550" dirty="0"/>
           </a:p>
         </p:txBody>
       </p:sp>
